--- a/inputs/DaaS_Release_Platform_updated_Flow_FIXED.pptx
+++ b/inputs/DaaS_Release_Platform_updated_Flow_FIXED.pptx
@@ -45873,29 +45873,29 @@
               <a:buNone/>
             </a:pPr>
             <a:r>
-              <a:rPr sz="950" b="1">
+              <a:rPr lang="en-US" sz="820" b="1" dirty="0">
                 <a:solidFill>
                   <a:srgbClr val="2F55C4"/>
                 </a:solidFill>
-                <a:latin typeface="Calibri"/>
+                <a:latin typeface="Calibri" pitchFamily="34" charset="0"/>
               </a:rPr>
               <a:t>DAAS PLATFORM</a:t>
             </a:r>
             <a:r>
-              <a:rPr sz="950" b="0">
+              <a:rPr lang="en-US" sz="820" b="0" dirty="0">
                 <a:solidFill>
                   <a:srgbClr val="A9B6CC"/>
                 </a:solidFill>
-                <a:latin typeface="Calibri"/>
+                <a:latin typeface="Calibri" pitchFamily="34" charset="0"/>
               </a:rPr>
               <a:t>   ·   </a:t>
             </a:r>
             <a:r>
-              <a:rPr sz="950" b="1">
+              <a:rPr lang="en-US" sz="820" b="1" dirty="0">
                 <a:solidFill>
                   <a:srgbClr val="2F55C4"/>
                 </a:solidFill>
-                <a:latin typeface="Calibri"/>
+                <a:latin typeface="Calibri" pitchFamily="34" charset="0"/>
               </a:rPr>
               <a:t>PLATFORM OVERVIEW</a:t>
             </a:r>
@@ -45931,13 +45931,37 @@
               <a:buNone/>
             </a:pPr>
             <a:r>
-              <a:rPr sz="2200" b="1">
+              <a:rPr lang="en-US" sz="1600" b="1" i="0">
                 <a:solidFill>
                   <a:srgbClr val="0F1B35"/>
                 </a:solidFill>
                 <a:latin typeface="Calibri"/>
+                <a:ea typeface="Calibri"/>
+                <a:cs typeface="Calibri"/>
               </a:rPr>
-              <a:t>What Is DaaS?</a:t>
+              <a:t>What </a:t>
+            </a:r>
+            <a:r>
+              <a:rPr lang="en-US" sz="1600" b="1">
+                <a:solidFill>
+                  <a:srgbClr val="0F1B35"/>
+                </a:solidFill>
+                <a:latin typeface="Calibri"/>
+                <a:ea typeface="Calibri"/>
+                <a:cs typeface="Calibri"/>
+              </a:rPr>
+              <a:t>Is</a:t>
+            </a:r>
+            <a:r>
+              <a:rPr lang="en-US" sz="1600" b="1" i="0">
+                <a:solidFill>
+                  <a:srgbClr val="0F1B35"/>
+                </a:solidFill>
+                <a:latin typeface="Calibri"/>
+                <a:ea typeface="Calibri"/>
+                <a:cs typeface="Calibri"/>
+              </a:rPr>
+              <a:t> DaaS?</a:t>
             </a:r>
           </a:p>
         </p:txBody>
@@ -45971,13 +45995,15 @@
               <a:buNone/>
             </a:pPr>
             <a:r>
-              <a:rPr sz="850" b="0">
+              <a:rPr lang="en-US" sz="750" b="0" i="0">
                 <a:solidFill>
                   <a:srgbClr val="5B6584"/>
                 </a:solidFill>
                 <a:latin typeface="Calibri"/>
+                <a:ea typeface="Calibri"/>
+                <a:cs typeface="Calibri"/>
               </a:rPr>
-              <a:t>Deployment as a Service</a:t>
+              <a:t>Deployment as a Service </a:t>
             </a:r>
             <a:endParaRPr lang="en-US" sz="780" b="0" i="0" dirty="0">
               <a:solidFill>
@@ -46017,11 +46043,11 @@
               <a:buNone/>
             </a:pPr>
             <a:r>
-              <a:rPr sz="850" b="0">
+              <a:rPr lang="en-US" sz="780" b="0" i="0" dirty="0">
                 <a:solidFill>
                   <a:srgbClr val="5B6584"/>
                 </a:solidFill>
-                <a:latin typeface="Calibri"/>
+                <a:latin typeface="Calibri" pitchFamily="34" charset="0"/>
               </a:rPr>
               <a:t>2</a:t>
             </a:r>
@@ -46124,20 +46150,20 @@
               <a:buNone/>
             </a:pPr>
             <a:r>
-              <a:rPr sz="1150" b="1">
+              <a:rPr lang="en-US" sz="980" b="1" dirty="0">
                 <a:solidFill>
                   <a:srgbClr val="0F1B35"/>
                 </a:solidFill>
-                <a:latin typeface="Calibri"/>
+                <a:latin typeface="Calibri" pitchFamily="34" charset="0"/>
               </a:rPr>
               <a:t>ADaaS — Agentic Deployment as a Service, or DaaS for short — </a:t>
             </a:r>
             <a:r>
-              <a:rPr sz="1150" b="0">
-                <a:solidFill>
-                  <a:srgbClr val="0F1B35"/>
-                </a:solidFill>
-                <a:latin typeface="Calibri"/>
+              <a:rPr lang="en-US" sz="980" b="0" dirty="0">
+                <a:solidFill>
+                  <a:srgbClr val="1B1F3B"/>
+                </a:solidFill>
+                <a:latin typeface="Calibri" pitchFamily="34" charset="0"/>
               </a:rPr>
               <a:t>is an AI-driven release automation platform — one governed engine that runs every deployment.</a:t>
             </a:r>
@@ -46171,29 +46197,29 @@
               <a:buNone/>
             </a:pPr>
             <a:r>
-              <a:rPr sz="1050" b="0">
+              <a:rPr lang="en-US" sz="880" b="0" dirty="0">
                 <a:solidFill>
                   <a:srgbClr val="5B6584"/>
                 </a:solidFill>
-                <a:latin typeface="Calibri"/>
+                <a:latin typeface="Calibri" pitchFamily="34" charset="0"/>
               </a:rPr>
               <a:t>It replaces manual, error-prone releases with an </a:t>
             </a:r>
             <a:r>
-              <a:rPr sz="1050" b="1">
-                <a:solidFill>
-                  <a:srgbClr val="0F1B35"/>
-                </a:solidFill>
-                <a:latin typeface="Calibri"/>
+              <a:rPr lang="en-US" sz="880" b="1" dirty="0">
+                <a:solidFill>
+                  <a:srgbClr val="5B6584"/>
+                </a:solidFill>
+                <a:latin typeface="Calibri" pitchFamily="34" charset="0"/>
               </a:rPr>
               <a:t>agent-orchestrated pipeline</a:t>
             </a:r>
             <a:r>
-              <a:rPr sz="1050" b="0">
+              <a:rPr lang="en-US" sz="880" b="0" dirty="0">
                 <a:solidFill>
                   <a:srgbClr val="5B6584"/>
                 </a:solidFill>
-                <a:latin typeface="Calibri"/>
+                <a:latin typeface="Calibri" pitchFamily="34" charset="0"/>
               </a:rPr>
               <a:t> — the same core every time, configured differently for every client. Nothing about the workflow is hard-coded.</a:t>
             </a:r>
@@ -46229,11 +46255,11 @@
               <a:buNone/>
             </a:pPr>
             <a:r>
-              <a:rPr sz="900" b="1">
+              <a:rPr lang="en-US" sz="730" b="1" i="0" spc="130" dirty="0">
                 <a:solidFill>
                   <a:srgbClr val="5B6584"/>
                 </a:solidFill>
-                <a:latin typeface="Calibri"/>
+                <a:latin typeface="Calibri" pitchFamily="34" charset="0"/>
               </a:rPr>
               <a:t>SET UP ONCE PER CLIENT   →</a:t>
             </a:r>
@@ -46269,11 +46295,11 @@
               <a:buNone/>
             </a:pPr>
             <a:r>
-              <a:rPr sz="950" b="1">
+              <a:rPr lang="en-US" sz="760" b="1" i="0" spc="150" dirty="0">
                 <a:solidFill>
                   <a:srgbClr val="0F1B35"/>
                 </a:solidFill>
-                <a:latin typeface="Calibri"/>
+                <a:latin typeface="Calibri" pitchFamily="34" charset="0"/>
               </a:rPr>
               <a:t>THE CORE</a:t>
             </a:r>
@@ -46309,11 +46335,11 @@
               <a:buNone/>
             </a:pPr>
             <a:r>
-              <a:rPr sz="850" b="1">
-                <a:solidFill>
-                  <a:srgbClr val="7887A5"/>
-                </a:solidFill>
-                <a:latin typeface="Calibri"/>
+              <a:rPr lang="en-US" sz="680" b="1" i="0" spc="90" dirty="0">
+                <a:solidFill>
+                  <a:srgbClr val="8A97AE"/>
+                </a:solidFill>
+                <a:latin typeface="Calibri" pitchFamily="34" charset="0"/>
               </a:rPr>
               <a:t>EVERY RELEASE RUNS HERE</a:t>
             </a:r>
@@ -46349,11 +46375,11 @@
               <a:buNone/>
             </a:pPr>
             <a:r>
-              <a:rPr sz="900" b="1">
+              <a:rPr lang="en-US" sz="730" b="1" i="0" spc="130" dirty="0">
                 <a:solidFill>
                   <a:srgbClr val="5B6584"/>
                 </a:solidFill>
-                <a:latin typeface="Calibri"/>
+                <a:latin typeface="Calibri" pitchFamily="34" charset="0"/>
               </a:rPr>
               <a:t>←   GOVERNS &amp; REPORTS</a:t>
             </a:r>
@@ -46447,11 +46473,11 @@
               <a:buNone/>
             </a:pPr>
             <a:r>
-              <a:rPr sz="950" b="1">
+              <a:rPr lang="en-US" sz="690" b="1" i="0" dirty="0">
                 <a:solidFill>
                   <a:srgbClr val="FFFFFF"/>
                 </a:solidFill>
-                <a:latin typeface="Calibri"/>
+                <a:latin typeface="Calibri" pitchFamily="34" charset="0"/>
               </a:rPr>
               <a:t>1</a:t>
             </a:r>
@@ -46487,11 +46513,11 @@
               <a:buNone/>
             </a:pPr>
             <a:r>
-              <a:rPr sz="1250" b="1">
+              <a:rPr lang="en-US" sz="1010" b="1" i="0" dirty="0">
                 <a:solidFill>
                   <a:srgbClr val="0F1B35"/>
                 </a:solidFill>
-                <a:latin typeface="Calibri"/>
+                <a:latin typeface="Calibri" pitchFamily="34" charset="0"/>
               </a:rPr>
               <a:t>Application</a:t>
             </a:r>
@@ -46527,11 +46553,11 @@
               <a:buNone/>
             </a:pPr>
             <a:r>
-              <a:rPr sz="980" b="0">
+              <a:rPr lang="en-US" sz="750" b="0" i="0" dirty="0">
                 <a:solidFill>
                   <a:srgbClr val="5B6584"/>
                 </a:solidFill>
-                <a:latin typeface="Calibri"/>
+                <a:latin typeface="Calibri" pitchFamily="34" charset="0"/>
               </a:rPr>
               <a:t>Where a release enters — change ticket, pipeline trigger, or manual run.</a:t>
             </a:r>
@@ -46676,11 +46702,11 @@
               <a:buNone/>
             </a:pPr>
             <a:r>
-              <a:rPr sz="950" b="1">
+              <a:rPr lang="en-US" sz="690" b="1" i="0" dirty="0">
                 <a:solidFill>
                   <a:srgbClr val="FFFFFF"/>
                 </a:solidFill>
-                <a:latin typeface="Calibri"/>
+                <a:latin typeface="Calibri" pitchFamily="34" charset="0"/>
               </a:rPr>
               <a:t>2</a:t>
             </a:r>
@@ -46716,11 +46742,11 @@
               <a:buNone/>
             </a:pPr>
             <a:r>
-              <a:rPr sz="1250" b="1">
+              <a:rPr lang="en-US" sz="1010" b="1" i="0" dirty="0">
                 <a:solidFill>
                   <a:srgbClr val="0F1B35"/>
                 </a:solidFill>
-                <a:latin typeface="Calibri"/>
+                <a:latin typeface="Calibri" pitchFamily="34" charset="0"/>
               </a:rPr>
               <a:t>Workflow</a:t>
             </a:r>
@@ -46756,11 +46782,11 @@
               <a:buNone/>
             </a:pPr>
             <a:r>
-              <a:rPr sz="980" b="0">
-                <a:solidFill>
-                  <a:srgbClr val="5B6584"/>
-                </a:solidFill>
-                <a:latin typeface="Calibri"/>
+              <a:rPr lang="en-US" sz="750" b="0" i="0" dirty="0">
+                <a:solidFill>
+                  <a:srgbClr val="2E4270"/>
+                </a:solidFill>
+                <a:latin typeface="Calibri" pitchFamily="34" charset="0"/>
               </a:rPr>
               <a:t>Resolves which phases, approvals and templates apply to this release.</a:t>
             </a:r>
@@ -46905,11 +46931,11 @@
               <a:buNone/>
             </a:pPr>
             <a:r>
-              <a:rPr sz="950" b="1">
+              <a:rPr lang="en-US" sz="690" b="1" i="0" dirty="0">
                 <a:solidFill>
                   <a:srgbClr val="0F1B35"/>
                 </a:solidFill>
-                <a:latin typeface="Calibri"/>
+                <a:latin typeface="Calibri" pitchFamily="34" charset="0"/>
               </a:rPr>
               <a:t>3</a:t>
             </a:r>
@@ -46945,11 +46971,11 @@
               <a:buNone/>
             </a:pPr>
             <a:r>
-              <a:rPr sz="1250" b="1">
+              <a:rPr lang="en-US" sz="1010" b="1" i="0" dirty="0">
                 <a:solidFill>
                   <a:srgbClr val="FFFFFF"/>
                 </a:solidFill>
-                <a:latin typeface="Calibri"/>
+                <a:latin typeface="Calibri" pitchFamily="34" charset="0"/>
               </a:rPr>
               <a:t>Agents &amp; Orchestration</a:t>
             </a:r>
@@ -46985,13 +47011,26 @@
               <a:buNone/>
             </a:pPr>
             <a:r>
-              <a:rPr sz="919" b="0">
-                <a:solidFill>
-                  <a:srgbClr val="D9E5F8"/>
+              <a:rPr lang="en-US" sz="700">
+                <a:solidFill>
+                  <a:srgbClr val="E1EAF9"/>
                 </a:solidFill>
                 <a:latin typeface="Calibri"/>
+                <a:ea typeface="Calibri"/>
+                <a:cs typeface="Calibri"/>
               </a:rPr>
-              <a:t>Specialized agents run in sequence on every release.</a:t>
+              <a:t>Specialized</a:t>
+            </a:r>
+            <a:r>
+              <a:rPr lang="en-US" sz="700" b="0" i="0" dirty="0">
+                <a:solidFill>
+                  <a:srgbClr val="E1EAF9"/>
+                </a:solidFill>
+                <a:latin typeface="Calibri"/>
+                <a:ea typeface="Calibri"/>
+                <a:cs typeface="Calibri"/>
+              </a:rPr>
+              <a:t> agents run in sequence on every release.</a:t>
             </a:r>
           </a:p>
         </p:txBody>
@@ -47058,11 +47097,11 @@
               <a:buNone/>
             </a:pPr>
             <a:r>
-              <a:rPr sz="850" b="1">
-                <a:solidFill>
-                  <a:srgbClr val="FFFFFF"/>
-                </a:solidFill>
-                <a:latin typeface="Calibri"/>
+              <a:rPr lang="en-US" sz="670" b="0" i="0" dirty="0">
+                <a:solidFill>
+                  <a:srgbClr val="E4ECFA"/>
+                </a:solidFill>
+                <a:latin typeface="Calibri" pitchFamily="34" charset="0"/>
               </a:rPr>
               <a:t>Scan</a:t>
             </a:r>
@@ -47131,11 +47170,11 @@
               <a:buNone/>
             </a:pPr>
             <a:r>
-              <a:rPr sz="850" b="1">
-                <a:solidFill>
-                  <a:srgbClr val="FFFFFF"/>
-                </a:solidFill>
-                <a:latin typeface="Calibri"/>
+              <a:rPr lang="en-US" sz="670" b="0" i="0" dirty="0">
+                <a:solidFill>
+                  <a:srgbClr val="E4ECFA"/>
+                </a:solidFill>
+                <a:latin typeface="Calibri" pitchFamily="34" charset="0"/>
               </a:rPr>
               <a:t>Compare</a:t>
             </a:r>
@@ -47204,11 +47243,11 @@
               <a:buNone/>
             </a:pPr>
             <a:r>
-              <a:rPr sz="850" b="1">
-                <a:solidFill>
-                  <a:srgbClr val="FFFFFF"/>
-                </a:solidFill>
-                <a:latin typeface="Calibri"/>
+              <a:rPr lang="en-US" sz="670" b="0" i="0" dirty="0">
+                <a:solidFill>
+                  <a:srgbClr val="E4ECFA"/>
+                </a:solidFill>
+                <a:latin typeface="Calibri" pitchFamily="34" charset="0"/>
               </a:rPr>
               <a:t>Dependency</a:t>
             </a:r>
@@ -47277,11 +47316,11 @@
               <a:buNone/>
             </a:pPr>
             <a:r>
-              <a:rPr sz="850" b="1">
-                <a:solidFill>
-                  <a:srgbClr val="FFFFFF"/>
-                </a:solidFill>
-                <a:latin typeface="Calibri"/>
+              <a:rPr lang="en-US" sz="670" b="0" i="0" dirty="0">
+                <a:solidFill>
+                  <a:srgbClr val="E4ECFA"/>
+                </a:solidFill>
+                <a:latin typeface="Calibri" pitchFamily="34" charset="0"/>
               </a:rPr>
               <a:t>Readiness</a:t>
             </a:r>
@@ -47350,11 +47389,11 @@
               <a:buNone/>
             </a:pPr>
             <a:r>
-              <a:rPr sz="850" b="1">
-                <a:solidFill>
-                  <a:srgbClr val="FFFFFF"/>
-                </a:solidFill>
-                <a:latin typeface="Calibri"/>
+              <a:rPr lang="en-US" sz="670" b="0" i="0" dirty="0">
+                <a:solidFill>
+                  <a:srgbClr val="E4ECFA"/>
+                </a:solidFill>
+                <a:latin typeface="Calibri" pitchFamily="34" charset="0"/>
               </a:rPr>
               <a:t>Risk</a:t>
             </a:r>
@@ -47423,11 +47462,11 @@
               <a:buNone/>
             </a:pPr>
             <a:r>
-              <a:rPr sz="850" b="1">
-                <a:solidFill>
-                  <a:srgbClr val="FFFFFF"/>
-                </a:solidFill>
-                <a:latin typeface="Calibri"/>
+              <a:rPr lang="en-US" sz="670" b="0" i="0" dirty="0">
+                <a:solidFill>
+                  <a:srgbClr val="E4ECFA"/>
+                </a:solidFill>
+                <a:latin typeface="Calibri" pitchFamily="34" charset="0"/>
               </a:rPr>
               <a:t>Validate</a:t>
             </a:r>
@@ -47572,11 +47611,11 @@
               <a:buNone/>
             </a:pPr>
             <a:r>
-              <a:rPr sz="950" b="1">
+              <a:rPr lang="en-US" sz="690" b="1" i="0" dirty="0">
                 <a:solidFill>
                   <a:srgbClr val="0F1B35"/>
                 </a:solidFill>
-                <a:latin typeface="Calibri"/>
+                <a:latin typeface="Calibri" pitchFamily="34" charset="0"/>
               </a:rPr>
               <a:t>4</a:t>
             </a:r>
@@ -47612,11 +47651,11 @@
               <a:buNone/>
             </a:pPr>
             <a:r>
-              <a:rPr sz="1250" b="1">
+              <a:rPr lang="en-US" sz="1010" b="1" i="0" dirty="0">
                 <a:solidFill>
                   <a:srgbClr val="FFFFFF"/>
                 </a:solidFill>
-                <a:latin typeface="Calibri"/>
+                <a:latin typeface="Calibri" pitchFamily="34" charset="0"/>
               </a:rPr>
               <a:t>Infrastructure &amp; Cloud</a:t>
             </a:r>
@@ -47652,11 +47691,11 @@
               <a:buNone/>
             </a:pPr>
             <a:r>
-              <a:rPr sz="980" b="0">
-                <a:solidFill>
-                  <a:srgbClr val="D9E5F8"/>
-                </a:solidFill>
-                <a:latin typeface="Calibri"/>
+              <a:rPr lang="en-US" sz="750" b="0" i="0" dirty="0">
+                <a:solidFill>
+                  <a:srgbClr val="CADCFC"/>
+                </a:solidFill>
+                <a:latin typeface="Calibri" pitchFamily="34" charset="0"/>
               </a:rPr>
               <a:t>The live cloud resources and pipelines the change is applied to — the base.</a:t>
             </a:r>
@@ -47792,11 +47831,11 @@
               <a:buNone/>
             </a:pPr>
             <a:r>
-              <a:rPr sz="1100" b="1">
+              <a:rPr lang="en-US" sz="890" b="1" i="0" dirty="0">
                 <a:solidFill>
                   <a:srgbClr val="FFFFFF"/>
                 </a:solidFill>
-                <a:latin typeface="Calibri"/>
+                <a:latin typeface="Calibri" pitchFamily="34" charset="0"/>
               </a:rPr>
               <a:t>1</a:t>
             </a:r>
@@ -47832,11 +47871,11 @@
               <a:buNone/>
             </a:pPr>
             <a:r>
-              <a:rPr sz="1400" b="1">
-                <a:solidFill>
-                  <a:srgbClr val="B67700"/>
-                </a:solidFill>
-                <a:latin typeface="Calibri"/>
+              <a:rPr lang="en-US" sz="1120" b="1" i="0" dirty="0">
+                <a:solidFill>
+                  <a:srgbClr val="B8790F"/>
+                </a:solidFill>
+                <a:latin typeface="Calibri" pitchFamily="34" charset="0"/>
               </a:rPr>
               <a:t>Analyse</a:t>
             </a:r>
@@ -47899,11 +47938,11 @@
               <a:buChar char="•"/>
             </a:pPr>
             <a:r>
-              <a:rPr sz="1000" b="0">
+              <a:rPr lang="en-US" sz="820" dirty="0">
                 <a:solidFill>
                   <a:srgbClr val="1B1F3B"/>
                 </a:solidFill>
-                <a:latin typeface="Calibri"/>
+                <a:latin typeface="Calibri" pitchFamily="34" charset="0"/>
               </a:rPr>
               <a:t>Maps the client’s cloud, CI/CD, ticketing and approval chain before anything is wired.</a:t>
             </a:r>
@@ -47920,11 +47959,11 @@
               <a:buChar char="•"/>
             </a:pPr>
             <a:r>
-              <a:rPr sz="1000" b="0">
+              <a:rPr lang="en-US" sz="820" dirty="0">
                 <a:solidFill>
                   <a:srgbClr val="1B1F3B"/>
                 </a:solidFill>
-                <a:latin typeface="Calibri"/>
+                <a:latin typeface="Calibri" pitchFamily="34" charset="0"/>
               </a:rPr>
               <a:t>Output is the Onboarding Blueprint that drives every later phase.</a:t>
             </a:r>
@@ -48080,11 +48119,11 @@
               <a:buNone/>
             </a:pPr>
             <a:r>
-              <a:rPr sz="1100" b="1">
+              <a:rPr lang="en-US" sz="890" b="1" i="0" dirty="0">
                 <a:solidFill>
                   <a:srgbClr val="FFFFFF"/>
                 </a:solidFill>
-                <a:latin typeface="Calibri"/>
+                <a:latin typeface="Calibri" pitchFamily="34" charset="0"/>
               </a:rPr>
               <a:t>2</a:t>
             </a:r>
@@ -48120,11 +48159,11 @@
               <a:buNone/>
             </a:pPr>
             <a:r>
-              <a:rPr sz="1400" b="1">
-                <a:solidFill>
-                  <a:srgbClr val="1E50AF"/>
-                </a:solidFill>
-                <a:latin typeface="Calibri"/>
+              <a:rPr lang="en-US" sz="1120" b="1" i="0" dirty="0">
+                <a:solidFill>
+                  <a:srgbClr val="2C4C9B"/>
+                </a:solidFill>
+                <a:latin typeface="Calibri" pitchFamily="34" charset="0"/>
               </a:rPr>
               <a:t>Connect</a:t>
             </a:r>
@@ -48187,11 +48226,11 @@
               <a:buChar char="•"/>
             </a:pPr>
             <a:r>
-              <a:rPr sz="1000" b="0">
+              <a:rPr lang="en-US" sz="820" dirty="0">
                 <a:solidFill>
                   <a:srgbClr val="1B1F3B"/>
                 </a:solidFill>
-                <a:latin typeface="Calibri"/>
+                <a:latin typeface="Calibri" pitchFamily="34" charset="0"/>
               </a:rPr>
               <a:t>Registers cloud accounts, repos, CI/CD, ticketing and notification channels — once.</a:t>
             </a:r>
@@ -48208,11 +48247,11 @@
               <a:buChar char="•"/>
             </a:pPr>
             <a:r>
-              <a:rPr sz="1000" b="0">
+              <a:rPr lang="en-US" sz="820" dirty="0">
                 <a:solidFill>
                   <a:srgbClr val="1B1F3B"/>
                 </a:solidFill>
-                <a:latin typeface="Calibri"/>
+                <a:latin typeface="Calibri" pitchFamily="34" charset="0"/>
               </a:rPr>
               <a:t>No credentials stored; auth via Managed Identity or Service Principal.</a:t>
             </a:r>
@@ -48368,11 +48407,11 @@
               <a:buNone/>
             </a:pPr>
             <a:r>
-              <a:rPr sz="1100" b="1">
+              <a:rPr lang="en-US" sz="890" b="1" i="0" dirty="0">
                 <a:solidFill>
                   <a:srgbClr val="FFFFFF"/>
                 </a:solidFill>
-                <a:latin typeface="Calibri"/>
+                <a:latin typeface="Calibri" pitchFamily="34" charset="0"/>
               </a:rPr>
               <a:t>3</a:t>
             </a:r>
@@ -48408,11 +48447,11 @@
               <a:buNone/>
             </a:pPr>
             <a:r>
-              <a:rPr sz="1400" b="1">
-                <a:solidFill>
-                  <a:srgbClr val="78288C"/>
-                </a:solidFill>
-                <a:latin typeface="Calibri"/>
+              <a:rPr lang="en-US" sz="1120" b="1" i="0" dirty="0">
+                <a:solidFill>
+                  <a:srgbClr val="7A3FB0"/>
+                </a:solidFill>
+                <a:latin typeface="Calibri" pitchFamily="34" charset="0"/>
               </a:rPr>
               <a:t>Configure</a:t>
             </a:r>
@@ -48475,11 +48514,11 @@
               <a:buChar char="•"/>
             </a:pPr>
             <a:r>
-              <a:rPr sz="1000" b="0">
+              <a:rPr lang="en-US" sz="820" dirty="0">
                 <a:solidFill>
                   <a:srgbClr val="1B1F3B"/>
                 </a:solidFill>
-                <a:latin typeface="Calibri"/>
+                <a:latin typeface="Calibri" pitchFamily="34" charset="0"/>
               </a:rPr>
               <a:t>Approval chains, deployment templates, promotion and validation rules.</a:t>
             </a:r>
@@ -48496,11 +48535,11 @@
               <a:buChar char="•"/>
             </a:pPr>
             <a:r>
-              <a:rPr sz="1000" b="0">
+              <a:rPr lang="en-US" sz="820" dirty="0">
                 <a:solidFill>
                   <a:srgbClr val="1B1F3B"/>
                 </a:solidFill>
-                <a:latin typeface="Calibri"/>
+                <a:latin typeface="Calibri" pitchFamily="34" charset="0"/>
               </a:rPr>
               <a:t>Defined as configuration, not code — changes apply to the very next release.</a:t>
             </a:r>
@@ -48656,11 +48695,11 @@
               <a:buNone/>
             </a:pPr>
             <a:r>
-              <a:rPr sz="1100" b="1">
+              <a:rPr lang="en-US" sz="890" b="1" i="0" dirty="0">
                 <a:solidFill>
                   <a:srgbClr val="FFFFFF"/>
                 </a:solidFill>
-                <a:latin typeface="Calibri"/>
+                <a:latin typeface="Calibri" pitchFamily="34" charset="0"/>
               </a:rPr>
               <a:t>4</a:t>
             </a:r>
@@ -48696,11 +48735,11 @@
               <a:buNone/>
             </a:pPr>
             <a:r>
-              <a:rPr sz="1400" b="1">
-                <a:solidFill>
-                  <a:srgbClr val="B42846"/>
-                </a:solidFill>
-                <a:latin typeface="Calibri"/>
+              <a:rPr lang="en-US" sz="1120" b="1" i="0" dirty="0">
+                <a:solidFill>
+                  <a:srgbClr val="AA3E6E"/>
+                </a:solidFill>
+                <a:latin typeface="Calibri" pitchFamily="34" charset="0"/>
               </a:rPr>
               <a:t>Observe</a:t>
             </a:r>
@@ -48763,11 +48802,11 @@
               <a:buChar char="•"/>
             </a:pPr>
             <a:r>
-              <a:rPr sz="1000" b="0">
+              <a:rPr lang="en-US" sz="820" dirty="0">
                 <a:solidFill>
                   <a:srgbClr val="1B1F3B"/>
                 </a:solidFill>
-                <a:latin typeface="Calibri"/>
+                <a:latin typeface="Calibri" pitchFamily="34" charset="0"/>
               </a:rPr>
               <a:t>Live dashboards, health signals, full audit trail and exportable reports.</a:t>
             </a:r>
@@ -48784,11 +48823,11 @@
               <a:buChar char="•"/>
             </a:pPr>
             <a:r>
-              <a:rPr sz="1000" b="0">
+              <a:rPr lang="en-US" sz="820" dirty="0">
                 <a:solidFill>
                   <a:srgbClr val="1B1F3B"/>
                 </a:solidFill>
-                <a:latin typeface="Calibri"/>
+                <a:latin typeface="Calibri" pitchFamily="34" charset="0"/>
               </a:rPr>
               <a:t>Every action traces back to who approved what, and when.</a:t>
             </a:r>
@@ -48906,11 +48945,11 @@
               <a:buNone/>
             </a:pPr>
             <a:r>
-              <a:rPr sz="1100" b="0">
+              <a:rPr lang="en-US" sz="880" b="0" i="0" dirty="0">
                 <a:solidFill>
                   <a:srgbClr val="FFFFFF"/>
                 </a:solidFill>
-                <a:latin typeface="Calibri"/>
+                <a:latin typeface="Calibri" pitchFamily="34" charset="0"/>
               </a:rPr>
               <a:t>One engine, always — every change resolves down through the same governed, agent-driven stack.</a:t>
             </a:r>
@@ -48979,11 +49018,11 @@
               <a:buNone/>
             </a:pPr>
             <a:r>
-              <a:rPr sz="1450" b="1">
-                <a:solidFill>
-                  <a:srgbClr val="FFFFFF"/>
-                </a:solidFill>
-                <a:latin typeface="Calibri"/>
+              <a:rPr lang="en-US" sz="980" b="1" i="0" dirty="0">
+                <a:solidFill>
+                  <a:srgbClr val="CADCFC"/>
+                </a:solidFill>
+                <a:latin typeface="Calibri" pitchFamily="34" charset="0"/>
               </a:rPr>
               <a:t>60–80%</a:t>
             </a:r>
@@ -49019,11 +49058,11 @@
               <a:buNone/>
             </a:pPr>
             <a:r>
-              <a:rPr sz="880" b="0">
-                <a:solidFill>
-                  <a:srgbClr val="B4C8E6"/>
-                </a:solidFill>
-                <a:latin typeface="Calibri"/>
+              <a:rPr lang="en-US" sz="670" b="0" i="0" dirty="0">
+                <a:solidFill>
+                  <a:srgbClr val="9FB4D8"/>
+                </a:solidFill>
+                <a:latin typeface="Calibri" pitchFamily="34" charset="0"/>
               </a:rPr>
               <a:t>faster execution</a:t>
             </a:r>
@@ -49092,11 +49131,11 @@
               <a:buNone/>
             </a:pPr>
             <a:r>
-              <a:rPr sz="1450" b="1">
-                <a:solidFill>
-                  <a:srgbClr val="FFFFFF"/>
-                </a:solidFill>
-                <a:latin typeface="Calibri"/>
+              <a:rPr lang="en-US" sz="980" b="1" i="0" dirty="0">
+                <a:solidFill>
+                  <a:srgbClr val="CADCFC"/>
+                </a:solidFill>
+                <a:latin typeface="Calibri" pitchFamily="34" charset="0"/>
               </a:rPr>
               <a:t>2–4×</a:t>
             </a:r>
@@ -49132,11 +49171,11 @@
               <a:buNone/>
             </a:pPr>
             <a:r>
-              <a:rPr sz="880" b="0">
-                <a:solidFill>
-                  <a:srgbClr val="B4C8E6"/>
-                </a:solidFill>
-                <a:latin typeface="Calibri"/>
+              <a:rPr lang="en-US" sz="670" b="0" i="0" dirty="0">
+                <a:solidFill>
+                  <a:srgbClr val="9FB4D8"/>
+                </a:solidFill>
+                <a:latin typeface="Calibri" pitchFamily="34" charset="0"/>
               </a:rPr>
               <a:t>release frequency</a:t>
             </a:r>
@@ -49205,11 +49244,11 @@
               <a:buNone/>
             </a:pPr>
             <a:r>
-              <a:rPr sz="1450" b="1">
-                <a:solidFill>
-                  <a:srgbClr val="FFFFFF"/>
-                </a:solidFill>
-                <a:latin typeface="Calibri"/>
+              <a:rPr lang="en-US" sz="980" b="1" i="0" dirty="0">
+                <a:solidFill>
+                  <a:srgbClr val="CADCFC"/>
+                </a:solidFill>
+                <a:latin typeface="Calibri" pitchFamily="34" charset="0"/>
               </a:rPr>
               <a:t>100%</a:t>
             </a:r>
@@ -49245,11 +49284,11 @@
               <a:buNone/>
             </a:pPr>
             <a:r>
-              <a:rPr sz="880" b="0">
-                <a:solidFill>
-                  <a:srgbClr val="B4C8E6"/>
-                </a:solidFill>
-                <a:latin typeface="Calibri"/>
+              <a:rPr lang="en-US" sz="670" b="0" i="0" dirty="0">
+                <a:solidFill>
+                  <a:srgbClr val="9FB4D8"/>
+                </a:solidFill>
+                <a:latin typeface="Calibri" pitchFamily="34" charset="0"/>
               </a:rPr>
               <a:t>audit coverage</a:t>
             </a:r>

--- a/inputs/DaaS_Release_Platform_updated_Flow_FIXED.pptx
+++ b/inputs/DaaS_Release_Platform_updated_Flow_FIXED.pptx
@@ -49327,513 +49327,6 @@
       </p:grpSpPr>
       <p:sp>
         <p:nvSpPr>
-          <p:cNvPr id="3" name="Shape"/>
-          <p:cNvSpPr/>
-          <p:nvPr/>
-        </p:nvSpPr>
-        <p:spPr>
-          <a:xfrm>
-            <a:off x="0" y="0"/>
-            <a:ext cx="12192000" cy="505000"/>
-          </a:xfrm>
-          <a:prstGeom prst="roundRect">
-            <a:avLst>
-              <a:gd name="adj" fmla="val 0"/>
-            </a:avLst>
-          </a:prstGeom>
-          <a:solidFill>
-            <a:srgbClr val="0F1B35"/>
-          </a:solidFill>
-          <a:ln/>
-        </p:spPr>
-        <p:txBody>
-          <a:bodyPr/>
-          <a:lstStyle/>
-          <a:p>
-            <a:endParaRPr/>
-          </a:p>
-        </p:txBody>
-      </p:sp>
-      <p:sp>
-        <p:nvSpPr>
-          <p:cNvPr id="4" name="TB"/>
-          <p:cNvSpPr>
-            <a:spLocks noGrp="1"/>
-          </p:cNvSpPr>
-          <p:nvPr/>
-        </p:nvSpPr>
-        <p:spPr>
-          <a:xfrm>
-            <a:off x="548640" y="0"/>
-            <a:ext cx="3000000" cy="505000"/>
-          </a:xfrm>
-          <a:prstGeom prst="rect">
-            <a:avLst/>
-          </a:prstGeom>
-          <a:noFill/>
-          <a:ln/>
-        </p:spPr>
-        <p:txBody>
-          <a:bodyPr wrap="square" lIns="0" tIns="0" rIns="0" bIns="0" rtlCol="0" anchor="ctr"/>
-          <a:lstStyle/>
-          <a:p>
-            <a:pPr marL="0" indent="0" algn="l">
-              <a:buNone/>
-            </a:pPr>
-            <a:r>
-              <a:rPr lang="en-US" sz="800" b="1" i="0" dirty="0">
-                <a:solidFill>
-                  <a:srgbClr val="CADCFC"/>
-                </a:solidFill>
-                <a:latin typeface="Calibri" pitchFamily="34" charset="0"/>
-              </a:rPr>
-              <a:t>PRE-ONBOARDING</a:t>
-            </a:r>
-          </a:p>
-        </p:txBody>
-      </p:sp>
-      <p:sp>
-        <p:nvSpPr>
-          <p:cNvPr id="5" name="TB"/>
-          <p:cNvSpPr>
-            <a:spLocks noGrp="1"/>
-          </p:cNvSpPr>
-          <p:nvPr/>
-        </p:nvSpPr>
-        <p:spPr>
-          <a:xfrm>
-            <a:off x="0" y="0"/>
-            <a:ext cx="12192000" cy="505000"/>
-          </a:xfrm>
-          <a:prstGeom prst="rect">
-            <a:avLst/>
-          </a:prstGeom>
-          <a:noFill/>
-          <a:ln/>
-        </p:spPr>
-        <p:txBody>
-          <a:bodyPr wrap="square" lIns="0" tIns="0" rIns="0" bIns="0" rtlCol="0" anchor="ctr"/>
-          <a:lstStyle/>
-          <a:p>
-            <a:pPr marL="0" indent="0" algn="ctr">
-              <a:buNone/>
-            </a:pPr>
-            <a:r>
-              <a:rPr lang="en-US" sz="1300" b="1" i="0" dirty="0">
-                <a:solidFill>
-                  <a:srgbClr val="FFFFFF"/>
-                </a:solidFill>
-                <a:latin typeface="Calibri" pitchFamily="34" charset="0"/>
-              </a:rPr>
-              <a:t>Analyse — Understand the Client Environment Before Connecting</a:t>
-            </a:r>
-          </a:p>
-        </p:txBody>
-      </p:sp>
-      <p:sp>
-        <p:nvSpPr>
-          <p:cNvPr id="6" name="Shape"/>
-          <p:cNvSpPr/>
-          <p:nvPr/>
-        </p:nvSpPr>
-        <p:spPr>
-          <a:xfrm>
-            <a:off x="2354832" y="864720"/>
-            <a:ext cx="1700000" cy="329184"/>
-          </a:xfrm>
-          <a:prstGeom prst="roundRect">
-            <a:avLst>
-              <a:gd name="adj" fmla="val 16667"/>
-            </a:avLst>
-          </a:prstGeom>
-          <a:solidFill>
-            <a:srgbClr val="0F1B35"/>
-          </a:solidFill>
-          <a:ln w="15875">
-            <a:solidFill>
-              <a:srgbClr val="0F1B35"/>
-            </a:solidFill>
-            <a:prstDash val="solid"/>
-          </a:ln>
-        </p:spPr>
-        <p:txBody>
-          <a:bodyPr/>
-          <a:lstStyle/>
-          <a:p>
-            <a:endParaRPr/>
-          </a:p>
-        </p:txBody>
-      </p:sp>
-      <p:sp>
-        <p:nvSpPr>
-          <p:cNvPr id="7" name="TB"/>
-          <p:cNvSpPr>
-            <a:spLocks noGrp="1"/>
-          </p:cNvSpPr>
-          <p:nvPr/>
-        </p:nvSpPr>
-        <p:spPr>
-          <a:xfrm>
-            <a:off x="2354832" y="864720"/>
-            <a:ext cx="1700000" cy="329184"/>
-          </a:xfrm>
-          <a:prstGeom prst="rect">
-            <a:avLst/>
-          </a:prstGeom>
-          <a:noFill/>
-          <a:ln/>
-        </p:spPr>
-        <p:txBody>
-          <a:bodyPr wrap="square" lIns="0" tIns="0" rIns="0" bIns="0" rtlCol="0" anchor="ctr"/>
-          <a:lstStyle/>
-          <a:p>
-            <a:pPr marL="0" indent="0" algn="ctr">
-              <a:buNone/>
-            </a:pPr>
-            <a:r>
-              <a:rPr lang="en-US" sz="850" b="1" i="0" dirty="0">
-                <a:solidFill>
-                  <a:srgbClr val="FFFFFF"/>
-                </a:solidFill>
-                <a:latin typeface="Calibri" pitchFamily="34" charset="0"/>
-              </a:rPr>
-              <a:t>ANALYSE</a:t>
-            </a:r>
-          </a:p>
-        </p:txBody>
-      </p:sp>
-      <p:sp>
-        <p:nvSpPr>
-          <p:cNvPr id="8" name="TB"/>
-          <p:cNvSpPr>
-            <a:spLocks noGrp="1"/>
-          </p:cNvSpPr>
-          <p:nvPr/>
-        </p:nvSpPr>
-        <p:spPr>
-          <a:xfrm>
-            <a:off x="4054832" y="864720"/>
-            <a:ext cx="182880" cy="329184"/>
-          </a:xfrm>
-          <a:prstGeom prst="rect">
-            <a:avLst/>
-          </a:prstGeom>
-          <a:noFill/>
-          <a:ln/>
-        </p:spPr>
-        <p:txBody>
-          <a:bodyPr wrap="square" lIns="0" tIns="0" rIns="0" bIns="0" rtlCol="0" anchor="ctr"/>
-          <a:lstStyle/>
-          <a:p>
-            <a:pPr marL="0" indent="0" algn="ctr">
-              <a:buNone/>
-            </a:pPr>
-            <a:r>
-              <a:rPr lang="en-US" sz="1000" b="0" i="0" dirty="0">
-                <a:solidFill>
-                  <a:srgbClr val="CADCFC"/>
-                </a:solidFill>
-                <a:latin typeface="Calibri" pitchFamily="34" charset="0"/>
-              </a:rPr>
-              <a:t>→</a:t>
-            </a:r>
-          </a:p>
-        </p:txBody>
-      </p:sp>
-      <p:sp>
-        <p:nvSpPr>
-          <p:cNvPr id="9" name="Shape"/>
-          <p:cNvSpPr/>
-          <p:nvPr/>
-        </p:nvSpPr>
-        <p:spPr>
-          <a:xfrm>
-            <a:off x="4201136" y="864720"/>
-            <a:ext cx="1700000" cy="329184"/>
-          </a:xfrm>
-          <a:prstGeom prst="roundRect">
-            <a:avLst>
-              <a:gd name="adj" fmla="val 16667"/>
-            </a:avLst>
-          </a:prstGeom>
-          <a:solidFill>
-            <a:srgbClr val="FFFFFF"/>
-          </a:solidFill>
-          <a:ln w="15875">
-            <a:solidFill>
-              <a:srgbClr val="CADCFC"/>
-            </a:solidFill>
-            <a:prstDash val="solid"/>
-          </a:ln>
-        </p:spPr>
-        <p:txBody>
-          <a:bodyPr/>
-          <a:lstStyle/>
-          <a:p>
-            <a:endParaRPr/>
-          </a:p>
-        </p:txBody>
-      </p:sp>
-      <p:sp>
-        <p:nvSpPr>
-          <p:cNvPr id="10" name="TB"/>
-          <p:cNvSpPr>
-            <a:spLocks noGrp="1"/>
-          </p:cNvSpPr>
-          <p:nvPr/>
-        </p:nvSpPr>
-        <p:spPr>
-          <a:xfrm>
-            <a:off x="4201136" y="864720"/>
-            <a:ext cx="1700000" cy="329184"/>
-          </a:xfrm>
-          <a:prstGeom prst="rect">
-            <a:avLst/>
-          </a:prstGeom>
-          <a:noFill/>
-          <a:ln/>
-        </p:spPr>
-        <p:txBody>
-          <a:bodyPr wrap="square" lIns="0" tIns="0" rIns="0" bIns="0" rtlCol="0" anchor="ctr"/>
-          <a:lstStyle/>
-          <a:p>
-            <a:pPr marL="0" indent="0" algn="ctr">
-              <a:buNone/>
-            </a:pPr>
-            <a:r>
-              <a:rPr lang="en-US" sz="850" b="1" i="0" dirty="0">
-                <a:solidFill>
-                  <a:srgbClr val="5B6584"/>
-                </a:solidFill>
-                <a:latin typeface="Calibri" pitchFamily="34" charset="0"/>
-              </a:rPr>
-              <a:t>CONNECT</a:t>
-            </a:r>
-          </a:p>
-        </p:txBody>
-      </p:sp>
-      <p:sp>
-        <p:nvSpPr>
-          <p:cNvPr id="11" name="TB"/>
-          <p:cNvSpPr>
-            <a:spLocks noGrp="1"/>
-          </p:cNvSpPr>
-          <p:nvPr/>
-        </p:nvSpPr>
-        <p:spPr>
-          <a:xfrm>
-            <a:off x="5901136" y="864720"/>
-            <a:ext cx="182880" cy="329184"/>
-          </a:xfrm>
-          <a:prstGeom prst="rect">
-            <a:avLst/>
-          </a:prstGeom>
-          <a:noFill/>
-          <a:ln/>
-        </p:spPr>
-        <p:txBody>
-          <a:bodyPr wrap="square" lIns="0" tIns="0" rIns="0" bIns="0" rtlCol="0" anchor="ctr"/>
-          <a:lstStyle/>
-          <a:p>
-            <a:pPr marL="0" indent="0" algn="ctr">
-              <a:buNone/>
-            </a:pPr>
-            <a:r>
-              <a:rPr lang="en-US" sz="1000" b="0" i="0" dirty="0">
-                <a:solidFill>
-                  <a:srgbClr val="CADCFC"/>
-                </a:solidFill>
-                <a:latin typeface="Calibri" pitchFamily="34" charset="0"/>
-              </a:rPr>
-              <a:t>→</a:t>
-            </a:r>
-          </a:p>
-        </p:txBody>
-      </p:sp>
-      <p:sp>
-        <p:nvSpPr>
-          <p:cNvPr id="12" name="Shape"/>
-          <p:cNvSpPr/>
-          <p:nvPr/>
-        </p:nvSpPr>
-        <p:spPr>
-          <a:xfrm>
-            <a:off x="6047440" y="864720"/>
-            <a:ext cx="1700000" cy="329184"/>
-          </a:xfrm>
-          <a:prstGeom prst="roundRect">
-            <a:avLst>
-              <a:gd name="adj" fmla="val 16667"/>
-            </a:avLst>
-          </a:prstGeom>
-          <a:solidFill>
-            <a:srgbClr val="FFFFFF"/>
-          </a:solidFill>
-          <a:ln w="15875">
-            <a:solidFill>
-              <a:srgbClr val="CADCFC"/>
-            </a:solidFill>
-            <a:prstDash val="solid"/>
-          </a:ln>
-        </p:spPr>
-        <p:txBody>
-          <a:bodyPr/>
-          <a:lstStyle/>
-          <a:p>
-            <a:endParaRPr/>
-          </a:p>
-        </p:txBody>
-      </p:sp>
-      <p:sp>
-        <p:nvSpPr>
-          <p:cNvPr id="13" name="TB"/>
-          <p:cNvSpPr>
-            <a:spLocks noGrp="1"/>
-          </p:cNvSpPr>
-          <p:nvPr/>
-        </p:nvSpPr>
-        <p:spPr>
-          <a:xfrm>
-            <a:off x="6047440" y="864720"/>
-            <a:ext cx="1700000" cy="329184"/>
-          </a:xfrm>
-          <a:prstGeom prst="rect">
-            <a:avLst/>
-          </a:prstGeom>
-          <a:noFill/>
-          <a:ln/>
-        </p:spPr>
-        <p:txBody>
-          <a:bodyPr wrap="square" lIns="0" tIns="0" rIns="0" bIns="0" rtlCol="0" anchor="ctr"/>
-          <a:lstStyle/>
-          <a:p>
-            <a:pPr marL="0" indent="0" algn="ctr">
-              <a:buNone/>
-            </a:pPr>
-            <a:r>
-              <a:rPr lang="en-US" sz="850" b="1" i="0" dirty="0">
-                <a:solidFill>
-                  <a:srgbClr val="5B6584"/>
-                </a:solidFill>
-                <a:latin typeface="Calibri" pitchFamily="34" charset="0"/>
-              </a:rPr>
-              <a:t>CONFIGURE</a:t>
-            </a:r>
-          </a:p>
-        </p:txBody>
-      </p:sp>
-      <p:sp>
-        <p:nvSpPr>
-          <p:cNvPr id="14" name="TB"/>
-          <p:cNvSpPr>
-            <a:spLocks noGrp="1"/>
-          </p:cNvSpPr>
-          <p:nvPr/>
-        </p:nvSpPr>
-        <p:spPr>
-          <a:xfrm>
-            <a:off x="7747440" y="864720"/>
-            <a:ext cx="182880" cy="329184"/>
-          </a:xfrm>
-          <a:prstGeom prst="rect">
-            <a:avLst/>
-          </a:prstGeom>
-          <a:noFill/>
-          <a:ln/>
-        </p:spPr>
-        <p:txBody>
-          <a:bodyPr wrap="square" lIns="0" tIns="0" rIns="0" bIns="0" rtlCol="0" anchor="ctr"/>
-          <a:lstStyle/>
-          <a:p>
-            <a:pPr marL="0" indent="0" algn="ctr">
-              <a:buNone/>
-            </a:pPr>
-            <a:r>
-              <a:rPr lang="en-US" sz="1000" b="0" i="0" dirty="0">
-                <a:solidFill>
-                  <a:srgbClr val="CADCFC"/>
-                </a:solidFill>
-                <a:latin typeface="Calibri" pitchFamily="34" charset="0"/>
-              </a:rPr>
-              <a:t>→</a:t>
-            </a:r>
-          </a:p>
-        </p:txBody>
-      </p:sp>
-      <p:sp>
-        <p:nvSpPr>
-          <p:cNvPr id="15" name="Shape"/>
-          <p:cNvSpPr/>
-          <p:nvPr/>
-        </p:nvSpPr>
-        <p:spPr>
-          <a:xfrm>
-            <a:off x="7893744" y="864720"/>
-            <a:ext cx="1700000" cy="329184"/>
-          </a:xfrm>
-          <a:prstGeom prst="roundRect">
-            <a:avLst>
-              <a:gd name="adj" fmla="val 16667"/>
-            </a:avLst>
-          </a:prstGeom>
-          <a:solidFill>
-            <a:srgbClr val="FFFFFF"/>
-          </a:solidFill>
-          <a:ln w="15875">
-            <a:solidFill>
-              <a:srgbClr val="CADCFC"/>
-            </a:solidFill>
-            <a:prstDash val="solid"/>
-          </a:ln>
-        </p:spPr>
-        <p:txBody>
-          <a:bodyPr/>
-          <a:lstStyle/>
-          <a:p>
-            <a:endParaRPr/>
-          </a:p>
-        </p:txBody>
-      </p:sp>
-      <p:sp>
-        <p:nvSpPr>
-          <p:cNvPr id="16" name="TB"/>
-          <p:cNvSpPr>
-            <a:spLocks noGrp="1"/>
-          </p:cNvSpPr>
-          <p:nvPr/>
-        </p:nvSpPr>
-        <p:spPr>
-          <a:xfrm>
-            <a:off x="7893744" y="864720"/>
-            <a:ext cx="1700000" cy="329184"/>
-          </a:xfrm>
-          <a:prstGeom prst="rect">
-            <a:avLst/>
-          </a:prstGeom>
-          <a:noFill/>
-          <a:ln/>
-        </p:spPr>
-        <p:txBody>
-          <a:bodyPr wrap="square" lIns="0" tIns="0" rIns="0" bIns="0" rtlCol="0" anchor="ctr"/>
-          <a:lstStyle/>
-          <a:p>
-            <a:pPr marL="0" indent="0" algn="ctr">
-              <a:buNone/>
-            </a:pPr>
-            <a:r>
-              <a:rPr lang="en-US" sz="850" b="1" i="0" dirty="0">
-                <a:solidFill>
-                  <a:srgbClr val="5B6584"/>
-                </a:solidFill>
-                <a:latin typeface="Calibri" pitchFamily="34" charset="0"/>
-              </a:rPr>
-              <a:t>RUN</a:t>
-            </a:r>
-          </a:p>
-        </p:txBody>
-      </p:sp>
-      <p:sp>
-        <p:nvSpPr>
           <p:cNvPr id="17" name="Circle"/>
           <p:cNvSpPr/>
           <p:nvPr/>
@@ -49918,7 +49411,7 @@
         </p:nvSpPr>
         <p:spPr>
           <a:xfrm>
-            <a:off x="953150" y="1519080"/>
+            <a:off x="953150" y="1572768"/>
             <a:ext cx="10487010" cy="260000"/>
           </a:xfrm>
           <a:prstGeom prst="rect">
@@ -51627,10 +51120,573 @@
       </p:sp>
       <p:sp>
         <p:nvSpPr>
-          <p:cNvPr id="53" name="TB"/>
-          <p:cNvSpPr>
-            <a:spLocks noGrp="1"/>
-          </p:cNvSpPr>
+          <p:cNvPr id="55" name="Rectangle 54"/>
+          <p:cNvSpPr/>
+          <p:nvPr/>
+        </p:nvSpPr>
+        <p:spPr>
+          <a:xfrm>
+            <a:off x="0" y="0"/>
+            <a:ext cx="12191969" cy="505023"/>
+          </a:xfrm>
+          <a:prstGeom prst="rect">
+            <a:avLst/>
+          </a:prstGeom>
+          <a:solidFill>
+            <a:srgbClr val="0F1B35"/>
+          </a:solidFill>
+          <a:ln>
+            <a:noFill/>
+          </a:ln>
+        </p:spPr>
+        <p:style>
+          <a:lnRef idx="1">
+            <a:schemeClr val="accent1"/>
+          </a:lnRef>
+          <a:fillRef idx="3">
+            <a:schemeClr val="accent1"/>
+          </a:fillRef>
+          <a:effectRef idx="2">
+            <a:schemeClr val="accent1"/>
+          </a:effectRef>
+          <a:fontRef idx="minor">
+            <a:schemeClr val="lt1"/>
+          </a:fontRef>
+        </p:style>
+        <p:txBody>
+          <a:bodyPr rtlCol="0" anchor="ctr"/>
+          <a:lstStyle/>
+          <a:p>
+            <a:pPr algn="ctr"/>
+          </a:p>
+        </p:txBody>
+      </p:sp>
+      <p:sp>
+        <p:nvSpPr>
+          <p:cNvPr id="56" name="TextBox 55"/>
+          <p:cNvSpPr txBox="1"/>
+          <p:nvPr/>
+        </p:nvSpPr>
+        <p:spPr>
+          <a:xfrm>
+            <a:off x="548640" y="0"/>
+            <a:ext cx="3000146" cy="505023"/>
+          </a:xfrm>
+          <a:prstGeom prst="rect">
+            <a:avLst/>
+          </a:prstGeom>
+          <a:noFill/>
+          <a:ln>
+            <a:noFill/>
+          </a:ln>
+        </p:spPr>
+        <p:txBody>
+          <a:bodyPr wrap="square" anchor="ctr" lIns="0" rIns="0" tIns="0" bIns="0">
+            <a:spAutoFit/>
+          </a:bodyPr>
+          <a:lstStyle/>
+          <a:p>
+            <a:pPr algn="l"/>
+            <a:r>
+              <a:rPr sz="800" b="1">
+                <a:solidFill>
+                  <a:srgbClr val="CADCFC"/>
+                </a:solidFill>
+                <a:latin typeface="Calibri"/>
+              </a:rPr>
+              <a:t>PRE-ONBOARDING</a:t>
+            </a:r>
+          </a:p>
+        </p:txBody>
+      </p:sp>
+      <p:sp>
+        <p:nvSpPr>
+          <p:cNvPr id="57" name="TextBox 56"/>
+          <p:cNvSpPr txBox="1"/>
+          <p:nvPr/>
+        </p:nvSpPr>
+        <p:spPr>
+          <a:xfrm>
+            <a:off x="0" y="0"/>
+            <a:ext cx="12191969" cy="505023"/>
+          </a:xfrm>
+          <a:prstGeom prst="rect">
+            <a:avLst/>
+          </a:prstGeom>
+          <a:noFill/>
+          <a:ln>
+            <a:noFill/>
+          </a:ln>
+        </p:spPr>
+        <p:txBody>
+          <a:bodyPr wrap="square" anchor="ctr" lIns="0" rIns="0" tIns="0" bIns="0">
+            <a:spAutoFit/>
+          </a:bodyPr>
+          <a:lstStyle/>
+          <a:p>
+            <a:pPr algn="ctr"/>
+            <a:r>
+              <a:rPr sz="1300" b="1">
+                <a:solidFill>
+                  <a:srgbClr val="FFFFFF"/>
+                </a:solidFill>
+                <a:latin typeface="Calibri"/>
+              </a:rPr>
+              <a:t>Analyse — Understand the Client Environment Before Connecting</a:t>
+            </a:r>
+          </a:p>
+        </p:txBody>
+      </p:sp>
+      <p:sp>
+        <p:nvSpPr>
+          <p:cNvPr id="58" name="Rectangle 57"/>
+          <p:cNvSpPr/>
+          <p:nvPr/>
+        </p:nvSpPr>
+        <p:spPr>
+          <a:xfrm>
+            <a:off x="2354854" y="864748"/>
+            <a:ext cx="1699961" cy="329184"/>
+          </a:xfrm>
+          <a:prstGeom prst="rect">
+            <a:avLst/>
+          </a:prstGeom>
+          <a:solidFill>
+            <a:srgbClr val="0F1B35"/>
+          </a:solidFill>
+          <a:ln w="15875">
+            <a:solidFill>
+              <a:srgbClr val="0F1B35"/>
+            </a:solidFill>
+          </a:ln>
+        </p:spPr>
+        <p:style>
+          <a:lnRef idx="1">
+            <a:schemeClr val="accent1"/>
+          </a:lnRef>
+          <a:fillRef idx="3">
+            <a:schemeClr val="accent1"/>
+          </a:fillRef>
+          <a:effectRef idx="2">
+            <a:schemeClr val="accent1"/>
+          </a:effectRef>
+          <a:fontRef idx="minor">
+            <a:schemeClr val="lt1"/>
+          </a:fontRef>
+        </p:style>
+        <p:txBody>
+          <a:bodyPr rtlCol="0" anchor="ctr"/>
+          <a:lstStyle/>
+          <a:p>
+            <a:pPr algn="ctr"/>
+          </a:p>
+        </p:txBody>
+      </p:sp>
+      <p:sp>
+        <p:nvSpPr>
+          <p:cNvPr id="59" name="TextBox 58"/>
+          <p:cNvSpPr txBox="1"/>
+          <p:nvPr/>
+        </p:nvSpPr>
+        <p:spPr>
+          <a:xfrm>
+            <a:off x="2354854" y="864748"/>
+            <a:ext cx="1699961" cy="329184"/>
+          </a:xfrm>
+          <a:prstGeom prst="rect">
+            <a:avLst/>
+          </a:prstGeom>
+          <a:noFill/>
+          <a:ln>
+            <a:noFill/>
+          </a:ln>
+        </p:spPr>
+        <p:txBody>
+          <a:bodyPr wrap="square" anchor="ctr" lIns="0" rIns="0" tIns="0" bIns="0">
+            <a:spAutoFit/>
+          </a:bodyPr>
+          <a:lstStyle/>
+          <a:p>
+            <a:pPr algn="ctr"/>
+            <a:r>
+              <a:rPr sz="850" b="1">
+                <a:solidFill>
+                  <a:srgbClr val="FFFFFF"/>
+                </a:solidFill>
+                <a:latin typeface="Calibri"/>
+              </a:rPr>
+              <a:t>ANALYSE</a:t>
+            </a:r>
+          </a:p>
+        </p:txBody>
+      </p:sp>
+      <p:sp>
+        <p:nvSpPr>
+          <p:cNvPr id="60" name="TextBox 59"/>
+          <p:cNvSpPr txBox="1"/>
+          <p:nvPr/>
+        </p:nvSpPr>
+        <p:spPr>
+          <a:xfrm>
+            <a:off x="4054815" y="864748"/>
+            <a:ext cx="182880" cy="329184"/>
+          </a:xfrm>
+          <a:prstGeom prst="rect">
+            <a:avLst/>
+          </a:prstGeom>
+          <a:noFill/>
+          <a:ln>
+            <a:noFill/>
+          </a:ln>
+        </p:spPr>
+        <p:txBody>
+          <a:bodyPr wrap="none" anchor="ctr" lIns="0" rIns="0" tIns="0" bIns="0">
+            <a:spAutoFit/>
+          </a:bodyPr>
+          <a:lstStyle/>
+          <a:p>
+            <a:pPr algn="ctr"/>
+            <a:r>
+              <a:rPr sz="1000" b="0">
+                <a:solidFill>
+                  <a:srgbClr val="CADCFC"/>
+                </a:solidFill>
+                <a:latin typeface="Calibri"/>
+              </a:rPr>
+              <a:t>→</a:t>
+            </a:r>
+          </a:p>
+        </p:txBody>
+      </p:sp>
+      <p:sp>
+        <p:nvSpPr>
+          <p:cNvPr id="61" name="Rectangle 60"/>
+          <p:cNvSpPr/>
+          <p:nvPr/>
+        </p:nvSpPr>
+        <p:spPr>
+          <a:xfrm>
+            <a:off x="4201119" y="864748"/>
+            <a:ext cx="1699961" cy="329184"/>
+          </a:xfrm>
+          <a:prstGeom prst="rect">
+            <a:avLst/>
+          </a:prstGeom>
+          <a:solidFill>
+            <a:srgbClr val="FFFFFF"/>
+          </a:solidFill>
+          <a:ln w="15875">
+            <a:solidFill>
+              <a:srgbClr val="CADCFC"/>
+            </a:solidFill>
+          </a:ln>
+        </p:spPr>
+        <p:style>
+          <a:lnRef idx="1">
+            <a:schemeClr val="accent1"/>
+          </a:lnRef>
+          <a:fillRef idx="3">
+            <a:schemeClr val="accent1"/>
+          </a:fillRef>
+          <a:effectRef idx="2">
+            <a:schemeClr val="accent1"/>
+          </a:effectRef>
+          <a:fontRef idx="minor">
+            <a:schemeClr val="lt1"/>
+          </a:fontRef>
+        </p:style>
+        <p:txBody>
+          <a:bodyPr rtlCol="0" anchor="ctr"/>
+          <a:lstStyle/>
+          <a:p>
+            <a:pPr algn="ctr"/>
+          </a:p>
+        </p:txBody>
+      </p:sp>
+      <p:sp>
+        <p:nvSpPr>
+          <p:cNvPr id="62" name="TextBox 61"/>
+          <p:cNvSpPr txBox="1"/>
+          <p:nvPr/>
+        </p:nvSpPr>
+        <p:spPr>
+          <a:xfrm>
+            <a:off x="4201119" y="864748"/>
+            <a:ext cx="1699961" cy="329184"/>
+          </a:xfrm>
+          <a:prstGeom prst="rect">
+            <a:avLst/>
+          </a:prstGeom>
+          <a:noFill/>
+          <a:ln>
+            <a:noFill/>
+          </a:ln>
+        </p:spPr>
+        <p:txBody>
+          <a:bodyPr wrap="square" anchor="ctr" lIns="0" rIns="0" tIns="0" bIns="0">
+            <a:spAutoFit/>
+          </a:bodyPr>
+          <a:lstStyle/>
+          <a:p>
+            <a:pPr algn="ctr"/>
+            <a:r>
+              <a:rPr sz="850" b="1">
+                <a:solidFill>
+                  <a:srgbClr val="5B6584"/>
+                </a:solidFill>
+                <a:latin typeface="Calibri"/>
+              </a:rPr>
+              <a:t>CONNECT</a:t>
+            </a:r>
+          </a:p>
+        </p:txBody>
+      </p:sp>
+      <p:sp>
+        <p:nvSpPr>
+          <p:cNvPr id="63" name="TextBox 62"/>
+          <p:cNvSpPr txBox="1"/>
+          <p:nvPr/>
+        </p:nvSpPr>
+        <p:spPr>
+          <a:xfrm>
+            <a:off x="5901171" y="864748"/>
+            <a:ext cx="182880" cy="329184"/>
+          </a:xfrm>
+          <a:prstGeom prst="rect">
+            <a:avLst/>
+          </a:prstGeom>
+          <a:noFill/>
+          <a:ln>
+            <a:noFill/>
+          </a:ln>
+        </p:spPr>
+        <p:txBody>
+          <a:bodyPr wrap="none" anchor="ctr" lIns="0" rIns="0" tIns="0" bIns="0">
+            <a:spAutoFit/>
+          </a:bodyPr>
+          <a:lstStyle/>
+          <a:p>
+            <a:pPr algn="ctr"/>
+            <a:r>
+              <a:rPr sz="1000" b="0">
+                <a:solidFill>
+                  <a:srgbClr val="CADCFC"/>
+                </a:solidFill>
+                <a:latin typeface="Calibri"/>
+              </a:rPr>
+              <a:t>→</a:t>
+            </a:r>
+          </a:p>
+        </p:txBody>
+      </p:sp>
+      <p:sp>
+        <p:nvSpPr>
+          <p:cNvPr id="64" name="Rectangle 63"/>
+          <p:cNvSpPr/>
+          <p:nvPr/>
+        </p:nvSpPr>
+        <p:spPr>
+          <a:xfrm>
+            <a:off x="6047475" y="864748"/>
+            <a:ext cx="1699961" cy="329184"/>
+          </a:xfrm>
+          <a:prstGeom prst="rect">
+            <a:avLst/>
+          </a:prstGeom>
+          <a:solidFill>
+            <a:srgbClr val="FFFFFF"/>
+          </a:solidFill>
+          <a:ln w="15875">
+            <a:solidFill>
+              <a:srgbClr val="CADCFC"/>
+            </a:solidFill>
+          </a:ln>
+        </p:spPr>
+        <p:style>
+          <a:lnRef idx="1">
+            <a:schemeClr val="accent1"/>
+          </a:lnRef>
+          <a:fillRef idx="3">
+            <a:schemeClr val="accent1"/>
+          </a:fillRef>
+          <a:effectRef idx="2">
+            <a:schemeClr val="accent1"/>
+          </a:effectRef>
+          <a:fontRef idx="minor">
+            <a:schemeClr val="lt1"/>
+          </a:fontRef>
+        </p:style>
+        <p:txBody>
+          <a:bodyPr rtlCol="0" anchor="ctr"/>
+          <a:lstStyle/>
+          <a:p>
+            <a:pPr algn="ctr"/>
+          </a:p>
+        </p:txBody>
+      </p:sp>
+      <p:sp>
+        <p:nvSpPr>
+          <p:cNvPr id="65" name="TextBox 64"/>
+          <p:cNvSpPr txBox="1"/>
+          <p:nvPr/>
+        </p:nvSpPr>
+        <p:spPr>
+          <a:xfrm>
+            <a:off x="6047475" y="864748"/>
+            <a:ext cx="1699961" cy="329184"/>
+          </a:xfrm>
+          <a:prstGeom prst="rect">
+            <a:avLst/>
+          </a:prstGeom>
+          <a:noFill/>
+          <a:ln>
+            <a:noFill/>
+          </a:ln>
+        </p:spPr>
+        <p:txBody>
+          <a:bodyPr wrap="square" anchor="ctr" lIns="0" rIns="0" tIns="0" bIns="0">
+            <a:spAutoFit/>
+          </a:bodyPr>
+          <a:lstStyle/>
+          <a:p>
+            <a:pPr algn="ctr"/>
+            <a:r>
+              <a:rPr sz="850" b="1">
+                <a:solidFill>
+                  <a:srgbClr val="5B6584"/>
+                </a:solidFill>
+                <a:latin typeface="Calibri"/>
+              </a:rPr>
+              <a:t>CONFIGURE</a:t>
+            </a:r>
+          </a:p>
+        </p:txBody>
+      </p:sp>
+      <p:sp>
+        <p:nvSpPr>
+          <p:cNvPr id="66" name="TextBox 65"/>
+          <p:cNvSpPr txBox="1"/>
+          <p:nvPr/>
+        </p:nvSpPr>
+        <p:spPr>
+          <a:xfrm>
+            <a:off x="7747528" y="864748"/>
+            <a:ext cx="182880" cy="329184"/>
+          </a:xfrm>
+          <a:prstGeom prst="rect">
+            <a:avLst/>
+          </a:prstGeom>
+          <a:noFill/>
+          <a:ln>
+            <a:noFill/>
+          </a:ln>
+        </p:spPr>
+        <p:txBody>
+          <a:bodyPr wrap="none" anchor="ctr" lIns="0" rIns="0" tIns="0" bIns="0">
+            <a:spAutoFit/>
+          </a:bodyPr>
+          <a:lstStyle/>
+          <a:p>
+            <a:pPr algn="ctr"/>
+            <a:r>
+              <a:rPr sz="1000" b="0">
+                <a:solidFill>
+                  <a:srgbClr val="CADCFC"/>
+                </a:solidFill>
+                <a:latin typeface="Calibri"/>
+              </a:rPr>
+              <a:t>→</a:t>
+            </a:r>
+          </a:p>
+        </p:txBody>
+      </p:sp>
+      <p:sp>
+        <p:nvSpPr>
+          <p:cNvPr id="67" name="Rectangle 66"/>
+          <p:cNvSpPr/>
+          <p:nvPr/>
+        </p:nvSpPr>
+        <p:spPr>
+          <a:xfrm>
+            <a:off x="7893832" y="864748"/>
+            <a:ext cx="1699961" cy="329184"/>
+          </a:xfrm>
+          <a:prstGeom prst="rect">
+            <a:avLst/>
+          </a:prstGeom>
+          <a:solidFill>
+            <a:srgbClr val="FFFFFF"/>
+          </a:solidFill>
+          <a:ln w="15875">
+            <a:solidFill>
+              <a:srgbClr val="CADCFC"/>
+            </a:solidFill>
+          </a:ln>
+        </p:spPr>
+        <p:style>
+          <a:lnRef idx="1">
+            <a:schemeClr val="accent1"/>
+          </a:lnRef>
+          <a:fillRef idx="3">
+            <a:schemeClr val="accent1"/>
+          </a:fillRef>
+          <a:effectRef idx="2">
+            <a:schemeClr val="accent1"/>
+          </a:effectRef>
+          <a:fontRef idx="minor">
+            <a:schemeClr val="lt1"/>
+          </a:fontRef>
+        </p:style>
+        <p:txBody>
+          <a:bodyPr rtlCol="0" anchor="ctr"/>
+          <a:lstStyle/>
+          <a:p>
+            <a:pPr algn="ctr"/>
+          </a:p>
+        </p:txBody>
+      </p:sp>
+      <p:sp>
+        <p:nvSpPr>
+          <p:cNvPr id="68" name="TextBox 67"/>
+          <p:cNvSpPr txBox="1"/>
+          <p:nvPr/>
+        </p:nvSpPr>
+        <p:spPr>
+          <a:xfrm>
+            <a:off x="7893832" y="864748"/>
+            <a:ext cx="1699961" cy="329184"/>
+          </a:xfrm>
+          <a:prstGeom prst="rect">
+            <a:avLst/>
+          </a:prstGeom>
+          <a:noFill/>
+          <a:ln>
+            <a:noFill/>
+          </a:ln>
+        </p:spPr>
+        <p:txBody>
+          <a:bodyPr wrap="square" anchor="ctr" lIns="0" rIns="0" tIns="0" bIns="0">
+            <a:spAutoFit/>
+          </a:bodyPr>
+          <a:lstStyle/>
+          <a:p>
+            <a:pPr algn="ctr"/>
+            <a:r>
+              <a:rPr sz="850" b="1">
+                <a:solidFill>
+                  <a:srgbClr val="5B6584"/>
+                </a:solidFill>
+                <a:latin typeface="Calibri"/>
+              </a:rPr>
+              <a:t>RUN</a:t>
+            </a:r>
+          </a:p>
+        </p:txBody>
+      </p:sp>
+      <p:sp>
+        <p:nvSpPr>
+          <p:cNvPr id="69" name="TextBox 68"/>
+          <p:cNvSpPr txBox="1"/>
           <p:nvPr/>
         </p:nvSpPr>
         <p:spPr>
@@ -51642,23 +51698,23 @@
             <a:avLst/>
           </a:prstGeom>
           <a:noFill/>
-          <a:ln/>
-        </p:spPr>
-        <p:txBody>
-          <a:bodyPr wrap="square" lIns="0" tIns="0" rIns="0" bIns="0" rtlCol="0" anchor="ctr"/>
-          <a:lstStyle/>
-          <a:p>
-            <a:pPr marL="0" indent="0" algn="l">
-              <a:buNone/>
-            </a:pPr>
-            <a:r>
-              <a:rPr lang="en-US" sz="800" b="0" i="0">
+          <a:ln>
+            <a:noFill/>
+          </a:ln>
+        </p:spPr>
+        <p:txBody>
+          <a:bodyPr wrap="none" lIns="0" rIns="0" tIns="0" bIns="0">
+            <a:spAutoFit/>
+          </a:bodyPr>
+          <a:lstStyle/>
+          <a:p>
+            <a:pPr algn="l"/>
+            <a:r>
+              <a:rPr sz="800">
                 <a:solidFill>
                   <a:srgbClr val="5B6584"/>
                 </a:solidFill>
                 <a:latin typeface="Calibri"/>
-                <a:ea typeface="Calibri"/>
-                <a:cs typeface="Calibri"/>
               </a:rPr>
               <a:t>Deployment as a Service</a:t>
             </a:r>
@@ -51667,10 +51723,8 @@
       </p:sp>
       <p:sp>
         <p:nvSpPr>
-          <p:cNvPr id="54" name="TB"/>
-          <p:cNvSpPr>
-            <a:spLocks noGrp="1"/>
-          </p:cNvSpPr>
+          <p:cNvPr id="70" name="TextBox 69"/>
+          <p:cNvSpPr txBox="1"/>
           <p:nvPr/>
         </p:nvSpPr>
         <p:spPr>
@@ -51682,21 +51736,23 @@
             <a:avLst/>
           </a:prstGeom>
           <a:noFill/>
-          <a:ln/>
-        </p:spPr>
-        <p:txBody>
-          <a:bodyPr wrap="square" lIns="0" tIns="0" rIns="0" bIns="0" rtlCol="0" anchor="ctr"/>
-          <a:lstStyle/>
-          <a:p>
-            <a:pPr marL="0" indent="0" algn="r">
-              <a:buNone/>
-            </a:pPr>
-            <a:r>
-              <a:rPr lang="en-US" sz="800" b="0" i="0" dirty="0">
+          <a:ln>
+            <a:noFill/>
+          </a:ln>
+        </p:spPr>
+        <p:txBody>
+          <a:bodyPr wrap="none" lIns="0" rIns="0" tIns="0" bIns="0">
+            <a:spAutoFit/>
+          </a:bodyPr>
+          <a:lstStyle/>
+          <a:p>
+            <a:pPr algn="r"/>
+            <a:r>
+              <a:rPr sz="800">
                 <a:solidFill>
                   <a:srgbClr val="5B6584"/>
                 </a:solidFill>
-                <a:latin typeface="Calibri" pitchFamily="34" charset="0"/>
+                <a:latin typeface="Calibri"/>
               </a:rPr>
               <a:t>3</a:t>
             </a:r>
@@ -51743,36 +51799,117 @@
       </p:grpSpPr>
       <p:sp>
         <p:nvSpPr>
-          <p:cNvPr id="5" name="TB"/>
-          <p:cNvSpPr>
-            <a:spLocks noGrp="1"/>
-          </p:cNvSpPr>
+          <p:cNvPr id="28" name="Rectangle 27"/>
+          <p:cNvSpPr/>
           <p:nvPr/>
         </p:nvSpPr>
         <p:spPr>
           <a:xfrm>
             <a:off x="0" y="0"/>
-            <a:ext cx="12192000" cy="505000"/>
+            <a:ext cx="12191969" cy="505023"/>
           </a:xfrm>
           <a:prstGeom prst="rect">
             <a:avLst/>
           </a:prstGeom>
+          <a:solidFill>
+            <a:srgbClr val="0F1B35"/>
+          </a:solidFill>
+          <a:ln>
+            <a:noFill/>
+          </a:ln>
+        </p:spPr>
+        <p:style>
+          <a:lnRef idx="1">
+            <a:schemeClr val="accent1"/>
+          </a:lnRef>
+          <a:fillRef idx="3">
+            <a:schemeClr val="accent1"/>
+          </a:fillRef>
+          <a:effectRef idx="2">
+            <a:schemeClr val="accent1"/>
+          </a:effectRef>
+          <a:fontRef idx="minor">
+            <a:schemeClr val="lt1"/>
+          </a:fontRef>
+        </p:style>
+        <p:txBody>
+          <a:bodyPr rtlCol="0" anchor="ctr"/>
+          <a:lstStyle/>
+          <a:p>
+            <a:pPr algn="ctr"/>
+          </a:p>
+        </p:txBody>
+      </p:sp>
+      <p:sp>
+        <p:nvSpPr>
+          <p:cNvPr id="29" name="TextBox 28"/>
+          <p:cNvSpPr txBox="1"/>
+          <p:nvPr/>
+        </p:nvSpPr>
+        <p:spPr>
+          <a:xfrm>
+            <a:off x="548640" y="0"/>
+            <a:ext cx="3000146" cy="505023"/>
+          </a:xfrm>
+          <a:prstGeom prst="rect">
+            <a:avLst/>
+          </a:prstGeom>
           <a:noFill/>
-          <a:ln/>
-        </p:spPr>
-        <p:txBody>
-          <a:bodyPr wrap="square" lIns="0" tIns="0" rIns="0" bIns="0" rtlCol="0" anchor="ctr"/>
-          <a:lstStyle/>
-          <a:p>
-            <a:pPr marL="0" indent="0" algn="ctr">
-              <a:buNone/>
-            </a:pPr>
-            <a:r>
-              <a:rPr lang="en-US" sz="1300" b="1" dirty="0">
+          <a:ln>
+            <a:noFill/>
+          </a:ln>
+        </p:spPr>
+        <p:txBody>
+          <a:bodyPr wrap="square" anchor="ctr" lIns="0" rIns="0" tIns="0" bIns="0">
+            <a:spAutoFit/>
+          </a:bodyPr>
+          <a:lstStyle/>
+          <a:p>
+            <a:pPr algn="l"/>
+            <a:r>
+              <a:rPr sz="800" b="1">
+                <a:solidFill>
+                  <a:srgbClr val="CADCFC"/>
+                </a:solidFill>
+                <a:latin typeface="Calibri"/>
+              </a:rPr>
+              <a:t>PRE-ONBOARDING</a:t>
+            </a:r>
+          </a:p>
+        </p:txBody>
+      </p:sp>
+      <p:sp>
+        <p:nvSpPr>
+          <p:cNvPr id="30" name="TextBox 29"/>
+          <p:cNvSpPr txBox="1"/>
+          <p:nvPr/>
+        </p:nvSpPr>
+        <p:spPr>
+          <a:xfrm>
+            <a:off x="0" y="0"/>
+            <a:ext cx="12191969" cy="505023"/>
+          </a:xfrm>
+          <a:prstGeom prst="rect">
+            <a:avLst/>
+          </a:prstGeom>
+          <a:noFill/>
+          <a:ln>
+            <a:noFill/>
+          </a:ln>
+        </p:spPr>
+        <p:txBody>
+          <a:bodyPr wrap="square" anchor="ctr" lIns="0" rIns="0" tIns="0" bIns="0">
+            <a:spAutoFit/>
+          </a:bodyPr>
+          <a:lstStyle/>
+          <a:p>
+            <a:pPr algn="ctr"/>
+            <a:r>
+              <a:rPr sz="1300" b="1">
                 <a:solidFill>
                   <a:srgbClr val="FFFFFF"/>
                 </a:solidFill>
-                <a:latin typeface="Calibri" pitchFamily="34" charset="0"/>
+                <a:latin typeface="Calibri"/>
               </a:rPr>
               <a:t>Two Steps to Onboard — Then Every Release Just Runs</a:t>
             </a:r>
@@ -51781,19 +51918,17 @@
       </p:sp>
       <p:sp>
         <p:nvSpPr>
-          <p:cNvPr id="6" name="Shape"/>
-          <p:cNvSpPr/>
-          <p:nvPr/>
-        </p:nvSpPr>
-        <p:spPr>
-          <a:xfrm>
-            <a:off x="1932466" y="998340"/>
-            <a:ext cx="1700000" cy="329184"/>
-          </a:xfrm>
-          <a:prstGeom prst="roundRect">
-            <a:avLst>
-              <a:gd name="adj" fmla="val 16667"/>
-            </a:avLst>
+          <p:cNvPr id="31" name="Rectangle 30"/>
+          <p:cNvSpPr/>
+          <p:nvPr/>
+        </p:nvSpPr>
+        <p:spPr>
+          <a:xfrm>
+            <a:off x="2354854" y="864748"/>
+            <a:ext cx="1699961" cy="329184"/>
+          </a:xfrm>
+          <a:prstGeom prst="rect">
+            <a:avLst/>
           </a:prstGeom>
           <a:solidFill>
             <a:srgbClr val="FFFFFF"/>
@@ -51802,49 +51937,62 @@
             <a:solidFill>
               <a:srgbClr val="CADCFC"/>
             </a:solidFill>
-            <a:prstDash val="solid"/>
           </a:ln>
         </p:spPr>
-        <p:txBody>
-          <a:bodyPr/>
-          <a:lstStyle/>
-          <a:p>
-            <a:endParaRPr/>
-          </a:p>
-        </p:txBody>
-      </p:sp>
-      <p:sp>
-        <p:nvSpPr>
-          <p:cNvPr id="7" name="TB"/>
-          <p:cNvSpPr>
-            <a:spLocks noGrp="1"/>
-          </p:cNvSpPr>
-          <p:nvPr/>
-        </p:nvSpPr>
-        <p:spPr>
-          <a:xfrm>
-            <a:off x="1932466" y="998340"/>
-            <a:ext cx="1689115" cy="329184"/>
+        <p:style>
+          <a:lnRef idx="1">
+            <a:schemeClr val="accent1"/>
+          </a:lnRef>
+          <a:fillRef idx="3">
+            <a:schemeClr val="accent1"/>
+          </a:fillRef>
+          <a:effectRef idx="2">
+            <a:schemeClr val="accent1"/>
+          </a:effectRef>
+          <a:fontRef idx="minor">
+            <a:schemeClr val="lt1"/>
+          </a:fontRef>
+        </p:style>
+        <p:txBody>
+          <a:bodyPr rtlCol="0" anchor="ctr"/>
+          <a:lstStyle/>
+          <a:p>
+            <a:pPr algn="ctr"/>
+          </a:p>
+        </p:txBody>
+      </p:sp>
+      <p:sp>
+        <p:nvSpPr>
+          <p:cNvPr id="32" name="TextBox 31"/>
+          <p:cNvSpPr txBox="1"/>
+          <p:nvPr/>
+        </p:nvSpPr>
+        <p:spPr>
+          <a:xfrm>
+            <a:off x="2354854" y="864748"/>
+            <a:ext cx="1699961" cy="329184"/>
           </a:xfrm>
           <a:prstGeom prst="rect">
             <a:avLst/>
           </a:prstGeom>
           <a:noFill/>
-          <a:ln/>
-        </p:spPr>
-        <p:txBody>
-          <a:bodyPr wrap="square" lIns="0" tIns="0" rIns="0" bIns="0" rtlCol="0" anchor="ctr"/>
-          <a:lstStyle/>
-          <a:p>
-            <a:pPr marL="0" indent="0" algn="ctr">
-              <a:buNone/>
-            </a:pPr>
-            <a:r>
-              <a:rPr lang="en-US" sz="850" b="1" dirty="0">
+          <a:ln>
+            <a:noFill/>
+          </a:ln>
+        </p:spPr>
+        <p:txBody>
+          <a:bodyPr wrap="square" anchor="ctr" lIns="0" rIns="0" tIns="0" bIns="0">
+            <a:spAutoFit/>
+          </a:bodyPr>
+          <a:lstStyle/>
+          <a:p>
+            <a:pPr algn="ctr"/>
+            <a:r>
+              <a:rPr sz="850" b="1">
                 <a:solidFill>
                   <a:srgbClr val="5B6584"/>
                 </a:solidFill>
-                <a:latin typeface="Calibri" pitchFamily="34" charset="0"/>
+                <a:latin typeface="Calibri"/>
               </a:rPr>
               <a:t>ANALYSE</a:t>
             </a:r>
@@ -51853,36 +52001,36 @@
       </p:sp>
       <p:sp>
         <p:nvSpPr>
-          <p:cNvPr id="8" name="TB"/>
-          <p:cNvSpPr>
-            <a:spLocks noGrp="1"/>
-          </p:cNvSpPr>
-          <p:nvPr/>
-        </p:nvSpPr>
-        <p:spPr>
-          <a:xfrm>
-            <a:off x="3632466" y="998340"/>
+          <p:cNvPr id="33" name="TextBox 32"/>
+          <p:cNvSpPr txBox="1"/>
+          <p:nvPr/>
+        </p:nvSpPr>
+        <p:spPr>
+          <a:xfrm>
+            <a:off x="4054815" y="864748"/>
             <a:ext cx="182880" cy="329184"/>
           </a:xfrm>
           <a:prstGeom prst="rect">
             <a:avLst/>
           </a:prstGeom>
           <a:noFill/>
-          <a:ln/>
-        </p:spPr>
-        <p:txBody>
-          <a:bodyPr wrap="square" lIns="0" tIns="0" rIns="0" bIns="0" rtlCol="0" anchor="ctr"/>
-          <a:lstStyle/>
-          <a:p>
-            <a:pPr marL="0" indent="0" algn="ctr">
-              <a:buNone/>
-            </a:pPr>
-            <a:r>
-              <a:rPr lang="en-US" sz="1000" b="0" dirty="0">
+          <a:ln>
+            <a:noFill/>
+          </a:ln>
+        </p:spPr>
+        <p:txBody>
+          <a:bodyPr wrap="none" anchor="ctr" lIns="0" rIns="0" tIns="0" bIns="0">
+            <a:spAutoFit/>
+          </a:bodyPr>
+          <a:lstStyle/>
+          <a:p>
+            <a:pPr algn="ctr"/>
+            <a:r>
+              <a:rPr sz="1000" b="0">
                 <a:solidFill>
                   <a:srgbClr val="CADCFC"/>
                 </a:solidFill>
-                <a:latin typeface="Calibri" pitchFamily="34" charset="0"/>
+                <a:latin typeface="Calibri"/>
               </a:rPr>
               <a:t>→</a:t>
             </a:r>
@@ -51891,19 +52039,17 @@
       </p:sp>
       <p:sp>
         <p:nvSpPr>
-          <p:cNvPr id="9" name="Shape"/>
-          <p:cNvSpPr/>
-          <p:nvPr/>
-        </p:nvSpPr>
-        <p:spPr>
-          <a:xfrm>
-            <a:off x="3778770" y="998340"/>
-            <a:ext cx="1700000" cy="329184"/>
-          </a:xfrm>
-          <a:prstGeom prst="roundRect">
-            <a:avLst>
-              <a:gd name="adj" fmla="val 16667"/>
-            </a:avLst>
+          <p:cNvPr id="34" name="Rectangle 33"/>
+          <p:cNvSpPr/>
+          <p:nvPr/>
+        </p:nvSpPr>
+        <p:spPr>
+          <a:xfrm>
+            <a:off x="4201119" y="864748"/>
+            <a:ext cx="1699961" cy="329184"/>
+          </a:xfrm>
+          <a:prstGeom prst="rect">
+            <a:avLst/>
           </a:prstGeom>
           <a:solidFill>
             <a:srgbClr val="0F1B35"/>
@@ -51912,49 +52058,62 @@
             <a:solidFill>
               <a:srgbClr val="0F1B35"/>
             </a:solidFill>
-            <a:prstDash val="solid"/>
           </a:ln>
         </p:spPr>
-        <p:txBody>
-          <a:bodyPr/>
-          <a:lstStyle/>
-          <a:p>
-            <a:endParaRPr/>
-          </a:p>
-        </p:txBody>
-      </p:sp>
-      <p:sp>
-        <p:nvSpPr>
-          <p:cNvPr id="10" name="TB"/>
-          <p:cNvSpPr>
-            <a:spLocks noGrp="1"/>
-          </p:cNvSpPr>
-          <p:nvPr/>
-        </p:nvSpPr>
-        <p:spPr>
-          <a:xfrm>
-            <a:off x="3778770" y="998340"/>
-            <a:ext cx="1700000" cy="329184"/>
+        <p:style>
+          <a:lnRef idx="1">
+            <a:schemeClr val="accent1"/>
+          </a:lnRef>
+          <a:fillRef idx="3">
+            <a:schemeClr val="accent1"/>
+          </a:fillRef>
+          <a:effectRef idx="2">
+            <a:schemeClr val="accent1"/>
+          </a:effectRef>
+          <a:fontRef idx="minor">
+            <a:schemeClr val="lt1"/>
+          </a:fontRef>
+        </p:style>
+        <p:txBody>
+          <a:bodyPr rtlCol="0" anchor="ctr"/>
+          <a:lstStyle/>
+          <a:p>
+            <a:pPr algn="ctr"/>
+          </a:p>
+        </p:txBody>
+      </p:sp>
+      <p:sp>
+        <p:nvSpPr>
+          <p:cNvPr id="35" name="TextBox 34"/>
+          <p:cNvSpPr txBox="1"/>
+          <p:nvPr/>
+        </p:nvSpPr>
+        <p:spPr>
+          <a:xfrm>
+            <a:off x="4201119" y="864748"/>
+            <a:ext cx="1699961" cy="329184"/>
           </a:xfrm>
           <a:prstGeom prst="rect">
             <a:avLst/>
           </a:prstGeom>
           <a:noFill/>
-          <a:ln/>
-        </p:spPr>
-        <p:txBody>
-          <a:bodyPr wrap="square" lIns="0" tIns="0" rIns="0" bIns="0" rtlCol="0" anchor="ctr"/>
-          <a:lstStyle/>
-          <a:p>
-            <a:pPr marL="0" indent="0" algn="ctr">
-              <a:buNone/>
-            </a:pPr>
-            <a:r>
-              <a:rPr lang="en-US" sz="850" b="1" dirty="0">
+          <a:ln>
+            <a:noFill/>
+          </a:ln>
+        </p:spPr>
+        <p:txBody>
+          <a:bodyPr wrap="square" anchor="ctr" lIns="0" rIns="0" tIns="0" bIns="0">
+            <a:spAutoFit/>
+          </a:bodyPr>
+          <a:lstStyle/>
+          <a:p>
+            <a:pPr algn="ctr"/>
+            <a:r>
+              <a:rPr sz="850" b="1">
                 <a:solidFill>
                   <a:srgbClr val="FFFFFF"/>
                 </a:solidFill>
-                <a:latin typeface="Calibri" pitchFamily="34" charset="0"/>
+                <a:latin typeface="Calibri"/>
               </a:rPr>
               <a:t>CONNECT</a:t>
             </a:r>
@@ -51963,36 +52122,36 @@
       </p:sp>
       <p:sp>
         <p:nvSpPr>
-          <p:cNvPr id="11" name="TB"/>
-          <p:cNvSpPr>
-            <a:spLocks noGrp="1"/>
-          </p:cNvSpPr>
-          <p:nvPr/>
-        </p:nvSpPr>
-        <p:spPr>
-          <a:xfrm>
-            <a:off x="5478770" y="998340"/>
+          <p:cNvPr id="36" name="TextBox 35"/>
+          <p:cNvSpPr txBox="1"/>
+          <p:nvPr/>
+        </p:nvSpPr>
+        <p:spPr>
+          <a:xfrm>
+            <a:off x="5901171" y="864748"/>
             <a:ext cx="182880" cy="329184"/>
           </a:xfrm>
           <a:prstGeom prst="rect">
             <a:avLst/>
           </a:prstGeom>
           <a:noFill/>
-          <a:ln/>
-        </p:spPr>
-        <p:txBody>
-          <a:bodyPr wrap="square" lIns="0" tIns="0" rIns="0" bIns="0" rtlCol="0" anchor="ctr"/>
-          <a:lstStyle/>
-          <a:p>
-            <a:pPr marL="0" indent="0" algn="ctr">
-              <a:buNone/>
-            </a:pPr>
-            <a:r>
-              <a:rPr lang="en-US" sz="1000" b="0" dirty="0">
+          <a:ln>
+            <a:noFill/>
+          </a:ln>
+        </p:spPr>
+        <p:txBody>
+          <a:bodyPr wrap="none" anchor="ctr" lIns="0" rIns="0" tIns="0" bIns="0">
+            <a:spAutoFit/>
+          </a:bodyPr>
+          <a:lstStyle/>
+          <a:p>
+            <a:pPr algn="ctr"/>
+            <a:r>
+              <a:rPr sz="1000" b="0">
                 <a:solidFill>
                   <a:srgbClr val="CADCFC"/>
                 </a:solidFill>
-                <a:latin typeface="Calibri" pitchFamily="34" charset="0"/>
+                <a:latin typeface="Calibri"/>
               </a:rPr>
               <a:t>→</a:t>
             </a:r>
@@ -52001,19 +52160,17 @@
       </p:sp>
       <p:sp>
         <p:nvSpPr>
-          <p:cNvPr id="12" name="Shape"/>
-          <p:cNvSpPr/>
-          <p:nvPr/>
-        </p:nvSpPr>
-        <p:spPr>
-          <a:xfrm>
-            <a:off x="5625074" y="998340"/>
-            <a:ext cx="1700000" cy="329184"/>
-          </a:xfrm>
-          <a:prstGeom prst="roundRect">
-            <a:avLst>
-              <a:gd name="adj" fmla="val 16667"/>
-            </a:avLst>
+          <p:cNvPr id="37" name="Rectangle 36"/>
+          <p:cNvSpPr/>
+          <p:nvPr/>
+        </p:nvSpPr>
+        <p:spPr>
+          <a:xfrm>
+            <a:off x="6047475" y="864748"/>
+            <a:ext cx="1699961" cy="329184"/>
+          </a:xfrm>
+          <a:prstGeom prst="rect">
+            <a:avLst/>
           </a:prstGeom>
           <a:solidFill>
             <a:srgbClr val="FFFFFF"/>
@@ -52022,49 +52179,62 @@
             <a:solidFill>
               <a:srgbClr val="CADCFC"/>
             </a:solidFill>
-            <a:prstDash val="solid"/>
           </a:ln>
         </p:spPr>
-        <p:txBody>
-          <a:bodyPr/>
-          <a:lstStyle/>
-          <a:p>
-            <a:endParaRPr/>
-          </a:p>
-        </p:txBody>
-      </p:sp>
-      <p:sp>
-        <p:nvSpPr>
-          <p:cNvPr id="13" name="TB"/>
-          <p:cNvSpPr>
-            <a:spLocks noGrp="1"/>
-          </p:cNvSpPr>
-          <p:nvPr/>
-        </p:nvSpPr>
-        <p:spPr>
-          <a:xfrm>
-            <a:off x="5592417" y="998340"/>
-            <a:ext cx="1700000" cy="329184"/>
+        <p:style>
+          <a:lnRef idx="1">
+            <a:schemeClr val="accent1"/>
+          </a:lnRef>
+          <a:fillRef idx="3">
+            <a:schemeClr val="accent1"/>
+          </a:fillRef>
+          <a:effectRef idx="2">
+            <a:schemeClr val="accent1"/>
+          </a:effectRef>
+          <a:fontRef idx="minor">
+            <a:schemeClr val="lt1"/>
+          </a:fontRef>
+        </p:style>
+        <p:txBody>
+          <a:bodyPr rtlCol="0" anchor="ctr"/>
+          <a:lstStyle/>
+          <a:p>
+            <a:pPr algn="ctr"/>
+          </a:p>
+        </p:txBody>
+      </p:sp>
+      <p:sp>
+        <p:nvSpPr>
+          <p:cNvPr id="38" name="TextBox 37"/>
+          <p:cNvSpPr txBox="1"/>
+          <p:nvPr/>
+        </p:nvSpPr>
+        <p:spPr>
+          <a:xfrm>
+            <a:off x="6047475" y="864748"/>
+            <a:ext cx="1699961" cy="329184"/>
           </a:xfrm>
           <a:prstGeom prst="rect">
             <a:avLst/>
           </a:prstGeom>
           <a:noFill/>
-          <a:ln/>
-        </p:spPr>
-        <p:txBody>
-          <a:bodyPr wrap="square" lIns="0" tIns="0" rIns="0" bIns="0" rtlCol="0" anchor="ctr"/>
-          <a:lstStyle/>
-          <a:p>
-            <a:pPr marL="0" indent="0" algn="ctr">
-              <a:buNone/>
-            </a:pPr>
-            <a:r>
-              <a:rPr lang="en-US" sz="850" b="1" dirty="0">
+          <a:ln>
+            <a:noFill/>
+          </a:ln>
+        </p:spPr>
+        <p:txBody>
+          <a:bodyPr wrap="square" anchor="ctr" lIns="0" rIns="0" tIns="0" bIns="0">
+            <a:spAutoFit/>
+          </a:bodyPr>
+          <a:lstStyle/>
+          <a:p>
+            <a:pPr algn="ctr"/>
+            <a:r>
+              <a:rPr sz="850" b="1">
                 <a:solidFill>
                   <a:srgbClr val="5B6584"/>
                 </a:solidFill>
-                <a:latin typeface="Calibri" pitchFamily="34" charset="0"/>
+                <a:latin typeface="Calibri"/>
               </a:rPr>
               <a:t>CONFIGURE</a:t>
             </a:r>
@@ -52073,36 +52243,36 @@
       </p:sp>
       <p:sp>
         <p:nvSpPr>
-          <p:cNvPr id="14" name="TB"/>
-          <p:cNvSpPr>
-            <a:spLocks noGrp="1"/>
-          </p:cNvSpPr>
-          <p:nvPr/>
-        </p:nvSpPr>
-        <p:spPr>
-          <a:xfrm>
-            <a:off x="7325074" y="998340"/>
+          <p:cNvPr id="39" name="TextBox 38"/>
+          <p:cNvSpPr txBox="1"/>
+          <p:nvPr/>
+        </p:nvSpPr>
+        <p:spPr>
+          <a:xfrm>
+            <a:off x="7747528" y="864748"/>
             <a:ext cx="182880" cy="329184"/>
           </a:xfrm>
           <a:prstGeom prst="rect">
             <a:avLst/>
           </a:prstGeom>
           <a:noFill/>
-          <a:ln/>
-        </p:spPr>
-        <p:txBody>
-          <a:bodyPr wrap="square" lIns="0" tIns="0" rIns="0" bIns="0" rtlCol="0" anchor="ctr"/>
-          <a:lstStyle/>
-          <a:p>
-            <a:pPr marL="0" indent="0" algn="ctr">
-              <a:buNone/>
-            </a:pPr>
-            <a:r>
-              <a:rPr lang="en-US" sz="1000" b="0" dirty="0">
+          <a:ln>
+            <a:noFill/>
+          </a:ln>
+        </p:spPr>
+        <p:txBody>
+          <a:bodyPr wrap="none" anchor="ctr" lIns="0" rIns="0" tIns="0" bIns="0">
+            <a:spAutoFit/>
+          </a:bodyPr>
+          <a:lstStyle/>
+          <a:p>
+            <a:pPr algn="ctr"/>
+            <a:r>
+              <a:rPr sz="1000" b="0">
                 <a:solidFill>
                   <a:srgbClr val="CADCFC"/>
                 </a:solidFill>
-                <a:latin typeface="Calibri" pitchFamily="34" charset="0"/>
+                <a:latin typeface="Calibri"/>
               </a:rPr>
               <a:t>→</a:t>
             </a:r>
@@ -52111,19 +52281,17 @@
       </p:sp>
       <p:sp>
         <p:nvSpPr>
-          <p:cNvPr id="15" name="Shape"/>
-          <p:cNvSpPr/>
-          <p:nvPr/>
-        </p:nvSpPr>
-        <p:spPr>
-          <a:xfrm>
-            <a:off x="7471378" y="998340"/>
-            <a:ext cx="1700000" cy="329184"/>
-          </a:xfrm>
-          <a:prstGeom prst="roundRect">
-            <a:avLst>
-              <a:gd name="adj" fmla="val 16667"/>
-            </a:avLst>
+          <p:cNvPr id="40" name="Rectangle 39"/>
+          <p:cNvSpPr/>
+          <p:nvPr/>
+        </p:nvSpPr>
+        <p:spPr>
+          <a:xfrm>
+            <a:off x="7893832" y="864748"/>
+            <a:ext cx="1699961" cy="329184"/>
+          </a:xfrm>
+          <a:prstGeom prst="rect">
+            <a:avLst/>
           </a:prstGeom>
           <a:solidFill>
             <a:srgbClr val="FFFFFF"/>
@@ -52132,49 +52300,62 @@
             <a:solidFill>
               <a:srgbClr val="CADCFC"/>
             </a:solidFill>
-            <a:prstDash val="solid"/>
           </a:ln>
         </p:spPr>
-        <p:txBody>
-          <a:bodyPr/>
-          <a:lstStyle/>
-          <a:p>
-            <a:endParaRPr/>
-          </a:p>
-        </p:txBody>
-      </p:sp>
-      <p:sp>
-        <p:nvSpPr>
-          <p:cNvPr id="16" name="TB"/>
-          <p:cNvSpPr>
-            <a:spLocks noGrp="1"/>
-          </p:cNvSpPr>
-          <p:nvPr/>
-        </p:nvSpPr>
-        <p:spPr>
-          <a:xfrm>
-            <a:off x="7471378" y="998340"/>
-            <a:ext cx="1700000" cy="329184"/>
+        <p:style>
+          <a:lnRef idx="1">
+            <a:schemeClr val="accent1"/>
+          </a:lnRef>
+          <a:fillRef idx="3">
+            <a:schemeClr val="accent1"/>
+          </a:fillRef>
+          <a:effectRef idx="2">
+            <a:schemeClr val="accent1"/>
+          </a:effectRef>
+          <a:fontRef idx="minor">
+            <a:schemeClr val="lt1"/>
+          </a:fontRef>
+        </p:style>
+        <p:txBody>
+          <a:bodyPr rtlCol="0" anchor="ctr"/>
+          <a:lstStyle/>
+          <a:p>
+            <a:pPr algn="ctr"/>
+          </a:p>
+        </p:txBody>
+      </p:sp>
+      <p:sp>
+        <p:nvSpPr>
+          <p:cNvPr id="41" name="TextBox 40"/>
+          <p:cNvSpPr txBox="1"/>
+          <p:nvPr/>
+        </p:nvSpPr>
+        <p:spPr>
+          <a:xfrm>
+            <a:off x="7893832" y="864748"/>
+            <a:ext cx="1699961" cy="329184"/>
           </a:xfrm>
           <a:prstGeom prst="rect">
             <a:avLst/>
           </a:prstGeom>
           <a:noFill/>
-          <a:ln/>
-        </p:spPr>
-        <p:txBody>
-          <a:bodyPr wrap="square" lIns="0" tIns="0" rIns="0" bIns="0" rtlCol="0" anchor="ctr"/>
-          <a:lstStyle/>
-          <a:p>
-            <a:pPr marL="0" indent="0" algn="ctr">
-              <a:buNone/>
-            </a:pPr>
-            <a:r>
-              <a:rPr lang="en-US" sz="850" b="1" dirty="0">
+          <a:ln>
+            <a:noFill/>
+          </a:ln>
+        </p:spPr>
+        <p:txBody>
+          <a:bodyPr wrap="square" anchor="ctr" lIns="0" rIns="0" tIns="0" bIns="0">
+            <a:spAutoFit/>
+          </a:bodyPr>
+          <a:lstStyle/>
+          <a:p>
+            <a:pPr algn="ctr"/>
+            <a:r>
+              <a:rPr sz="850" b="1">
                 <a:solidFill>
                   <a:srgbClr val="5B6584"/>
                 </a:solidFill>
-                <a:latin typeface="Calibri" pitchFamily="34" charset="0"/>
+                <a:latin typeface="Calibri"/>
               </a:rPr>
               <a:t>RUN</a:t>
             </a:r>
@@ -52183,48 +52364,269 @@
       </p:sp>
       <p:sp>
         <p:nvSpPr>
-          <p:cNvPr id="17" name="Shape"/>
-          <p:cNvSpPr/>
-          <p:nvPr/>
-        </p:nvSpPr>
-        <p:spPr>
-          <a:xfrm>
-            <a:off x="635726" y="2039983"/>
-            <a:ext cx="3246120" cy="2900000"/>
-          </a:xfrm>
-          <a:prstGeom prst="roundRect">
-            <a:avLst>
-              <a:gd name="adj" fmla="val 4167"/>
-            </a:avLst>
+          <p:cNvPr id="42" name="TextBox 41"/>
+          <p:cNvSpPr txBox="1"/>
+          <p:nvPr/>
+        </p:nvSpPr>
+        <p:spPr>
+          <a:xfrm>
+            <a:off x="548640" y="6519672"/>
+            <a:ext cx="8229600" cy="274320"/>
+          </a:xfrm>
+          <a:prstGeom prst="rect">
+            <a:avLst/>
+          </a:prstGeom>
+          <a:noFill/>
+          <a:ln>
+            <a:noFill/>
+          </a:ln>
+        </p:spPr>
+        <p:txBody>
+          <a:bodyPr wrap="none" lIns="0" rIns="0" tIns="0" bIns="0">
+            <a:spAutoFit/>
+          </a:bodyPr>
+          <a:lstStyle/>
+          <a:p>
+            <a:pPr algn="l"/>
+            <a:r>
+              <a:rPr sz="800">
+                <a:solidFill>
+                  <a:srgbClr val="5B6584"/>
+                </a:solidFill>
+                <a:latin typeface="Calibri"/>
+              </a:rPr>
+              <a:t>Deployment as a Service</a:t>
+            </a:r>
+          </a:p>
+        </p:txBody>
+      </p:sp>
+      <p:sp>
+        <p:nvSpPr>
+          <p:cNvPr id="43" name="TextBox 42"/>
+          <p:cNvSpPr txBox="1"/>
+          <p:nvPr/>
+        </p:nvSpPr>
+        <p:spPr>
+          <a:xfrm>
+            <a:off x="11274552" y="6519672"/>
+            <a:ext cx="457200" cy="274320"/>
+          </a:xfrm>
+          <a:prstGeom prst="rect">
+            <a:avLst/>
+          </a:prstGeom>
+          <a:noFill/>
+          <a:ln>
+            <a:noFill/>
+          </a:ln>
+        </p:spPr>
+        <p:txBody>
+          <a:bodyPr wrap="none" lIns="0" rIns="0" tIns="0" bIns="0">
+            <a:spAutoFit/>
+          </a:bodyPr>
+          <a:lstStyle/>
+          <a:p>
+            <a:pPr algn="r"/>
+            <a:r>
+              <a:rPr sz="800">
+                <a:solidFill>
+                  <a:srgbClr val="5B6584"/>
+                </a:solidFill>
+                <a:latin typeface="Calibri"/>
+              </a:rPr>
+              <a:t>4</a:t>
+            </a:r>
+          </a:p>
+        </p:txBody>
+      </p:sp>
+      <p:sp>
+        <p:nvSpPr>
+          <p:cNvPr id="44" name="Rectangle 43"/>
+          <p:cNvSpPr/>
+          <p:nvPr/>
+        </p:nvSpPr>
+        <p:spPr>
+          <a:xfrm>
+            <a:off x="548640" y="1417320"/>
+            <a:ext cx="3246120" cy="3429000"/>
+          </a:xfrm>
+          <a:prstGeom prst="rect">
+            <a:avLst/>
           </a:prstGeom>
           <a:solidFill>
             <a:srgbClr val="002060"/>
           </a:solidFill>
-          <a:ln/>
-        </p:spPr>
-        <p:txBody>
-          <a:bodyPr/>
-          <a:lstStyle/>
-          <a:p>
-            <a:endParaRPr/>
-          </a:p>
-        </p:txBody>
-      </p:sp>
-      <p:sp>
-        <p:nvSpPr>
-          <p:cNvPr id="18" name="Shape"/>
-          <p:cNvSpPr/>
-          <p:nvPr/>
-        </p:nvSpPr>
-        <p:spPr>
-          <a:xfrm>
-            <a:off x="4430486" y="2050869"/>
-            <a:ext cx="7315200" cy="2900000"/>
-          </a:xfrm>
-          <a:prstGeom prst="roundRect">
-            <a:avLst>
-              <a:gd name="adj" fmla="val 4167"/>
-            </a:avLst>
+          <a:ln>
+            <a:noFill/>
+          </a:ln>
+        </p:spPr>
+        <p:style>
+          <a:lnRef idx="1">
+            <a:schemeClr val="accent1"/>
+          </a:lnRef>
+          <a:fillRef idx="3">
+            <a:schemeClr val="accent1"/>
+          </a:fillRef>
+          <a:effectRef idx="2">
+            <a:schemeClr val="accent1"/>
+          </a:effectRef>
+          <a:fontRef idx="minor">
+            <a:schemeClr val="lt1"/>
+          </a:fontRef>
+        </p:style>
+        <p:txBody>
+          <a:bodyPr rtlCol="0" anchor="ctr"/>
+          <a:lstStyle/>
+          <a:p>
+            <a:pPr algn="ctr"/>
+          </a:p>
+        </p:txBody>
+      </p:sp>
+      <p:sp>
+        <p:nvSpPr>
+          <p:cNvPr id="45" name="Oval 44"/>
+          <p:cNvSpPr/>
+          <p:nvPr/>
+        </p:nvSpPr>
+        <p:spPr>
+          <a:xfrm>
+            <a:off x="777240" y="2926080"/>
+            <a:ext cx="420624" cy="420624"/>
+          </a:xfrm>
+          <a:prstGeom prst="ellipse">
+            <a:avLst/>
+          </a:prstGeom>
+          <a:solidFill>
+            <a:srgbClr val="FFFFFF"/>
+          </a:solidFill>
+          <a:ln>
+            <a:noFill/>
+          </a:ln>
+        </p:spPr>
+        <p:style>
+          <a:lnRef idx="1">
+            <a:schemeClr val="accent1"/>
+          </a:lnRef>
+          <a:fillRef idx="3">
+            <a:schemeClr val="accent1"/>
+          </a:fillRef>
+          <a:effectRef idx="2">
+            <a:schemeClr val="accent1"/>
+          </a:effectRef>
+          <a:fontRef idx="minor">
+            <a:schemeClr val="lt1"/>
+          </a:fontRef>
+        </p:style>
+        <p:txBody>
+          <a:bodyPr rtlCol="0" anchor="ctr" lIns="0" rIns="0" tIns="0" bIns="0"/>
+          <a:lstStyle/>
+          <a:p>
+            <a:pPr algn="ctr"/>
+            <a:r>
+              <a:rPr sz="1600" b="1">
+                <a:solidFill>
+                  <a:srgbClr val="002060"/>
+                </a:solidFill>
+                <a:latin typeface="Arial"/>
+              </a:rPr>
+              <a:t>1</a:t>
+            </a:r>
+          </a:p>
+        </p:txBody>
+      </p:sp>
+      <p:sp>
+        <p:nvSpPr>
+          <p:cNvPr id="46" name="TextBox 45"/>
+          <p:cNvSpPr txBox="1"/>
+          <p:nvPr/>
+        </p:nvSpPr>
+        <p:spPr>
+          <a:xfrm>
+            <a:off x="1298448" y="2907792"/>
+            <a:ext cx="2286000" cy="457200"/>
+          </a:xfrm>
+          <a:prstGeom prst="rect">
+            <a:avLst/>
+          </a:prstGeom>
+          <a:noFill/>
+          <a:ln>
+            <a:noFill/>
+          </a:ln>
+        </p:spPr>
+        <p:txBody>
+          <a:bodyPr wrap="none" anchor="ctr" lIns="0" rIns="0" tIns="0" bIns="0">
+            <a:spAutoFit/>
+          </a:bodyPr>
+          <a:lstStyle/>
+          <a:p>
+            <a:pPr algn="l"/>
+            <a:r>
+              <a:rPr sz="1400" b="1">
+                <a:solidFill>
+                  <a:srgbClr val="FFFFFF"/>
+                </a:solidFill>
+                <a:latin typeface="Calibri"/>
+              </a:rPr>
+              <a:t>CONNECT</a:t>
+            </a:r>
+          </a:p>
+        </p:txBody>
+      </p:sp>
+      <p:sp>
+        <p:nvSpPr>
+          <p:cNvPr id="47" name="Rectangle 46"/>
+          <p:cNvSpPr/>
+          <p:nvPr/>
+        </p:nvSpPr>
+        <p:spPr>
+          <a:xfrm>
+            <a:off x="3822191" y="3127248"/>
+            <a:ext cx="256032" cy="18288"/>
+          </a:xfrm>
+          <a:prstGeom prst="rect">
+            <a:avLst/>
+          </a:prstGeom>
+          <a:solidFill>
+            <a:srgbClr val="5B6584"/>
+          </a:solidFill>
+          <a:ln>
+            <a:noFill/>
+          </a:ln>
+        </p:spPr>
+        <p:style>
+          <a:lnRef idx="1">
+            <a:schemeClr val="accent1"/>
+          </a:lnRef>
+          <a:fillRef idx="3">
+            <a:schemeClr val="accent1"/>
+          </a:fillRef>
+          <a:effectRef idx="2">
+            <a:schemeClr val="accent1"/>
+          </a:effectRef>
+          <a:fontRef idx="minor">
+            <a:schemeClr val="lt1"/>
+          </a:fontRef>
+        </p:style>
+        <p:txBody>
+          <a:bodyPr rtlCol="0" anchor="ctr"/>
+          <a:lstStyle/>
+          <a:p>
+            <a:pPr algn="ctr"/>
+          </a:p>
+        </p:txBody>
+      </p:sp>
+      <p:sp>
+        <p:nvSpPr>
+          <p:cNvPr id="48" name="Rectangle 47"/>
+          <p:cNvSpPr/>
+          <p:nvPr/>
+        </p:nvSpPr>
+        <p:spPr>
+          <a:xfrm>
+            <a:off x="4114800" y="1417320"/>
+            <a:ext cx="7528255" cy="3429000"/>
+          </a:xfrm>
+          <a:prstGeom prst="rect">
+            <a:avLst/>
           </a:prstGeom>
           <a:solidFill>
             <a:srgbClr val="FFFFFF"/>
@@ -52233,627 +52635,392 @@
             <a:solidFill>
               <a:srgbClr val="CADCFC"/>
             </a:solidFill>
-            <a:prstDash val="solid"/>
           </a:ln>
         </p:spPr>
-        <p:txBody>
-          <a:bodyPr/>
-          <a:lstStyle/>
-          <a:p>
-            <a:endParaRPr/>
-          </a:p>
-        </p:txBody>
-      </p:sp>
-      <p:sp>
-        <p:nvSpPr>
-          <p:cNvPr id="19" name="Circle"/>
-          <p:cNvSpPr/>
-          <p:nvPr/>
-        </p:nvSpPr>
-        <p:spPr>
-          <a:xfrm>
-            <a:off x="820783" y="3290557"/>
-            <a:ext cx="420624" cy="420624"/>
-          </a:xfrm>
-          <a:prstGeom prst="ellipse">
-            <a:avLst/>
-          </a:prstGeom>
-          <a:solidFill>
-            <a:srgbClr val="FFFFFF"/>
-          </a:solidFill>
-          <a:ln/>
-        </p:spPr>
-        <p:txBody>
-          <a:bodyPr anchor="ctr"/>
-          <a:lstStyle/>
-          <a:p>
-            <a:pPr algn="ctr">
-              <a:buNone/>
+        <p:style>
+          <a:lnRef idx="1">
+            <a:schemeClr val="accent1"/>
+          </a:lnRef>
+          <a:fillRef idx="3">
+            <a:schemeClr val="accent1"/>
+          </a:fillRef>
+          <a:effectRef idx="2">
+            <a:schemeClr val="accent1"/>
+          </a:effectRef>
+          <a:fontRef idx="minor">
+            <a:schemeClr val="lt1"/>
+          </a:fontRef>
+        </p:style>
+        <p:txBody>
+          <a:bodyPr rtlCol="0" anchor="ctr"/>
+          <a:lstStyle/>
+          <a:p>
+            <a:pPr algn="ctr"/>
+          </a:p>
+        </p:txBody>
+      </p:sp>
+      <p:sp>
+        <p:nvSpPr>
+          <p:cNvPr id="49" name="TextBox 48"/>
+          <p:cNvSpPr txBox="1"/>
+          <p:nvPr/>
+        </p:nvSpPr>
+        <p:spPr>
+          <a:xfrm>
+            <a:off x="4343400" y="1508760"/>
+            <a:ext cx="7071055" cy="3246120"/>
+          </a:xfrm>
+          <a:prstGeom prst="rect">
+            <a:avLst/>
+          </a:prstGeom>
+          <a:noFill/>
+          <a:ln>
+            <a:noFill/>
+          </a:ln>
+        </p:spPr>
+        <p:txBody>
+          <a:bodyPr wrap="square" lIns="0" rIns="0" tIns="0" bIns="0">
+            <a:spAutoFit/>
+          </a:bodyPr>
+          <a:lstStyle/>
+          <a:p>
+            <a:pPr>
+              <a:spcBef>
+                <a:spcPts val="300"/>
+              </a:spcBef>
+              <a:spcAft>
+                <a:spcPts val="100"/>
+              </a:spcAft>
             </a:pPr>
             <a:r>
-              <a:rPr lang="en-US" sz="1600" b="1" dirty="0">
-                <a:solidFill>
-                  <a:srgbClr val="002060"/>
-                </a:solidFill>
-                <a:latin typeface="Arial"/>
-              </a:rPr>
-              <a:t>1</a:t>
-            </a:r>
-          </a:p>
-        </p:txBody>
-      </p:sp>
-      <p:sp>
-        <p:nvSpPr>
-          <p:cNvPr id="20" name="TB"/>
-          <p:cNvSpPr>
-            <a:spLocks noGrp="1"/>
-          </p:cNvSpPr>
-          <p:nvPr/>
-        </p:nvSpPr>
-        <p:spPr>
-          <a:xfrm>
-            <a:off x="1331407" y="3386569"/>
-            <a:ext cx="2000000" cy="228600"/>
-          </a:xfrm>
-          <a:prstGeom prst="rect">
-            <a:avLst/>
-          </a:prstGeom>
-          <a:noFill/>
-          <a:ln/>
-        </p:spPr>
-        <p:txBody>
-          <a:bodyPr wrap="square" lIns="0" tIns="0" rIns="0" bIns="0" rtlCol="0" anchor="ctr"/>
-          <a:lstStyle/>
-          <a:p>
-            <a:pPr marL="0" indent="0" algn="l">
-              <a:buNone/>
-            </a:pPr>
-            <a:r>
-              <a:rPr lang="en-US" sz="1400" b="1" dirty="0">
-                <a:solidFill>
-                  <a:srgbClr val="FFFFFF"/>
-                </a:solidFill>
-                <a:latin typeface="Calibri" pitchFamily="34" charset="0"/>
-              </a:rPr>
-              <a:t>CONNECT</a:t>
-            </a:r>
-          </a:p>
-        </p:txBody>
-      </p:sp>
-      <p:sp>
-        <p:nvSpPr>
-          <p:cNvPr id="21" name="TB"/>
-          <p:cNvSpPr>
-            <a:spLocks noGrp="1"/>
-          </p:cNvSpPr>
-          <p:nvPr/>
-        </p:nvSpPr>
-        <p:spPr>
-          <a:xfrm>
-            <a:off x="4011846" y="3350869"/>
-            <a:ext cx="219456" cy="300000"/>
-          </a:xfrm>
-          <a:prstGeom prst="rect">
-            <a:avLst/>
-          </a:prstGeom>
-          <a:noFill/>
-          <a:ln/>
-        </p:spPr>
-        <p:txBody>
-          <a:bodyPr wrap="square" lIns="0" tIns="0" rIns="0" bIns="0" rtlCol="0" anchor="ctr"/>
-          <a:lstStyle/>
-          <a:p>
-            <a:pPr marL="0" indent="0" algn="ctr">
-              <a:buNone/>
-            </a:pPr>
-            <a:r>
-              <a:rPr lang="en-US" sz="1800" b="0" dirty="0">
-                <a:solidFill>
-                  <a:srgbClr val="5B6584"/>
-                </a:solidFill>
-                <a:latin typeface="Calibri" pitchFamily="34" charset="0"/>
-              </a:rPr>
-              <a:t>→</a:t>
-            </a:r>
-          </a:p>
-        </p:txBody>
-      </p:sp>
-      <p:sp>
-        <p:nvSpPr>
-          <p:cNvPr id="22" name="BulletBox"/>
-          <p:cNvSpPr/>
-          <p:nvPr/>
-        </p:nvSpPr>
-        <p:spPr>
-          <a:xfrm>
-            <a:off x="4430486" y="2050869"/>
-            <a:ext cx="7315200" cy="2900000"/>
-          </a:xfrm>
-          <a:prstGeom prst="rect">
-            <a:avLst/>
-          </a:prstGeom>
-          <a:noFill/>
-          <a:ln/>
-        </p:spPr>
-        <p:txBody>
-          <a:bodyPr wrap="square" lIns="91440" tIns="45720" rIns="91440" bIns="45720" rtlCol="0" anchor="t"/>
-          <a:lstStyle/>
-          <a:p>
-            <a:pPr marL="171450" indent="-171450">
-              <a:spcBef>
-                <a:spcPts val="0"/>
-              </a:spcBef>
-              <a:buFont typeface="Wingdings"/>
-              <a:buChar char="q"/>
-            </a:pPr>
-            <a:r>
-              <a:rPr lang="en-US" sz="1000" b="1" dirty="0">
+              <a:rPr sz="1000" b="1">
                 <a:solidFill>
                   <a:srgbClr val="1B1F3B"/>
                 </a:solidFill>
-                <a:latin typeface="Calibri" pitchFamily="34" charset="0"/>
+                <a:latin typeface="Calibri"/>
               </a:rPr>
               <a:t>Cloud accounts</a:t>
             </a:r>
-            <a:endParaRPr lang="en-US">
-              <a:ea typeface="Calibri" panose="020F0502020204030204"/>
-              <a:cs typeface="Calibri" panose="020F0502020204030204"/>
-            </a:endParaRPr>
-          </a:p>
-          <a:p>
-            <a:pPr marL="609600" lvl="1" indent="-152400">
-              <a:lnSpc>
-                <a:spcPct val="108000"/>
-              </a:lnSpc>
+          </a:p>
+          <a:p>
+            <a:pPr>
               <a:spcBef>
-                <a:spcPts val="120"/>
+                <a:spcPts val="50"/>
               </a:spcBef>
-              <a:buFont typeface="Wingdings" charset="0"/>
-              <a:buChar char="Ø"/>
+              <a:spcAft>
+                <a:spcPts val="50"/>
+              </a:spcAft>
             </a:pPr>
             <a:r>
-              <a:rPr lang="en-US" sz="900" dirty="0">
+              <a:rPr sz="850" b="0">
                 <a:solidFill>
                   <a:srgbClr val="5B6584"/>
                 </a:solidFill>
-                <a:latin typeface="Calibri" pitchFamily="34" charset="0"/>
+                <a:latin typeface="Calibri"/>
               </a:rPr>
-              <a:t>Link Azure subscriptions across DEV, QA, UAT, Pre-Prod, and PROD — each scoped with its own resource group.</a:t>
-            </a:r>
-            <a:endParaRPr lang="en-US" sz="900" dirty="0">
-              <a:solidFill>
-                <a:srgbClr val="5B6584"/>
-              </a:solidFill>
-              <a:latin typeface="Calibri" pitchFamily="34" charset="0"/>
-              <a:ea typeface="Calibri" pitchFamily="34" charset="0"/>
-              <a:cs typeface="Calibri" pitchFamily="34" charset="0"/>
-            </a:endParaRPr>
-          </a:p>
-          <a:p>
-            <a:pPr marL="609600" lvl="1" indent="-152400">
-              <a:lnSpc>
-                <a:spcPct val="108000"/>
-              </a:lnSpc>
+              <a:t>•  Link Azure subscriptions across DEV, QA, UAT, Pre-Prod, and PROD — each scoped with its own resource group.</a:t>
+            </a:r>
+          </a:p>
+          <a:p>
+            <a:pPr>
               <a:spcBef>
-                <a:spcPts val="120"/>
+                <a:spcPts val="50"/>
               </a:spcBef>
-              <a:buFont typeface="Wingdings" charset="0"/>
-              <a:buChar char="Ø"/>
+              <a:spcAft>
+                <a:spcPts val="50"/>
+              </a:spcAft>
             </a:pPr>
             <a:r>
-              <a:rPr lang="en-US" sz="900" dirty="0">
+              <a:rPr sz="850" b="0">
                 <a:solidFill>
                   <a:srgbClr val="5B6584"/>
                 </a:solidFill>
                 <a:latin typeface="Calibri"/>
-                <a:ea typeface="Calibri"/>
-                <a:cs typeface="Calibri"/>
               </a:rPr>
-              <a:t>Every environment carries its own RBAC boundary and deployment target so the platform always knows where a release is going.</a:t>
-            </a:r>
-          </a:p>
-          <a:p>
-            <a:pPr marL="609600" lvl="1" indent="-152400">
-              <a:lnSpc>
-                <a:spcPct val="108000"/>
-              </a:lnSpc>
+              <a:t>•  Every environment carries its own RBAC boundary and deployment target so the platform always knows where a release is going.</a:t>
+            </a:r>
+          </a:p>
+          <a:p>
+            <a:pPr>
               <a:spcBef>
-                <a:spcPts val="120"/>
+                <a:spcPts val="50"/>
               </a:spcBef>
-              <a:buFont typeface="Wingdings" charset="0"/>
-              <a:buChar char="Ø"/>
+              <a:spcAft>
+                <a:spcPts val="50"/>
+              </a:spcAft>
             </a:pPr>
             <a:r>
-              <a:rPr lang="en-US" sz="900" dirty="0">
+              <a:rPr sz="850" b="0">
                 <a:solidFill>
                   <a:srgbClr val="5B6584"/>
                 </a:solidFill>
-                <a:latin typeface="Calibri" pitchFamily="34" charset="0"/>
+                <a:latin typeface="Calibri"/>
               </a:rPr>
-              <a:t>Authentication uses Managed Identity or Service Principal — no credentials are ever stored in the platform.</a:t>
-            </a:r>
-            <a:endParaRPr lang="en-US" sz="900" dirty="0">
-              <a:solidFill>
-                <a:srgbClr val="5B6584"/>
-              </a:solidFill>
-              <a:latin typeface="Calibri" pitchFamily="34" charset="0"/>
-              <a:ea typeface="Calibri" pitchFamily="34" charset="0"/>
-              <a:cs typeface="Calibri" pitchFamily="34" charset="0"/>
-            </a:endParaRPr>
-          </a:p>
-          <a:p>
-            <a:pPr marL="171450" indent="-171450">
+              <a:t>•  Authentication uses Managed Identity or Service Principal — no credentials are ever stored in the platform.</a:t>
+            </a:r>
+          </a:p>
+          <a:p>
+            <a:pPr>
               <a:spcBef>
-                <a:spcPts val="500"/>
+                <a:spcPts val="300"/>
               </a:spcBef>
-              <a:buFont typeface="Wingdings"/>
-              <a:buChar char="q"/>
+              <a:spcAft>
+                <a:spcPts val="100"/>
+              </a:spcAft>
             </a:pPr>
             <a:r>
-              <a:rPr lang="en-US" sz="1000" b="1" dirty="0">
+              <a:rPr sz="1000" b="1">
                 <a:solidFill>
                   <a:srgbClr val="1B1F3B"/>
                 </a:solidFill>
-                <a:latin typeface="Calibri" pitchFamily="34" charset="0"/>
+                <a:latin typeface="Calibri"/>
               </a:rPr>
               <a:t>Applications and repos</a:t>
             </a:r>
-            <a:endParaRPr lang="en-US" sz="1000" b="1" dirty="0">
-              <a:solidFill>
-                <a:srgbClr val="1B1F3B"/>
-              </a:solidFill>
-              <a:latin typeface="Calibri" pitchFamily="34" charset="0"/>
-              <a:ea typeface="Calibri" pitchFamily="34" charset="0"/>
-              <a:cs typeface="Calibri" pitchFamily="34" charset="0"/>
-            </a:endParaRPr>
-          </a:p>
-          <a:p>
-            <a:pPr marL="609600" lvl="1" indent="-152400">
-              <a:lnSpc>
-                <a:spcPct val="108000"/>
-              </a:lnSpc>
+          </a:p>
+          <a:p>
+            <a:pPr>
               <a:spcBef>
-                <a:spcPts val="120"/>
+                <a:spcPts val="50"/>
               </a:spcBef>
-              <a:buFont typeface="Wingdings" charset="0"/>
-              <a:buChar char="Ø"/>
+              <a:spcAft>
+                <a:spcPts val="50"/>
+              </a:spcAft>
             </a:pPr>
             <a:r>
-              <a:rPr lang="en-US" sz="900" dirty="0">
+              <a:rPr sz="850" b="0">
                 <a:solidFill>
                   <a:srgbClr val="5B6584"/>
                 </a:solidFill>
-                <a:latin typeface="Calibri" pitchFamily="34" charset="0"/>
+                <a:latin typeface="Calibri"/>
               </a:rPr>
-              <a:t>Register each application with its source repository, branching strategy, and artefact feed.</a:t>
-            </a:r>
-            <a:endParaRPr lang="en-US" sz="900" dirty="0">
-              <a:solidFill>
-                <a:srgbClr val="5B6584"/>
-              </a:solidFill>
-              <a:latin typeface="Calibri" pitchFamily="34" charset="0"/>
-              <a:ea typeface="Calibri" pitchFamily="34" charset="0"/>
-              <a:cs typeface="Calibri" pitchFamily="34" charset="0"/>
-            </a:endParaRPr>
-          </a:p>
-          <a:p>
-            <a:pPr marL="609600" lvl="1" indent="-152400">
-              <a:lnSpc>
-                <a:spcPct val="108000"/>
-              </a:lnSpc>
+              <a:t>•  Register each application with its source repository, branching strategy, and artefact feed.</a:t>
+            </a:r>
+          </a:p>
+          <a:p>
+            <a:pPr>
               <a:spcBef>
-                <a:spcPts val="120"/>
+                <a:spcPts val="50"/>
               </a:spcBef>
-              <a:buFont typeface="Wingdings" charset="0"/>
-              <a:buChar char="Ø"/>
+              <a:spcAft>
+                <a:spcPts val="50"/>
+              </a:spcAft>
             </a:pPr>
             <a:r>
-              <a:rPr lang="en-US" sz="900" dirty="0">
+              <a:rPr sz="850" b="0">
                 <a:solidFill>
                   <a:srgbClr val="5B6584"/>
                 </a:solidFill>
-                <a:latin typeface="Calibri" pitchFamily="34" charset="0"/>
+                <a:latin typeface="Calibri"/>
               </a:rPr>
-              <a:t>Branch-to-environment promotion rules are set once — the platform follows them on every release automatically.</a:t>
-            </a:r>
-            <a:endParaRPr lang="en-US" sz="900" dirty="0">
-              <a:solidFill>
-                <a:srgbClr val="5B6584"/>
-              </a:solidFill>
-              <a:latin typeface="Calibri" pitchFamily="34" charset="0"/>
-              <a:ea typeface="Calibri" pitchFamily="34" charset="0"/>
-              <a:cs typeface="Calibri" pitchFamily="34" charset="0"/>
-            </a:endParaRPr>
-          </a:p>
-          <a:p>
-            <a:pPr marL="609600" lvl="1" indent="-152400">
-              <a:lnSpc>
-                <a:spcPct val="108000"/>
-              </a:lnSpc>
+              <a:t>•  Branch-to-environment promotion rules are set once — the platform follows them on every release automatically.</a:t>
+            </a:r>
+          </a:p>
+          <a:p>
+            <a:pPr>
               <a:spcBef>
-                <a:spcPts val="120"/>
+                <a:spcPts val="50"/>
               </a:spcBef>
-              <a:buFont typeface="Wingdings" charset="0"/>
-              <a:buChar char="Ø"/>
+              <a:spcAft>
+                <a:spcPts val="50"/>
+              </a:spcAft>
             </a:pPr>
             <a:r>
-              <a:rPr lang="en-US" sz="900" dirty="0">
+              <a:rPr sz="850" b="0">
                 <a:solidFill>
                   <a:srgbClr val="5B6584"/>
                 </a:solidFill>
-                <a:latin typeface="Calibri" pitchFamily="34" charset="0"/>
+                <a:latin typeface="Calibri"/>
               </a:rPr>
-              <a:t>Multiple services or microservices per app are fully supported, each with independent deployment templates.</a:t>
-            </a:r>
-            <a:endParaRPr lang="en-US" sz="900" dirty="0">
-              <a:solidFill>
-                <a:srgbClr val="5B6584"/>
-              </a:solidFill>
-              <a:latin typeface="Calibri" pitchFamily="34" charset="0"/>
-              <a:ea typeface="Calibri" pitchFamily="34" charset="0"/>
-              <a:cs typeface="Calibri" pitchFamily="34" charset="0"/>
-            </a:endParaRPr>
-          </a:p>
-          <a:p>
-            <a:pPr marL="171450" indent="-171450">
+              <a:t>•  Multiple services or microservices per app are fully supported, each with independent deployment templates.</a:t>
+            </a:r>
+          </a:p>
+          <a:p>
+            <a:pPr>
               <a:spcBef>
-                <a:spcPts val="500"/>
+                <a:spcPts val="300"/>
               </a:spcBef>
-              <a:buFont typeface="Wingdings"/>
-              <a:buChar char="q"/>
+              <a:spcAft>
+                <a:spcPts val="100"/>
+              </a:spcAft>
             </a:pPr>
             <a:r>
-              <a:rPr lang="en-US" sz="1000" b="1" dirty="0">
+              <a:rPr sz="1000" b="1">
                 <a:solidFill>
                   <a:srgbClr val="1B1F3B"/>
                 </a:solidFill>
-                <a:latin typeface="Calibri" pitchFamily="34" charset="0"/>
+                <a:latin typeface="Calibri"/>
               </a:rPr>
               <a:t>Tooling</a:t>
             </a:r>
-            <a:endParaRPr lang="en-US" sz="1000" b="1" dirty="0">
-              <a:solidFill>
-                <a:srgbClr val="1B1F3B"/>
-              </a:solidFill>
-              <a:latin typeface="Calibri" pitchFamily="34" charset="0"/>
-              <a:ea typeface="Calibri" pitchFamily="34" charset="0"/>
-              <a:cs typeface="Calibri" pitchFamily="34" charset="0"/>
-            </a:endParaRPr>
-          </a:p>
-          <a:p>
-            <a:pPr marL="609600" lvl="1" indent="-152400">
-              <a:lnSpc>
-                <a:spcPct val="108000"/>
-              </a:lnSpc>
+          </a:p>
+          <a:p>
+            <a:pPr>
               <a:spcBef>
-                <a:spcPts val="120"/>
+                <a:spcPts val="50"/>
               </a:spcBef>
-              <a:buFont typeface="Wingdings" charset="0"/>
-              <a:buChar char="Ø"/>
+              <a:spcAft>
+                <a:spcPts val="50"/>
+              </a:spcAft>
             </a:pPr>
             <a:r>
-              <a:rPr lang="en-US" sz="900" dirty="0">
+              <a:rPr sz="850" b="0">
                 <a:solidFill>
                   <a:srgbClr val="5B6584"/>
                 </a:solidFill>
-                <a:latin typeface="Calibri" pitchFamily="34" charset="0"/>
+                <a:latin typeface="Calibri"/>
               </a:rPr>
-              <a:t>Connect your CI/CD engine — Azure DevOps, GitHub Actions, or Jenkins. DaaS triggers it; it never replaces it.</a:t>
-            </a:r>
-            <a:endParaRPr lang="en-US" sz="900" dirty="0">
-              <a:solidFill>
-                <a:srgbClr val="5B6584"/>
-              </a:solidFill>
-              <a:latin typeface="Calibri" pitchFamily="34" charset="0"/>
-              <a:ea typeface="Calibri" pitchFamily="34" charset="0"/>
-              <a:cs typeface="Calibri" pitchFamily="34" charset="0"/>
-            </a:endParaRPr>
-          </a:p>
-          <a:p>
-            <a:pPr marL="609600" lvl="1" indent="-152400">
-              <a:lnSpc>
-                <a:spcPct val="108000"/>
-              </a:lnSpc>
+              <a:t>•  Connect your CI/CD engine — Azure DevOps, GitHub Actions, or Jenkins. DaaS triggers it; it never replaces it.</a:t>
+            </a:r>
+          </a:p>
+          <a:p>
+            <a:pPr>
               <a:spcBef>
-                <a:spcPts val="120"/>
+                <a:spcPts val="50"/>
               </a:spcBef>
-              <a:buFont typeface="Wingdings" charset="0"/>
-              <a:buChar char="Ø"/>
+              <a:spcAft>
+                <a:spcPts val="50"/>
+              </a:spcAft>
             </a:pPr>
             <a:r>
-              <a:rPr lang="en-US" sz="900" dirty="0">
+              <a:rPr sz="850" b="0">
                 <a:solidFill>
                   <a:srgbClr val="5B6584"/>
                 </a:solidFill>
-                <a:latin typeface="Calibri" pitchFamily="34" charset="0"/>
+                <a:latin typeface="Calibri"/>
               </a:rPr>
-              <a:t>Attach your ticketing system (ServiceNow, Jira) so change requests are auto-linked to every deployment run.</a:t>
-            </a:r>
-            <a:endParaRPr lang="en-US" sz="900" dirty="0">
-              <a:solidFill>
-                <a:srgbClr val="5B6584"/>
-              </a:solidFill>
-              <a:latin typeface="Calibri" pitchFamily="34" charset="0"/>
-              <a:ea typeface="Calibri" pitchFamily="34" charset="0"/>
-              <a:cs typeface="Calibri" pitchFamily="34" charset="0"/>
-            </a:endParaRPr>
-          </a:p>
-          <a:p>
-            <a:pPr marL="609600" lvl="1" indent="-152400">
-              <a:lnSpc>
-                <a:spcPct val="108000"/>
-              </a:lnSpc>
+              <a:t>•  Attach your ticketing system (ServiceNow, Jira) so change requests are auto-linked to every deployment run.</a:t>
+            </a:r>
+          </a:p>
+          <a:p>
+            <a:pPr>
               <a:spcBef>
-                <a:spcPts val="120"/>
+                <a:spcPts val="50"/>
               </a:spcBef>
-              <a:buFont typeface="Wingdings" charset="0"/>
-              <a:buChar char="Ø"/>
+              <a:spcAft>
+                <a:spcPts val="50"/>
+              </a:spcAft>
             </a:pPr>
             <a:r>
-              <a:rPr lang="en-US" sz="900" dirty="0">
+              <a:rPr sz="850" b="0">
                 <a:solidFill>
                   <a:srgbClr val="5B6584"/>
                 </a:solidFill>
-                <a:latin typeface="Calibri" pitchFamily="34" charset="0"/>
+                <a:latin typeface="Calibri"/>
               </a:rPr>
-              <a:t>Wire in monitoring tools (Prometheus, Grafana, Datadog) for live, automated post-deploy health checks.</a:t>
-            </a:r>
-            <a:endParaRPr lang="en-US" sz="900" dirty="0">
-              <a:solidFill>
-                <a:srgbClr val="5B6584"/>
-              </a:solidFill>
-              <a:latin typeface="Calibri" pitchFamily="34" charset="0"/>
-              <a:ea typeface="Calibri" pitchFamily="34" charset="0"/>
-              <a:cs typeface="Calibri" pitchFamily="34" charset="0"/>
-            </a:endParaRPr>
-          </a:p>
-          <a:p>
-            <a:pPr marL="171450" indent="-171450">
+              <a:t>•  Wire in monitoring tools (Prometheus, Grafana, Datadog) for live, automated post-deploy health checks.</a:t>
+            </a:r>
+          </a:p>
+          <a:p>
+            <a:pPr>
               <a:spcBef>
-                <a:spcPts val="500"/>
+                <a:spcPts val="300"/>
               </a:spcBef>
-              <a:buFont typeface="Wingdings"/>
-              <a:buChar char="q"/>
+              <a:spcAft>
+                <a:spcPts val="100"/>
+              </a:spcAft>
             </a:pPr>
             <a:r>
-              <a:rPr lang="en-US" sz="1000" b="1" dirty="0">
+              <a:rPr sz="1000" b="1">
                 <a:solidFill>
                   <a:srgbClr val="1B1F3B"/>
                 </a:solidFill>
-                <a:latin typeface="Calibri" pitchFamily="34" charset="0"/>
+                <a:latin typeface="Calibri"/>
               </a:rPr>
-              <a:t>Communication Channel</a:t>
-            </a:r>
-            <a:endParaRPr lang="en-US" sz="1000" b="1" dirty="0">
-              <a:solidFill>
-                <a:srgbClr val="1B1F3B"/>
-              </a:solidFill>
-              <a:latin typeface="Calibri" pitchFamily="34" charset="0"/>
-              <a:ea typeface="Calibri" pitchFamily="34" charset="0"/>
-              <a:cs typeface="Calibri" pitchFamily="34" charset="0"/>
-            </a:endParaRPr>
-          </a:p>
-          <a:p>
-            <a:pPr marL="609600" lvl="1" indent="-152400">
-              <a:lnSpc>
-                <a:spcPct val="108000"/>
-              </a:lnSpc>
+              <a:t>Communication Channels</a:t>
+            </a:r>
+          </a:p>
+          <a:p>
+            <a:pPr>
               <a:spcBef>
-                <a:spcPts val="120"/>
+                <a:spcPts val="50"/>
               </a:spcBef>
-              <a:buFont typeface="Wingdings" charset="0"/>
-              <a:buChar char="Ø"/>
+              <a:spcAft>
+                <a:spcPts val="50"/>
+              </a:spcAft>
             </a:pPr>
             <a:r>
-              <a:rPr lang="en-US" sz="900" dirty="0">
+              <a:rPr sz="850" b="0">
                 <a:solidFill>
                   <a:srgbClr val="5B6584"/>
                 </a:solidFill>
-                <a:latin typeface="Calibri" pitchFamily="34" charset="0"/>
+                <a:latin typeface="Calibri"/>
               </a:rPr>
-              <a:t>Route notifications through Teams, Slack, or email — no new tooling or channels required.</a:t>
-            </a:r>
-            <a:endParaRPr lang="en-US" sz="900" dirty="0">
-              <a:solidFill>
-                <a:srgbClr val="5B6584"/>
-              </a:solidFill>
-              <a:latin typeface="Calibri" pitchFamily="34" charset="0"/>
-              <a:ea typeface="Calibri" pitchFamily="34" charset="0"/>
-              <a:cs typeface="Calibri" pitchFamily="34" charset="0"/>
-            </a:endParaRPr>
-          </a:p>
-          <a:p>
-            <a:pPr marL="609600" lvl="1" indent="-152400">
-              <a:lnSpc>
-                <a:spcPct val="108000"/>
-              </a:lnSpc>
+              <a:t>•  Route notifications through Teams, Slack, or email — no new tooling or channels required.</a:t>
+            </a:r>
+          </a:p>
+          <a:p>
+            <a:pPr>
               <a:spcBef>
-                <a:spcPts val="120"/>
+                <a:spcPts val="50"/>
               </a:spcBef>
-              <a:buFont typeface="Wingdings" charset="0"/>
-              <a:buChar char="Ø"/>
+              <a:spcAft>
+                <a:spcPts val="50"/>
+              </a:spcAft>
             </a:pPr>
             <a:r>
-              <a:rPr lang="en-US" sz="900" dirty="0">
+              <a:rPr sz="850" b="0">
                 <a:solidFill>
                   <a:srgbClr val="5B6584"/>
                 </a:solidFill>
-                <a:latin typeface="Calibri" pitchFamily="34" charset="0"/>
+                <a:latin typeface="Calibri"/>
               </a:rPr>
-              <a:t>Per-stage rules ensure the right people are alerted at the right moment — approvals, failures, and sign-offs.</a:t>
-            </a:r>
-            <a:endParaRPr lang="en-US" sz="900" dirty="0">
-              <a:solidFill>
-                <a:srgbClr val="5B6584"/>
-              </a:solidFill>
-              <a:latin typeface="Calibri" pitchFamily="34" charset="0"/>
-              <a:ea typeface="Calibri" pitchFamily="34" charset="0"/>
-              <a:cs typeface="Calibri" pitchFamily="34" charset="0"/>
-            </a:endParaRPr>
-          </a:p>
-          <a:p>
-            <a:pPr marL="609600" lvl="1" indent="-152400">
-              <a:lnSpc>
-                <a:spcPct val="108000"/>
-              </a:lnSpc>
+              <a:t>•  Per-stage rules ensure the right people are alerted at the right moment — approvals, failures, and sign-offs.</a:t>
+            </a:r>
+          </a:p>
+          <a:p>
+            <a:pPr>
               <a:spcBef>
-                <a:spcPts val="120"/>
+                <a:spcPts val="50"/>
               </a:spcBef>
-              <a:buFont typeface="Wingdings" charset="0"/>
-              <a:buChar char="Ø"/>
+              <a:spcAft>
+                <a:spcPts val="50"/>
+              </a:spcAft>
             </a:pPr>
             <a:r>
-              <a:rPr lang="en-US" sz="900" dirty="0">
+              <a:rPr sz="850" b="0">
                 <a:solidFill>
                   <a:srgbClr val="5B6584"/>
                 </a:solidFill>
-                <a:latin typeface="Calibri" pitchFamily="34" charset="0"/>
+                <a:latin typeface="Calibri"/>
               </a:rPr>
-              <a:t>Templates carry environment name, release version, approver list, and direct one-click action links.</a:t>
-            </a:r>
-            <a:endParaRPr lang="en-US" sz="900" dirty="0">
-              <a:solidFill>
-                <a:srgbClr val="5B6584"/>
-              </a:solidFill>
-              <a:latin typeface="Calibri" pitchFamily="34" charset="0"/>
-              <a:ea typeface="Calibri" pitchFamily="34" charset="0"/>
-              <a:cs typeface="Calibri" pitchFamily="34" charset="0"/>
-            </a:endParaRPr>
-          </a:p>
-        </p:txBody>
-      </p:sp>
-      <p:sp>
-        <p:nvSpPr>
-          <p:cNvPr id="23" name="TB"/>
-          <p:cNvSpPr>
-            <a:spLocks noGrp="1"/>
-          </p:cNvSpPr>
-          <p:nvPr/>
-        </p:nvSpPr>
-        <p:spPr>
-          <a:xfrm>
-            <a:off x="613034" y="5130869"/>
-            <a:ext cx="10881360" cy="457200"/>
+              <a:t>•  Templates carry environment name, release version, approver list, and direct one-click action links.</a:t>
+            </a:r>
+          </a:p>
+        </p:txBody>
+      </p:sp>
+      <p:sp>
+        <p:nvSpPr>
+          <p:cNvPr id="50" name="TextBox 49"/>
+          <p:cNvSpPr txBox="1"/>
+          <p:nvPr/>
+        </p:nvSpPr>
+        <p:spPr>
+          <a:xfrm>
+            <a:off x="548640" y="4956048"/>
+            <a:ext cx="11094415" cy="365760"/>
           </a:xfrm>
           <a:prstGeom prst="rect">
             <a:avLst/>
           </a:prstGeom>
           <a:noFill/>
-          <a:ln/>
-        </p:spPr>
-        <p:txBody>
-          <a:bodyPr wrap="square" lIns="0" tIns="0" rIns="0" bIns="0" rtlCol="0" anchor="ctr"/>
-          <a:lstStyle/>
-          <a:p>
-            <a:pPr marL="0" indent="0" algn="l">
-              <a:buNone/>
-            </a:pPr>
-            <a:r>
-              <a:rPr lang="en-US" sz="1050" b="0" dirty="0">
+          <a:ln>
+            <a:noFill/>
+          </a:ln>
+        </p:spPr>
+        <p:txBody>
+          <a:bodyPr wrap="square" lIns="0" rIns="0" tIns="0" bIns="0">
+            <a:spAutoFit/>
+          </a:bodyPr>
+          <a:lstStyle/>
+          <a:p>
+            <a:pPr algn="l"/>
+            <a:r>
+              <a:rPr sz="950" b="0">
                 <a:solidFill>
                   <a:srgbClr val="5B6584"/>
                 </a:solidFill>
-                <a:latin typeface="Calibri" pitchFamily="34" charset="0"/>
+                <a:latin typeface="Calibri"/>
               </a:rPr>
               <a:t>Connect and Configure happen once per client. After that, every deployment runs through the platform automatically — no code change to add a client or change a process.</a:t>
             </a:r>
@@ -52862,191 +53029,82 @@
       </p:sp>
       <p:sp>
         <p:nvSpPr>
-          <p:cNvPr id="24" name="Shape"/>
-          <p:cNvSpPr/>
-          <p:nvPr/>
-        </p:nvSpPr>
-        <p:spPr>
-          <a:xfrm>
-            <a:off x="548640" y="5591890"/>
-            <a:ext cx="10881360" cy="566928"/>
-          </a:xfrm>
-          <a:prstGeom prst="roundRect">
-            <a:avLst>
-              <a:gd name="adj" fmla="val 4167"/>
-            </a:avLst>
+          <p:cNvPr id="51" name="Rectangle 50"/>
+          <p:cNvSpPr/>
+          <p:nvPr/>
+        </p:nvSpPr>
+        <p:spPr>
+          <a:xfrm>
+            <a:off x="442569" y="5394960"/>
+            <a:ext cx="11007547" cy="480060"/>
+          </a:xfrm>
+          <a:prstGeom prst="rect">
+            <a:avLst/>
           </a:prstGeom>
           <a:solidFill>
             <a:srgbClr val="0F1B35"/>
           </a:solidFill>
-          <a:ln/>
-        </p:spPr>
-        <p:txBody>
-          <a:bodyPr/>
-          <a:lstStyle/>
-          <a:p>
-            <a:endParaRPr/>
-          </a:p>
-        </p:txBody>
-      </p:sp>
-      <p:sp>
-        <p:nvSpPr>
-          <p:cNvPr id="25" name="TB"/>
-          <p:cNvSpPr>
-            <a:spLocks noGrp="1"/>
-          </p:cNvSpPr>
-          <p:nvPr/>
-        </p:nvSpPr>
-        <p:spPr>
-          <a:xfrm>
-            <a:off x="822960" y="5591890"/>
-            <a:ext cx="10332720" cy="566928"/>
+          <a:ln>
+            <a:noFill/>
+          </a:ln>
+        </p:spPr>
+        <p:style>
+          <a:lnRef idx="1">
+            <a:schemeClr val="accent1"/>
+          </a:lnRef>
+          <a:fillRef idx="3">
+            <a:schemeClr val="accent1"/>
+          </a:fillRef>
+          <a:effectRef idx="2">
+            <a:schemeClr val="accent1"/>
+          </a:effectRef>
+          <a:fontRef idx="minor">
+            <a:schemeClr val="lt1"/>
+          </a:fontRef>
+        </p:style>
+        <p:txBody>
+          <a:bodyPr rtlCol="0" anchor="ctr"/>
+          <a:lstStyle/>
+          <a:p>
+            <a:pPr algn="ctr"/>
+          </a:p>
+        </p:txBody>
+      </p:sp>
+      <p:sp>
+        <p:nvSpPr>
+          <p:cNvPr id="52" name="TextBox 51"/>
+          <p:cNvSpPr txBox="1"/>
+          <p:nvPr/>
+        </p:nvSpPr>
+        <p:spPr>
+          <a:xfrm>
+            <a:off x="572414" y="5394960"/>
+            <a:ext cx="10747857" cy="480060"/>
           </a:xfrm>
           <a:prstGeom prst="rect">
             <a:avLst/>
           </a:prstGeom>
           <a:noFill/>
-          <a:ln/>
-        </p:spPr>
-        <p:txBody>
-          <a:bodyPr wrap="square" lIns="0" tIns="0" rIns="0" bIns="0" rtlCol="0" anchor="ctr"/>
-          <a:lstStyle/>
-          <a:p>
-            <a:pPr marL="0" indent="0" algn="l">
-              <a:buNone/>
-            </a:pPr>
-            <a:r>
-              <a:rPr lang="en-US" sz="1050" b="0" dirty="0">
+          <a:ln>
+            <a:noFill/>
+          </a:ln>
+        </p:spPr>
+        <p:txBody>
+          <a:bodyPr wrap="square" anchor="ctr" lIns="0" rIns="0" tIns="0" bIns="0">
+            <a:spAutoFit/>
+          </a:bodyPr>
+          <a:lstStyle/>
+          <a:p>
+            <a:pPr algn="l"/>
+            <a:r>
+              <a:rPr sz="950" b="0">
                 <a:solidFill>
                   <a:srgbClr val="CADCFC"/>
                 </a:solidFill>
-                <a:latin typeface="Calibri" pitchFamily="34" charset="0"/>
+                <a:latin typeface="Calibri"/>
               </a:rPr>
               <a:t>Everything a deployment needs — phases, approvals, templates, notifications, environments — is defined here once and reused on every release.</a:t>
             </a:r>
-          </a:p>
-        </p:txBody>
-      </p:sp>
-      <p:sp>
-        <p:nvSpPr>
-          <p:cNvPr id="26" name="TB"/>
-          <p:cNvSpPr>
-            <a:spLocks noGrp="1"/>
-          </p:cNvSpPr>
-          <p:nvPr/>
-        </p:nvSpPr>
-        <p:spPr>
-          <a:xfrm>
-            <a:off x="457200" y="6519672"/>
-            <a:ext cx="8229600" cy="274320"/>
-          </a:xfrm>
-          <a:prstGeom prst="rect">
-            <a:avLst/>
-          </a:prstGeom>
-          <a:noFill/>
-          <a:ln/>
-        </p:spPr>
-        <p:txBody>
-          <a:bodyPr wrap="square" lIns="0" tIns="0" rIns="0" bIns="0" rtlCol="0" anchor="ctr"/>
-          <a:lstStyle/>
-          <a:p>
-            <a:pPr marL="0" indent="0" algn="l">
-              <a:buNone/>
-            </a:pPr>
-            <a:r>
-              <a:rPr lang="en-US" sz="800" b="0">
-                <a:solidFill>
-                  <a:srgbClr val="5B6584"/>
-                </a:solidFill>
-                <a:latin typeface="Calibri"/>
-                <a:ea typeface="Calibri"/>
-                <a:cs typeface="Calibri"/>
-              </a:rPr>
-              <a:t>Deployment as a Service</a:t>
-            </a:r>
-          </a:p>
-        </p:txBody>
-      </p:sp>
-      <p:sp>
-        <p:nvSpPr>
-          <p:cNvPr id="27" name="TB"/>
-          <p:cNvSpPr>
-            <a:spLocks noGrp="1"/>
-          </p:cNvSpPr>
-          <p:nvPr/>
-        </p:nvSpPr>
-        <p:spPr>
-          <a:xfrm>
-            <a:off x="11274552" y="6519672"/>
-            <a:ext cx="457200" cy="274320"/>
-          </a:xfrm>
-          <a:prstGeom prst="rect">
-            <a:avLst/>
-          </a:prstGeom>
-          <a:noFill/>
-          <a:ln/>
-        </p:spPr>
-        <p:txBody>
-          <a:bodyPr wrap="square" lIns="0" tIns="0" rIns="0" bIns="0" rtlCol="0" anchor="ctr"/>
-          <a:lstStyle/>
-          <a:p>
-            <a:pPr marL="0" indent="0" algn="r">
-              <a:buNone/>
-            </a:pPr>
-            <a:r>
-              <a:rPr lang="en-US" sz="800" b="0" dirty="0">
-                <a:solidFill>
-                  <a:srgbClr val="5B6584"/>
-                </a:solidFill>
-                <a:latin typeface="Calibri" pitchFamily="34" charset="0"/>
-              </a:rPr>
-              <a:t>4</a:t>
-            </a:r>
-          </a:p>
-        </p:txBody>
-      </p:sp>
-      <p:sp>
-        <p:nvSpPr>
-          <p:cNvPr id="29" name="Text 0">
-            <a:extLst>
-              <a:ext uri="{FF2B5EF4-FFF2-40B4-BE49-F238E27FC236}">
-                <a16:creationId xmlns:a16="http://schemas.microsoft.com/office/drawing/2014/main" id="{3A39FD0D-1678-A9F0-89B2-CE603341130C}"/>
-              </a:ext>
-            </a:extLst>
-          </p:cNvPr>
-          <p:cNvSpPr/>
-          <p:nvPr/>
-        </p:nvSpPr>
-        <p:spPr>
-          <a:xfrm>
-            <a:off x="461555" y="224246"/>
-            <a:ext cx="10058400" cy="274320"/>
-          </a:xfrm>
-          <a:prstGeom prst="rect">
-            <a:avLst/>
-          </a:prstGeom>
-          <a:noFill/>
-          <a:ln/>
-        </p:spPr>
-        <p:txBody>
-          <a:bodyPr wrap="square" rtlCol="0" anchor="ctr"/>
-          <a:lstStyle/>
-          <a:p>
-            <a:pPr marL="0" indent="0">
-              <a:buNone/>
-            </a:pPr>
-            <a:r>
-              <a:rPr lang="en-US" sz="1200" b="1" kern="0" spc="200">
-                <a:solidFill>
-                  <a:srgbClr val="1F6E66"/>
-                </a:solidFill>
-                <a:latin typeface="Calibri" pitchFamily="34" charset="0"/>
-                <a:ea typeface="Calibri" pitchFamily="34" charset="-122"/>
-                <a:cs typeface="Calibri" pitchFamily="34" charset="-120"/>
-              </a:rPr>
-              <a:t>TARGET ARCHITECTURE</a:t>
-            </a:r>
-            <a:endParaRPr lang="en-US" sz="1200"/>
           </a:p>
         </p:txBody>
       </p:sp>
@@ -53090,297 +53148,136 @@
       </p:grpSpPr>
       <p:sp>
         <p:nvSpPr>
-          <p:cNvPr id="2" name="Text 0"/>
-          <p:cNvSpPr/>
-          <p:nvPr/>
-        </p:nvSpPr>
-        <p:spPr>
-          <a:xfrm>
-            <a:off x="548640" y="365760"/>
-            <a:ext cx="10058400" cy="274320"/>
+          <p:cNvPr id="77" name="Rectangle 76"/>
+          <p:cNvSpPr/>
+          <p:nvPr/>
+        </p:nvSpPr>
+        <p:spPr>
+          <a:xfrm>
+            <a:off x="0" y="0"/>
+            <a:ext cx="12191969" cy="505023"/>
           </a:xfrm>
           <a:prstGeom prst="rect">
             <a:avLst/>
           </a:prstGeom>
+          <a:solidFill>
+            <a:srgbClr val="0F1B35"/>
+          </a:solidFill>
+          <a:ln>
+            <a:noFill/>
+          </a:ln>
+        </p:spPr>
+        <p:style>
+          <a:lnRef idx="1">
+            <a:schemeClr val="accent1"/>
+          </a:lnRef>
+          <a:fillRef idx="3">
+            <a:schemeClr val="accent1"/>
+          </a:fillRef>
+          <a:effectRef idx="2">
+            <a:schemeClr val="accent1"/>
+          </a:effectRef>
+          <a:fontRef idx="minor">
+            <a:schemeClr val="lt1"/>
+          </a:fontRef>
+        </p:style>
+        <p:txBody>
+          <a:bodyPr rtlCol="0" anchor="ctr"/>
+          <a:lstStyle/>
+          <a:p>
+            <a:pPr algn="ctr"/>
+          </a:p>
+        </p:txBody>
+      </p:sp>
+      <p:sp>
+        <p:nvSpPr>
+          <p:cNvPr id="78" name="TextBox 77"/>
+          <p:cNvSpPr txBox="1"/>
+          <p:nvPr/>
+        </p:nvSpPr>
+        <p:spPr>
+          <a:xfrm>
+            <a:off x="548640" y="0"/>
+            <a:ext cx="3000146" cy="505023"/>
+          </a:xfrm>
+          <a:prstGeom prst="rect">
+            <a:avLst/>
+          </a:prstGeom>
           <a:noFill/>
-          <a:ln/>
-        </p:spPr>
-        <p:txBody>
-          <a:bodyPr wrap="square" rtlCol="0" anchor="ctr"/>
-          <a:lstStyle/>
-          <a:p>
-            <a:pPr marL="0" indent="0">
-              <a:buNone/>
-            </a:pPr>
-            <a:r>
-              <a:rPr lang="en-US" sz="1200" b="1" kern="0" spc="200">
-                <a:solidFill>
-                  <a:srgbClr val="1F6E66"/>
-                </a:solidFill>
-                <a:latin typeface="Calibri" pitchFamily="34" charset="0"/>
-                <a:ea typeface="Calibri" pitchFamily="34" charset="-122"/>
-                <a:cs typeface="Calibri" pitchFamily="34" charset="-120"/>
+          <a:ln>
+            <a:noFill/>
+          </a:ln>
+        </p:spPr>
+        <p:txBody>
+          <a:bodyPr wrap="square" anchor="ctr" lIns="0" rIns="0" tIns="0" bIns="0">
+            <a:spAutoFit/>
+          </a:bodyPr>
+          <a:lstStyle/>
+          <a:p>
+            <a:pPr algn="l"/>
+            <a:r>
+              <a:rPr sz="800" b="1">
+                <a:solidFill>
+                  <a:srgbClr val="CADCFC"/>
+                </a:solidFill>
+                <a:latin typeface="Calibri"/>
               </a:rPr>
-              <a:t>TARGET ARCHITECTURE</a:t>
-            </a:r>
-            <a:endParaRPr lang="en-US" sz="1200"/>
-          </a:p>
-        </p:txBody>
-      </p:sp>
-      <p:sp>
-        <p:nvSpPr>
-          <p:cNvPr id="3" name="Text 1"/>
-          <p:cNvSpPr/>
-          <p:nvPr/>
-        </p:nvSpPr>
-        <p:spPr>
-          <a:xfrm>
-            <a:off x="548640" y="603504"/>
-            <a:ext cx="10881360" cy="640080"/>
+              <a:t>PRE-ONBOARDING</a:t>
+            </a:r>
+          </a:p>
+        </p:txBody>
+      </p:sp>
+      <p:sp>
+        <p:nvSpPr>
+          <p:cNvPr id="79" name="TextBox 78"/>
+          <p:cNvSpPr txBox="1"/>
+          <p:nvPr/>
+        </p:nvSpPr>
+        <p:spPr>
+          <a:xfrm>
+            <a:off x="0" y="0"/>
+            <a:ext cx="12191969" cy="505023"/>
           </a:xfrm>
           <a:prstGeom prst="rect">
             <a:avLst/>
           </a:prstGeom>
           <a:noFill/>
-          <a:ln/>
-        </p:spPr>
-        <p:txBody>
-          <a:bodyPr wrap="square" rtlCol="0" anchor="ctr"/>
-          <a:lstStyle/>
-          <a:p>
-            <a:pPr marL="0" indent="0">
-              <a:buNone/>
-            </a:pPr>
-            <a:r>
-              <a:rPr lang="en-US" sz="2600" b="1">
-                <a:solidFill>
-                  <a:srgbClr val="1E2761"/>
-                </a:solidFill>
-                <a:latin typeface="Cambria" pitchFamily="34" charset="0"/>
-                <a:ea typeface="Cambria" pitchFamily="34" charset="-122"/>
-                <a:cs typeface="Cambria" pitchFamily="34" charset="-120"/>
+          <a:ln>
+            <a:noFill/>
+          </a:ln>
+        </p:spPr>
+        <p:txBody>
+          <a:bodyPr wrap="square" anchor="ctr" lIns="0" rIns="0" tIns="0" bIns="0">
+            <a:spAutoFit/>
+          </a:bodyPr>
+          <a:lstStyle/>
+          <a:p>
+            <a:pPr algn="ctr"/>
+            <a:r>
+              <a:rPr sz="1300" b="1">
+                <a:solidFill>
+                  <a:srgbClr val="FFFFFF"/>
+                </a:solidFill>
+                <a:latin typeface="Calibri"/>
               </a:rPr>
               <a:t>How It's Configured &amp; Orchestrated</a:t>
             </a:r>
-            <a:endParaRPr lang="en-US" sz="2600"/>
-          </a:p>
-        </p:txBody>
-      </p:sp>
-      <p:sp>
-        <p:nvSpPr>
-          <p:cNvPr id="13" name="Shape 11"/>
-          <p:cNvSpPr/>
-          <p:nvPr/>
-        </p:nvSpPr>
-        <p:spPr>
-          <a:xfrm>
-            <a:off x="537908" y="2732682"/>
-            <a:ext cx="3246120" cy="2194560"/>
-          </a:xfrm>
-          <a:prstGeom prst="roundRect">
-            <a:avLst>
-              <a:gd name="adj" fmla="val 4167"/>
-            </a:avLst>
-          </a:prstGeom>
-          <a:solidFill>
-            <a:srgbClr val="002060"/>
-          </a:solidFill>
-          <a:ln/>
-        </p:spPr>
-        <p:txBody>
-          <a:bodyPr/>
-          <a:lstStyle/>
-          <a:p>
-            <a:endParaRPr/>
-          </a:p>
-        </p:txBody>
-      </p:sp>
-      <p:sp>
-        <p:nvSpPr>
-          <p:cNvPr id="14" name="Shape 12"/>
-          <p:cNvSpPr/>
-          <p:nvPr/>
-        </p:nvSpPr>
-        <p:spPr>
-          <a:xfrm>
-            <a:off x="766508" y="3598683"/>
-            <a:ext cx="420624" cy="420624"/>
-          </a:xfrm>
-          <a:prstGeom prst="ellipse">
-            <a:avLst/>
-          </a:prstGeom>
-          <a:solidFill>
-            <a:srgbClr val="FFFFFF"/>
-          </a:solidFill>
-          <a:ln/>
-        </p:spPr>
-        <p:txBody>
-          <a:bodyPr/>
-          <a:lstStyle/>
-          <a:p>
-            <a:endParaRPr/>
-          </a:p>
-        </p:txBody>
-      </p:sp>
-      <p:sp>
-        <p:nvSpPr>
-          <p:cNvPr id="15" name="Text 13"/>
-          <p:cNvSpPr/>
-          <p:nvPr/>
-        </p:nvSpPr>
-        <p:spPr>
-          <a:xfrm>
-            <a:off x="766508" y="3623094"/>
-            <a:ext cx="420624" cy="420624"/>
+          </a:p>
+        </p:txBody>
+      </p:sp>
+      <p:sp>
+        <p:nvSpPr>
+          <p:cNvPr id="80" name="Rectangle 79"/>
+          <p:cNvSpPr/>
+          <p:nvPr/>
+        </p:nvSpPr>
+        <p:spPr>
+          <a:xfrm>
+            <a:off x="2354854" y="864748"/>
+            <a:ext cx="1699961" cy="329184"/>
           </a:xfrm>
           <a:prstGeom prst="rect">
             <a:avLst/>
-          </a:prstGeom>
-          <a:noFill/>
-          <a:ln/>
-        </p:spPr>
-        <p:txBody>
-          <a:bodyPr wrap="square" lIns="0" tIns="0" rIns="0" bIns="0" rtlCol="0" anchor="ctr"/>
-          <a:lstStyle/>
-          <a:p>
-            <a:pPr marL="0" indent="0" algn="ctr">
-              <a:buNone/>
-            </a:pPr>
-            <a:r>
-              <a:rPr lang="en-US" sz="1600" b="1">
-                <a:solidFill>
-                  <a:srgbClr val="2C3E7B"/>
-                </a:solidFill>
-                <a:latin typeface="Arial"/>
-                <a:cs typeface="Arial"/>
-              </a:rPr>
-              <a:t>2</a:t>
-            </a:r>
-          </a:p>
-        </p:txBody>
-      </p:sp>
-      <p:sp>
-        <p:nvSpPr>
-          <p:cNvPr id="16" name="Text 14"/>
-          <p:cNvSpPr/>
-          <p:nvPr/>
-        </p:nvSpPr>
-        <p:spPr>
-          <a:xfrm>
-            <a:off x="1287716" y="3564047"/>
-            <a:ext cx="2423160" cy="457200"/>
-          </a:xfrm>
-          <a:prstGeom prst="rect">
-            <a:avLst/>
-          </a:prstGeom>
-          <a:noFill/>
-          <a:ln/>
-        </p:spPr>
-        <p:txBody>
-          <a:bodyPr wrap="square" lIns="91440" tIns="45720" rIns="91440" bIns="45720" rtlCol="0" anchor="ctr"/>
-          <a:lstStyle/>
-          <a:p>
-            <a:pPr marL="0" indent="0">
-              <a:lnSpc>
-                <a:spcPct val="102000"/>
-              </a:lnSpc>
-              <a:buNone/>
-            </a:pPr>
-            <a:r>
-              <a:rPr lang="en-US" sz="1300" b="1">
-                <a:solidFill>
-                  <a:schemeClr val="bg1"/>
-                </a:solidFill>
-                <a:latin typeface="Calibri"/>
-                <a:ea typeface="Calibri"/>
-                <a:cs typeface="Calibri"/>
-              </a:rPr>
-              <a:t>CLIENT</a:t>
-            </a:r>
-            <a:endParaRPr lang="en-US" sz="1300">
-              <a:solidFill>
-                <a:schemeClr val="bg1"/>
-              </a:solidFill>
-              <a:latin typeface="Calibri"/>
-              <a:ea typeface="Calibri"/>
-              <a:cs typeface="Calibri"/>
-            </a:endParaRPr>
-          </a:p>
-          <a:p>
-            <a:pPr marL="0" indent="0">
-              <a:lnSpc>
-                <a:spcPct val="102000"/>
-              </a:lnSpc>
-              <a:buNone/>
-            </a:pPr>
-            <a:r>
-              <a:rPr lang="en-US" sz="1300" b="1">
-                <a:solidFill>
-                  <a:schemeClr val="bg1"/>
-                </a:solidFill>
-                <a:latin typeface="Calibri"/>
-                <a:ea typeface="Calibri"/>
-                <a:cs typeface="Calibri"/>
-              </a:rPr>
-              <a:t>CONFIGURATION</a:t>
-            </a:r>
-            <a:endParaRPr lang="en-US" sz="1300">
-              <a:solidFill>
-                <a:schemeClr val="bg1"/>
-              </a:solidFill>
-              <a:latin typeface="Calibri"/>
-              <a:ea typeface="Calibri"/>
-              <a:cs typeface="Calibri"/>
-            </a:endParaRPr>
-          </a:p>
-        </p:txBody>
-      </p:sp>
-      <p:sp>
-        <p:nvSpPr>
-          <p:cNvPr id="17" name="Shape 15"/>
-          <p:cNvSpPr/>
-          <p:nvPr/>
-        </p:nvSpPr>
-        <p:spPr>
-          <a:xfrm>
-            <a:off x="3838892" y="3829962"/>
-            <a:ext cx="219456" cy="0"/>
-          </a:xfrm>
-          <a:prstGeom prst="line">
-            <a:avLst/>
-          </a:prstGeom>
-          <a:noFill/>
-          <a:ln w="31750">
-            <a:solidFill>
-              <a:srgbClr val="5B6584"/>
-            </a:solidFill>
-            <a:prstDash val="solid"/>
-            <a:tailEnd type="triangle"/>
-          </a:ln>
-        </p:spPr>
-        <p:txBody>
-          <a:bodyPr/>
-          <a:lstStyle/>
-          <a:p>
-            <a:endParaRPr/>
-          </a:p>
-        </p:txBody>
-      </p:sp>
-      <p:sp>
-        <p:nvSpPr>
-          <p:cNvPr id="18" name="Shape 16"/>
-          <p:cNvSpPr/>
-          <p:nvPr/>
-        </p:nvSpPr>
-        <p:spPr>
-          <a:xfrm>
-            <a:off x="4265054" y="2743415"/>
-            <a:ext cx="7315200" cy="2194560"/>
-          </a:xfrm>
-          <a:prstGeom prst="roundRect">
-            <a:avLst>
-              <a:gd name="adj" fmla="val 4167"/>
-            </a:avLst>
           </a:prstGeom>
           <a:solidFill>
             <a:srgbClr val="FFFFFF"/>
@@ -53389,305 +53286,119 @@
             <a:solidFill>
               <a:srgbClr val="CADCFC"/>
             </a:solidFill>
-            <a:prstDash val="solid"/>
           </a:ln>
         </p:spPr>
-        <p:txBody>
-          <a:bodyPr/>
-          <a:lstStyle/>
-          <a:p>
-            <a:endParaRPr/>
-          </a:p>
-        </p:txBody>
-      </p:sp>
-      <p:sp>
-        <p:nvSpPr>
-          <p:cNvPr id="20" name="Text 18"/>
-          <p:cNvSpPr/>
-          <p:nvPr/>
-        </p:nvSpPr>
-        <p:spPr>
-          <a:xfrm>
-            <a:off x="4676534" y="2926295"/>
-            <a:ext cx="6675120" cy="457200"/>
+        <p:style>
+          <a:lnRef idx="1">
+            <a:schemeClr val="accent1"/>
+          </a:lnRef>
+          <a:fillRef idx="3">
+            <a:schemeClr val="accent1"/>
+          </a:fillRef>
+          <a:effectRef idx="2">
+            <a:schemeClr val="accent1"/>
+          </a:effectRef>
+          <a:fontRef idx="minor">
+            <a:schemeClr val="lt1"/>
+          </a:fontRef>
+        </p:style>
+        <p:txBody>
+          <a:bodyPr rtlCol="0" anchor="ctr"/>
+          <a:lstStyle/>
+          <a:p>
+            <a:pPr algn="ctr"/>
+          </a:p>
+        </p:txBody>
+      </p:sp>
+      <p:sp>
+        <p:nvSpPr>
+          <p:cNvPr id="81" name="TextBox 80"/>
+          <p:cNvSpPr txBox="1"/>
+          <p:nvPr/>
+        </p:nvSpPr>
+        <p:spPr>
+          <a:xfrm>
+            <a:off x="2354854" y="864748"/>
+            <a:ext cx="1699961" cy="329184"/>
           </a:xfrm>
           <a:prstGeom prst="rect">
             <a:avLst/>
           </a:prstGeom>
           <a:noFill/>
-          <a:ln/>
-        </p:spPr>
-        <p:txBody>
-          <a:bodyPr wrap="square" lIns="91440" tIns="45720" rIns="91440" bIns="45720" rtlCol="0" anchor="t"/>
-          <a:lstStyle/>
-          <a:p>
-            <a:pPr marL="171450" indent="-171450">
-              <a:lnSpc>
-                <a:spcPct val="112000"/>
-              </a:lnSpc>
-              <a:buFont typeface="Wingdings"/>
-              <a:buChar char="q"/>
-            </a:pPr>
-            <a:r>
-              <a:rPr lang="en-US" sz="1000">
-                <a:solidFill>
-                  <a:srgbClr val="1B1F3B"/>
+          <a:ln>
+            <a:noFill/>
+          </a:ln>
+        </p:spPr>
+        <p:txBody>
+          <a:bodyPr wrap="square" anchor="ctr" lIns="0" rIns="0" tIns="0" bIns="0">
+            <a:spAutoFit/>
+          </a:bodyPr>
+          <a:lstStyle/>
+          <a:p>
+            <a:pPr algn="ctr"/>
+            <a:r>
+              <a:rPr sz="850" b="1">
+                <a:solidFill>
+                  <a:srgbClr val="5B6584"/>
                 </a:solidFill>
                 <a:latin typeface="Calibri"/>
-                <a:ea typeface="Calibri"/>
-                <a:cs typeface="Calibri"/>
               </a:rPr>
-              <a:t>Applications, Environments &amp; Release Definitions — registered once per account</a:t>
-            </a:r>
-            <a:endParaRPr lang="en-US" sz="1000">
-              <a:ea typeface="Calibri" panose="020F0502020204030204"/>
-              <a:cs typeface="Calibri" panose="020F0502020204030204"/>
-            </a:endParaRPr>
-          </a:p>
-        </p:txBody>
-      </p:sp>
-      <p:sp>
-        <p:nvSpPr>
-          <p:cNvPr id="22" name="Text 20"/>
-          <p:cNvSpPr/>
-          <p:nvPr/>
-        </p:nvSpPr>
-        <p:spPr>
-          <a:xfrm>
-            <a:off x="4676534" y="3383495"/>
-            <a:ext cx="6675120" cy="457200"/>
+              <a:t>ANALYSE</a:t>
+            </a:r>
+          </a:p>
+        </p:txBody>
+      </p:sp>
+      <p:sp>
+        <p:nvSpPr>
+          <p:cNvPr id="82" name="TextBox 81"/>
+          <p:cNvSpPr txBox="1"/>
+          <p:nvPr/>
+        </p:nvSpPr>
+        <p:spPr>
+          <a:xfrm>
+            <a:off x="4054815" y="864748"/>
+            <a:ext cx="182880" cy="329184"/>
           </a:xfrm>
           <a:prstGeom prst="rect">
             <a:avLst/>
           </a:prstGeom>
           <a:noFill/>
-          <a:ln/>
-        </p:spPr>
-        <p:txBody>
-          <a:bodyPr wrap="square" lIns="91440" tIns="45720" rIns="91440" bIns="45720" rtlCol="0" anchor="t"/>
-          <a:lstStyle/>
-          <a:p>
-            <a:pPr marL="171450" indent="-171450">
-              <a:lnSpc>
-                <a:spcPct val="112000"/>
-              </a:lnSpc>
-              <a:buFont typeface="Wingdings"/>
-              <a:buChar char="q"/>
-            </a:pPr>
-            <a:r>
-              <a:rPr lang="en-US" sz="1000">
-                <a:solidFill>
-                  <a:srgbClr val="1B1F3B"/>
-                </a:solidFill>
-                <a:latin typeface="Calibri" pitchFamily="34" charset="0"/>
-                <a:ea typeface="Calibri" pitchFamily="34" charset="-122"/>
-                <a:cs typeface="Calibri" pitchFamily="34" charset="-120"/>
+          <a:ln>
+            <a:noFill/>
+          </a:ln>
+        </p:spPr>
+        <p:txBody>
+          <a:bodyPr wrap="none" anchor="ctr" lIns="0" rIns="0" tIns="0" bIns="0">
+            <a:spAutoFit/>
+          </a:bodyPr>
+          <a:lstStyle/>
+          <a:p>
+            <a:pPr algn="ctr"/>
+            <a:r>
+              <a:rPr sz="1000" b="0">
+                <a:solidFill>
+                  <a:srgbClr val="CADCFC"/>
+                </a:solidFill>
+                <a:latin typeface="Calibri"/>
               </a:rPr>
-              <a:t>Approval Workflows — sequential, parallel, or conditional per stage, defined as configuration, not code</a:t>
-            </a:r>
-            <a:endParaRPr lang="en-US" sz="1000">
-              <a:ea typeface="Calibri" panose="020F0502020204030204"/>
-              <a:cs typeface="Calibri" panose="020F0502020204030204"/>
-            </a:endParaRPr>
-          </a:p>
-        </p:txBody>
-      </p:sp>
-      <p:sp>
-        <p:nvSpPr>
-          <p:cNvPr id="24" name="Text 22"/>
-          <p:cNvSpPr/>
-          <p:nvPr/>
-        </p:nvSpPr>
-        <p:spPr>
-          <a:xfrm>
-            <a:off x="4676534" y="3840695"/>
-            <a:ext cx="6675120" cy="457200"/>
+              <a:t>→</a:t>
+            </a:r>
+          </a:p>
+        </p:txBody>
+      </p:sp>
+      <p:sp>
+        <p:nvSpPr>
+          <p:cNvPr id="83" name="Rectangle 82"/>
+          <p:cNvSpPr/>
+          <p:nvPr/>
+        </p:nvSpPr>
+        <p:spPr>
+          <a:xfrm>
+            <a:off x="4201119" y="864748"/>
+            <a:ext cx="1699961" cy="329184"/>
           </a:xfrm>
           <a:prstGeom prst="rect">
             <a:avLst/>
-          </a:prstGeom>
-          <a:noFill/>
-          <a:ln/>
-        </p:spPr>
-        <p:txBody>
-          <a:bodyPr wrap="square" lIns="91440" tIns="45720" rIns="91440" bIns="45720" rtlCol="0" anchor="t"/>
-          <a:lstStyle/>
-          <a:p>
-            <a:pPr marL="171450" indent="-171450">
-              <a:lnSpc>
-                <a:spcPct val="112000"/>
-              </a:lnSpc>
-              <a:buFont typeface="Wingdings"/>
-              <a:buChar char="q"/>
-            </a:pPr>
-            <a:r>
-              <a:rPr lang="en-US" sz="1000">
-                <a:solidFill>
-                  <a:srgbClr val="1B1F3B"/>
-                </a:solidFill>
-                <a:latin typeface="Calibri" pitchFamily="34" charset="0"/>
-                <a:ea typeface="Calibri" pitchFamily="34" charset="-122"/>
-                <a:cs typeface="Calibri" pitchFamily="34" charset="-120"/>
-              </a:rPr>
-              <a:t>Deployment Templates — Standard Release, Config-Only, Hotfix, Infra-Only — each mapped to its own phases and APIs</a:t>
-            </a:r>
-            <a:endParaRPr lang="en-US" sz="1000">
-              <a:ea typeface="Calibri" panose="020F0502020204030204"/>
-              <a:cs typeface="Calibri" panose="020F0502020204030204"/>
-            </a:endParaRPr>
-          </a:p>
-        </p:txBody>
-      </p:sp>
-      <p:sp>
-        <p:nvSpPr>
-          <p:cNvPr id="26" name="Text 24"/>
-          <p:cNvSpPr/>
-          <p:nvPr/>
-        </p:nvSpPr>
-        <p:spPr>
-          <a:xfrm>
-            <a:off x="4676534" y="4297895"/>
-            <a:ext cx="6675120" cy="457200"/>
-          </a:xfrm>
-          <a:prstGeom prst="rect">
-            <a:avLst/>
-          </a:prstGeom>
-          <a:noFill/>
-          <a:ln/>
-        </p:spPr>
-        <p:txBody>
-          <a:bodyPr wrap="square" lIns="91440" tIns="45720" rIns="91440" bIns="45720" rtlCol="0" anchor="t"/>
-          <a:lstStyle/>
-          <a:p>
-            <a:pPr marL="171450" indent="-171450">
-              <a:lnSpc>
-                <a:spcPct val="112000"/>
-              </a:lnSpc>
-              <a:buFont typeface="Wingdings"/>
-              <a:buChar char="q"/>
-            </a:pPr>
-            <a:r>
-              <a:rPr lang="en-US" sz="1000">
-                <a:solidFill>
-                  <a:srgbClr val="1B1F3B"/>
-                </a:solidFill>
-                <a:latin typeface="Calibri"/>
-                <a:ea typeface="Calibri"/>
-                <a:cs typeface="Calibri"/>
-              </a:rPr>
-              <a:t>Promotion, Notification &amp; Validation Rules — the gates and alerts that govern every release</a:t>
-            </a:r>
-            <a:endParaRPr lang="en-US" sz="1000">
-              <a:latin typeface="Calibri"/>
-              <a:ea typeface="Calibri"/>
-              <a:cs typeface="Calibri"/>
-            </a:endParaRPr>
-          </a:p>
-        </p:txBody>
-      </p:sp>
-      <p:sp>
-        <p:nvSpPr>
-          <p:cNvPr id="41" name="Text 39"/>
-          <p:cNvSpPr/>
-          <p:nvPr/>
-        </p:nvSpPr>
-        <p:spPr>
-          <a:xfrm>
-            <a:off x="457200" y="6519672"/>
-            <a:ext cx="8229600" cy="274320"/>
-          </a:xfrm>
-          <a:prstGeom prst="rect">
-            <a:avLst/>
-          </a:prstGeom>
-          <a:noFill/>
-          <a:ln/>
-        </p:spPr>
-        <p:txBody>
-          <a:bodyPr wrap="square" lIns="91440" tIns="45720" rIns="91440" bIns="45720" rtlCol="0" anchor="ctr"/>
-          <a:lstStyle/>
-          <a:p>
-            <a:pPr marL="0" indent="0">
-              <a:buNone/>
-            </a:pPr>
-            <a:r>
-              <a:rPr lang="en-US" sz="1000">
-                <a:solidFill>
-                  <a:srgbClr val="5B6584"/>
-                </a:solidFill>
-                <a:latin typeface="Calibri"/>
-                <a:ea typeface="Calibri"/>
-                <a:cs typeface="Calibri"/>
-              </a:rPr>
-              <a:t>Deployment as a Service</a:t>
-            </a:r>
-            <a:endParaRPr lang="en-US" sz="1000">
-              <a:latin typeface="Calibri"/>
-              <a:ea typeface="Calibri"/>
-              <a:cs typeface="Calibri"/>
-            </a:endParaRPr>
-          </a:p>
-        </p:txBody>
-      </p:sp>
-      <p:sp>
-        <p:nvSpPr>
-          <p:cNvPr id="42" name="Text 40"/>
-          <p:cNvSpPr/>
-          <p:nvPr/>
-        </p:nvSpPr>
-        <p:spPr>
-          <a:xfrm>
-            <a:off x="11274552" y="6519672"/>
-            <a:ext cx="457200" cy="274320"/>
-          </a:xfrm>
-          <a:prstGeom prst="rect">
-            <a:avLst/>
-          </a:prstGeom>
-          <a:noFill/>
-          <a:ln/>
-        </p:spPr>
-        <p:txBody>
-          <a:bodyPr wrap="square" rtlCol="0" anchor="ctr"/>
-          <a:lstStyle/>
-          <a:p>
-            <a:pPr marL="0" indent="0" algn="r">
-              <a:buNone/>
-            </a:pPr>
-            <a:r>
-              <a:rPr lang="en-US" sz="1000">
-                <a:solidFill>
-                  <a:srgbClr val="5B6584"/>
-                </a:solidFill>
-                <a:latin typeface="Calibri" pitchFamily="34" charset="0"/>
-                <a:ea typeface="Calibri" pitchFamily="34" charset="-122"/>
-                <a:cs typeface="Calibri" pitchFamily="34" charset="-120"/>
-              </a:rPr>
-              <a:t>5</a:t>
-            </a:r>
-            <a:endParaRPr lang="en-US" sz="1000"/>
-          </a:p>
-        </p:txBody>
-      </p:sp>
-      <p:sp>
-        <p:nvSpPr>
-          <p:cNvPr id="56" name="Shape">
-            <a:extLst>
-              <a:ext uri="{FF2B5EF4-FFF2-40B4-BE49-F238E27FC236}">
-                <a16:creationId xmlns:a16="http://schemas.microsoft.com/office/drawing/2014/main" id="{01AC10C3-FE1F-FD76-0456-1DF93D058DF8}"/>
-              </a:ext>
-            </a:extLst>
-          </p:cNvPr>
-          <p:cNvSpPr/>
-          <p:nvPr/>
-        </p:nvSpPr>
-        <p:spPr>
-          <a:xfrm>
-            <a:off x="1521712" y="1403200"/>
-            <a:ext cx="1700000" cy="329184"/>
-          </a:xfrm>
-          <a:prstGeom prst="roundRect">
-            <a:avLst>
-              <a:gd name="adj" fmla="val 16667"/>
-            </a:avLst>
           </a:prstGeom>
           <a:solidFill>
             <a:srgbClr val="FFFFFF"/>
@@ -53696,99 +53407,100 @@
             <a:solidFill>
               <a:srgbClr val="CADCFC"/>
             </a:solidFill>
-            <a:prstDash val="solid"/>
           </a:ln>
         </p:spPr>
-        <p:txBody>
-          <a:bodyPr/>
-          <a:lstStyle/>
-          <a:p>
-            <a:endParaRPr/>
-          </a:p>
-        </p:txBody>
-      </p:sp>
-      <p:sp>
-        <p:nvSpPr>
-          <p:cNvPr id="58" name="TB">
-            <a:extLst>
-              <a:ext uri="{FF2B5EF4-FFF2-40B4-BE49-F238E27FC236}">
-                <a16:creationId xmlns:a16="http://schemas.microsoft.com/office/drawing/2014/main" id="{B6A13FD9-C87A-6280-A32B-47F35118DCA2}"/>
-              </a:ext>
-            </a:extLst>
-          </p:cNvPr>
-          <p:cNvSpPr>
-            <a:spLocks noGrp="1"/>
-          </p:cNvSpPr>
-          <p:nvPr/>
-        </p:nvSpPr>
-        <p:spPr>
-          <a:xfrm>
-            <a:off x="1521712" y="1403200"/>
-            <a:ext cx="1700000" cy="329184"/>
+        <p:style>
+          <a:lnRef idx="1">
+            <a:schemeClr val="accent1"/>
+          </a:lnRef>
+          <a:fillRef idx="3">
+            <a:schemeClr val="accent1"/>
+          </a:fillRef>
+          <a:effectRef idx="2">
+            <a:schemeClr val="accent1"/>
+          </a:effectRef>
+          <a:fontRef idx="minor">
+            <a:schemeClr val="lt1"/>
+          </a:fontRef>
+        </p:style>
+        <p:txBody>
+          <a:bodyPr rtlCol="0" anchor="ctr"/>
+          <a:lstStyle/>
+          <a:p>
+            <a:pPr algn="ctr"/>
+          </a:p>
+        </p:txBody>
+      </p:sp>
+      <p:sp>
+        <p:nvSpPr>
+          <p:cNvPr id="84" name="TextBox 83"/>
+          <p:cNvSpPr txBox="1"/>
+          <p:nvPr/>
+        </p:nvSpPr>
+        <p:spPr>
+          <a:xfrm>
+            <a:off x="4201119" y="864748"/>
+            <a:ext cx="1699961" cy="329184"/>
           </a:xfrm>
           <a:prstGeom prst="rect">
             <a:avLst/>
           </a:prstGeom>
           <a:noFill/>
-          <a:ln/>
-        </p:spPr>
-        <p:txBody>
-          <a:bodyPr wrap="square" lIns="0" tIns="0" rIns="0" bIns="0" rtlCol="0" anchor="ctr"/>
-          <a:lstStyle/>
-          <a:p>
-            <a:pPr marL="0" indent="0" algn="ctr">
-              <a:buNone/>
-            </a:pPr>
-            <a:r>
-              <a:rPr lang="en-US" sz="850" b="1" dirty="0">
+          <a:ln>
+            <a:noFill/>
+          </a:ln>
+        </p:spPr>
+        <p:txBody>
+          <a:bodyPr wrap="square" anchor="ctr" lIns="0" rIns="0" tIns="0" bIns="0">
+            <a:spAutoFit/>
+          </a:bodyPr>
+          <a:lstStyle/>
+          <a:p>
+            <a:pPr algn="ctr"/>
+            <a:r>
+              <a:rPr sz="850" b="1">
                 <a:solidFill>
                   <a:srgbClr val="5B6584"/>
                 </a:solidFill>
-                <a:latin typeface="Calibri" pitchFamily="34" charset="0"/>
+                <a:latin typeface="Calibri"/>
               </a:rPr>
-              <a:t>ANALYSE</a:t>
-            </a:r>
-          </a:p>
-        </p:txBody>
-      </p:sp>
-      <p:sp>
-        <p:nvSpPr>
-          <p:cNvPr id="60" name="TB">
-            <a:extLst>
-              <a:ext uri="{FF2B5EF4-FFF2-40B4-BE49-F238E27FC236}">
-                <a16:creationId xmlns:a16="http://schemas.microsoft.com/office/drawing/2014/main" id="{DCB27BCD-2039-A476-F651-1A9D0D357D7B}"/>
-              </a:ext>
-            </a:extLst>
-          </p:cNvPr>
-          <p:cNvSpPr>
-            <a:spLocks noGrp="1"/>
-          </p:cNvSpPr>
-          <p:nvPr/>
-        </p:nvSpPr>
-        <p:spPr>
-          <a:xfrm>
-            <a:off x="3221712" y="1403200"/>
+              <a:t>CONNECT</a:t>
+            </a:r>
+          </a:p>
+        </p:txBody>
+      </p:sp>
+      <p:sp>
+        <p:nvSpPr>
+          <p:cNvPr id="85" name="TextBox 84"/>
+          <p:cNvSpPr txBox="1"/>
+          <p:nvPr/>
+        </p:nvSpPr>
+        <p:spPr>
+          <a:xfrm>
+            <a:off x="5901171" y="864748"/>
             <a:ext cx="182880" cy="329184"/>
           </a:xfrm>
           <a:prstGeom prst="rect">
             <a:avLst/>
           </a:prstGeom>
           <a:noFill/>
-          <a:ln/>
-        </p:spPr>
-        <p:txBody>
-          <a:bodyPr wrap="square" lIns="0" tIns="0" rIns="0" bIns="0" rtlCol="0" anchor="ctr"/>
-          <a:lstStyle/>
-          <a:p>
-            <a:pPr marL="0" indent="0" algn="ctr">
-              <a:buNone/>
-            </a:pPr>
-            <a:r>
-              <a:rPr lang="en-US" sz="1000" b="0" i="0" dirty="0">
+          <a:ln>
+            <a:noFill/>
+          </a:ln>
+        </p:spPr>
+        <p:txBody>
+          <a:bodyPr wrap="none" anchor="ctr" lIns="0" rIns="0" tIns="0" bIns="0">
+            <a:spAutoFit/>
+          </a:bodyPr>
+          <a:lstStyle/>
+          <a:p>
+            <a:pPr algn="ctr"/>
+            <a:r>
+              <a:rPr sz="1000" b="0">
                 <a:solidFill>
                   <a:srgbClr val="CADCFC"/>
                 </a:solidFill>
-                <a:latin typeface="Calibri" pitchFamily="34" charset="0"/>
+                <a:latin typeface="Calibri"/>
               </a:rPr>
               <a:t>→</a:t>
             </a:r>
@@ -53797,25 +53509,138 @@
       </p:sp>
       <p:sp>
         <p:nvSpPr>
-          <p:cNvPr id="62" name="Shape">
-            <a:extLst>
-              <a:ext uri="{FF2B5EF4-FFF2-40B4-BE49-F238E27FC236}">
-                <a16:creationId xmlns:a16="http://schemas.microsoft.com/office/drawing/2014/main" id="{E2CC44C4-201B-6BB7-0AF7-5EEB1621212A}"/>
-              </a:ext>
-            </a:extLst>
-          </p:cNvPr>
-          <p:cNvSpPr/>
-          <p:nvPr/>
-        </p:nvSpPr>
-        <p:spPr>
-          <a:xfrm>
-            <a:off x="3368016" y="1403200"/>
-            <a:ext cx="1700000" cy="329184"/>
-          </a:xfrm>
-          <a:prstGeom prst="roundRect">
-            <a:avLst>
-              <a:gd name="adj" fmla="val 16667"/>
-            </a:avLst>
+          <p:cNvPr id="86" name="Rectangle 85"/>
+          <p:cNvSpPr/>
+          <p:nvPr/>
+        </p:nvSpPr>
+        <p:spPr>
+          <a:xfrm>
+            <a:off x="6047475" y="864748"/>
+            <a:ext cx="1699961" cy="329184"/>
+          </a:xfrm>
+          <a:prstGeom prst="rect">
+            <a:avLst/>
+          </a:prstGeom>
+          <a:solidFill>
+            <a:srgbClr val="0F1B35"/>
+          </a:solidFill>
+          <a:ln w="15875">
+            <a:solidFill>
+              <a:srgbClr val="0F1B35"/>
+            </a:solidFill>
+          </a:ln>
+        </p:spPr>
+        <p:style>
+          <a:lnRef idx="1">
+            <a:schemeClr val="accent1"/>
+          </a:lnRef>
+          <a:fillRef idx="3">
+            <a:schemeClr val="accent1"/>
+          </a:fillRef>
+          <a:effectRef idx="2">
+            <a:schemeClr val="accent1"/>
+          </a:effectRef>
+          <a:fontRef idx="minor">
+            <a:schemeClr val="lt1"/>
+          </a:fontRef>
+        </p:style>
+        <p:txBody>
+          <a:bodyPr rtlCol="0" anchor="ctr"/>
+          <a:lstStyle/>
+          <a:p>
+            <a:pPr algn="ctr"/>
+          </a:p>
+        </p:txBody>
+      </p:sp>
+      <p:sp>
+        <p:nvSpPr>
+          <p:cNvPr id="87" name="TextBox 86"/>
+          <p:cNvSpPr txBox="1"/>
+          <p:nvPr/>
+        </p:nvSpPr>
+        <p:spPr>
+          <a:xfrm>
+            <a:off x="6047475" y="864748"/>
+            <a:ext cx="1699961" cy="329184"/>
+          </a:xfrm>
+          <a:prstGeom prst="rect">
+            <a:avLst/>
+          </a:prstGeom>
+          <a:noFill/>
+          <a:ln>
+            <a:noFill/>
+          </a:ln>
+        </p:spPr>
+        <p:txBody>
+          <a:bodyPr wrap="square" anchor="ctr" lIns="0" rIns="0" tIns="0" bIns="0">
+            <a:spAutoFit/>
+          </a:bodyPr>
+          <a:lstStyle/>
+          <a:p>
+            <a:pPr algn="ctr"/>
+            <a:r>
+              <a:rPr sz="850" b="1">
+                <a:solidFill>
+                  <a:srgbClr val="FFFFFF"/>
+                </a:solidFill>
+                <a:latin typeface="Calibri"/>
+              </a:rPr>
+              <a:t>CONFIGURE</a:t>
+            </a:r>
+          </a:p>
+        </p:txBody>
+      </p:sp>
+      <p:sp>
+        <p:nvSpPr>
+          <p:cNvPr id="88" name="TextBox 87"/>
+          <p:cNvSpPr txBox="1"/>
+          <p:nvPr/>
+        </p:nvSpPr>
+        <p:spPr>
+          <a:xfrm>
+            <a:off x="7747528" y="864748"/>
+            <a:ext cx="182880" cy="329184"/>
+          </a:xfrm>
+          <a:prstGeom prst="rect">
+            <a:avLst/>
+          </a:prstGeom>
+          <a:noFill/>
+          <a:ln>
+            <a:noFill/>
+          </a:ln>
+        </p:spPr>
+        <p:txBody>
+          <a:bodyPr wrap="none" anchor="ctr" lIns="0" rIns="0" tIns="0" bIns="0">
+            <a:spAutoFit/>
+          </a:bodyPr>
+          <a:lstStyle/>
+          <a:p>
+            <a:pPr algn="ctr"/>
+            <a:r>
+              <a:rPr sz="1000" b="0">
+                <a:solidFill>
+                  <a:srgbClr val="CADCFC"/>
+                </a:solidFill>
+                <a:latin typeface="Calibri"/>
+              </a:rPr>
+              <a:t>→</a:t>
+            </a:r>
+          </a:p>
+        </p:txBody>
+      </p:sp>
+      <p:sp>
+        <p:nvSpPr>
+          <p:cNvPr id="89" name="Rectangle 88"/>
+          <p:cNvSpPr/>
+          <p:nvPr/>
+        </p:nvSpPr>
+        <p:spPr>
+          <a:xfrm>
+            <a:off x="7893832" y="864748"/>
+            <a:ext cx="1699961" cy="329184"/>
+          </a:xfrm>
+          <a:prstGeom prst="rect">
+            <a:avLst/>
           </a:prstGeom>
           <a:solidFill>
             <a:srgbClr val="FFFFFF"/>
@@ -53824,256 +53649,345 @@
             <a:solidFill>
               <a:srgbClr val="CADCFC"/>
             </a:solidFill>
-            <a:prstDash val="solid"/>
           </a:ln>
         </p:spPr>
-        <p:txBody>
-          <a:bodyPr/>
-          <a:lstStyle/>
-          <a:p>
-            <a:endParaRPr/>
-          </a:p>
-        </p:txBody>
-      </p:sp>
-      <p:sp>
-        <p:nvSpPr>
-          <p:cNvPr id="64" name="TB">
-            <a:extLst>
-              <a:ext uri="{FF2B5EF4-FFF2-40B4-BE49-F238E27FC236}">
-                <a16:creationId xmlns:a16="http://schemas.microsoft.com/office/drawing/2014/main" id="{C98665CC-1507-CAA2-B473-F488AEC3B43F}"/>
-              </a:ext>
-            </a:extLst>
-          </p:cNvPr>
-          <p:cNvSpPr>
-            <a:spLocks noGrp="1"/>
-          </p:cNvSpPr>
-          <p:nvPr/>
-        </p:nvSpPr>
-        <p:spPr>
-          <a:xfrm>
-            <a:off x="3317216" y="1403200"/>
-            <a:ext cx="1700000" cy="329184"/>
+        <p:style>
+          <a:lnRef idx="1">
+            <a:schemeClr val="accent1"/>
+          </a:lnRef>
+          <a:fillRef idx="3">
+            <a:schemeClr val="accent1"/>
+          </a:fillRef>
+          <a:effectRef idx="2">
+            <a:schemeClr val="accent1"/>
+          </a:effectRef>
+          <a:fontRef idx="minor">
+            <a:schemeClr val="lt1"/>
+          </a:fontRef>
+        </p:style>
+        <p:txBody>
+          <a:bodyPr rtlCol="0" anchor="ctr"/>
+          <a:lstStyle/>
+          <a:p>
+            <a:pPr algn="ctr"/>
+          </a:p>
+        </p:txBody>
+      </p:sp>
+      <p:sp>
+        <p:nvSpPr>
+          <p:cNvPr id="90" name="TextBox 89"/>
+          <p:cNvSpPr txBox="1"/>
+          <p:nvPr/>
+        </p:nvSpPr>
+        <p:spPr>
+          <a:xfrm>
+            <a:off x="7893832" y="864748"/>
+            <a:ext cx="1699961" cy="329184"/>
           </a:xfrm>
           <a:prstGeom prst="rect">
             <a:avLst/>
           </a:prstGeom>
           <a:noFill/>
-          <a:ln/>
-        </p:spPr>
-        <p:txBody>
-          <a:bodyPr wrap="square" lIns="0" tIns="0" rIns="0" bIns="0" rtlCol="0" anchor="ctr"/>
-          <a:lstStyle/>
-          <a:p>
-            <a:pPr marL="0" indent="0" algn="ctr">
-              <a:buNone/>
-            </a:pPr>
-            <a:r>
-              <a:rPr lang="en-US" sz="850" b="1" i="0" dirty="0">
+          <a:ln>
+            <a:noFill/>
+          </a:ln>
+        </p:spPr>
+        <p:txBody>
+          <a:bodyPr wrap="square" anchor="ctr" lIns="0" rIns="0" tIns="0" bIns="0">
+            <a:spAutoFit/>
+          </a:bodyPr>
+          <a:lstStyle/>
+          <a:p>
+            <a:pPr algn="ctr"/>
+            <a:r>
+              <a:rPr sz="850" b="1">
                 <a:solidFill>
                   <a:srgbClr val="5B6584"/>
                 </a:solidFill>
-                <a:latin typeface="Calibri" pitchFamily="34" charset="0"/>
+                <a:latin typeface="Calibri"/>
               </a:rPr>
-              <a:t>CONNECT</a:t>
-            </a:r>
-          </a:p>
-        </p:txBody>
-      </p:sp>
-      <p:sp>
-        <p:nvSpPr>
-          <p:cNvPr id="66" name="TB">
-            <a:extLst>
-              <a:ext uri="{FF2B5EF4-FFF2-40B4-BE49-F238E27FC236}">
-                <a16:creationId xmlns:a16="http://schemas.microsoft.com/office/drawing/2014/main" id="{ACE59751-CA74-B642-FB2F-8537BB94C63E}"/>
-              </a:ext>
-            </a:extLst>
-          </p:cNvPr>
-          <p:cNvSpPr>
-            <a:spLocks noGrp="1"/>
-          </p:cNvSpPr>
-          <p:nvPr/>
-        </p:nvSpPr>
-        <p:spPr>
-          <a:xfrm>
-            <a:off x="5068016" y="1403200"/>
-            <a:ext cx="182880" cy="329184"/>
+              <a:t>RUN</a:t>
+            </a:r>
+          </a:p>
+        </p:txBody>
+      </p:sp>
+      <p:sp>
+        <p:nvSpPr>
+          <p:cNvPr id="91" name="TextBox 90"/>
+          <p:cNvSpPr txBox="1"/>
+          <p:nvPr/>
+        </p:nvSpPr>
+        <p:spPr>
+          <a:xfrm>
+            <a:off x="548640" y="6519672"/>
+            <a:ext cx="8229600" cy="274320"/>
           </a:xfrm>
           <a:prstGeom prst="rect">
             <a:avLst/>
           </a:prstGeom>
           <a:noFill/>
-          <a:ln/>
-        </p:spPr>
-        <p:txBody>
-          <a:bodyPr wrap="square" lIns="0" tIns="0" rIns="0" bIns="0" rtlCol="0" anchor="ctr"/>
-          <a:lstStyle/>
-          <a:p>
-            <a:pPr marL="0" indent="0" algn="ctr">
-              <a:buNone/>
-            </a:pPr>
-            <a:r>
-              <a:rPr lang="en-US" sz="1000" b="0" i="0" dirty="0">
-                <a:solidFill>
-                  <a:srgbClr val="CADCFC"/>
-                </a:solidFill>
-                <a:latin typeface="Calibri" pitchFamily="34" charset="0"/>
+          <a:ln>
+            <a:noFill/>
+          </a:ln>
+        </p:spPr>
+        <p:txBody>
+          <a:bodyPr wrap="none" lIns="0" rIns="0" tIns="0" bIns="0">
+            <a:spAutoFit/>
+          </a:bodyPr>
+          <a:lstStyle/>
+          <a:p>
+            <a:pPr algn="l"/>
+            <a:r>
+              <a:rPr sz="800">
+                <a:solidFill>
+                  <a:srgbClr val="5B6584"/>
+                </a:solidFill>
+                <a:latin typeface="Calibri"/>
               </a:rPr>
-              <a:t>→</a:t>
-            </a:r>
-          </a:p>
-        </p:txBody>
-      </p:sp>
-      <p:sp>
-        <p:nvSpPr>
-          <p:cNvPr id="68" name="Shape">
-            <a:extLst>
-              <a:ext uri="{FF2B5EF4-FFF2-40B4-BE49-F238E27FC236}">
-                <a16:creationId xmlns:a16="http://schemas.microsoft.com/office/drawing/2014/main" id="{54D117F3-4D76-0C8A-BBEE-3EBCFF92FDEE}"/>
-              </a:ext>
-            </a:extLst>
-          </p:cNvPr>
-          <p:cNvSpPr/>
-          <p:nvPr/>
-        </p:nvSpPr>
-        <p:spPr>
-          <a:xfrm>
-            <a:off x="5214320" y="1403200"/>
-            <a:ext cx="1700000" cy="329184"/>
-          </a:xfrm>
-          <a:prstGeom prst="roundRect">
-            <a:avLst>
-              <a:gd name="adj" fmla="val 16667"/>
-            </a:avLst>
+              <a:t>Deployment as a Service</a:t>
+            </a:r>
+          </a:p>
+        </p:txBody>
+      </p:sp>
+      <p:sp>
+        <p:nvSpPr>
+          <p:cNvPr id="92" name="TextBox 91"/>
+          <p:cNvSpPr txBox="1"/>
+          <p:nvPr/>
+        </p:nvSpPr>
+        <p:spPr>
+          <a:xfrm>
+            <a:off x="11274552" y="6519672"/>
+            <a:ext cx="457200" cy="274320"/>
+          </a:xfrm>
+          <a:prstGeom prst="rect">
+            <a:avLst/>
+          </a:prstGeom>
+          <a:noFill/>
+          <a:ln>
+            <a:noFill/>
+          </a:ln>
+        </p:spPr>
+        <p:txBody>
+          <a:bodyPr wrap="none" lIns="0" rIns="0" tIns="0" bIns="0">
+            <a:spAutoFit/>
+          </a:bodyPr>
+          <a:lstStyle/>
+          <a:p>
+            <a:pPr algn="r"/>
+            <a:r>
+              <a:rPr sz="800">
+                <a:solidFill>
+                  <a:srgbClr val="5B6584"/>
+                </a:solidFill>
+                <a:latin typeface="Calibri"/>
+              </a:rPr>
+              <a:t>5</a:t>
+            </a:r>
+          </a:p>
+        </p:txBody>
+      </p:sp>
+      <p:sp>
+        <p:nvSpPr>
+          <p:cNvPr id="93" name="Rectangle 92"/>
+          <p:cNvSpPr/>
+          <p:nvPr/>
+        </p:nvSpPr>
+        <p:spPr>
+          <a:xfrm>
+            <a:off x="548640" y="1417320"/>
+            <a:ext cx="3246120" cy="3429000"/>
+          </a:xfrm>
+          <a:prstGeom prst="rect">
+            <a:avLst/>
           </a:prstGeom>
           <a:solidFill>
-            <a:srgbClr val="0F1B35"/>
+            <a:srgbClr val="002060"/>
           </a:solidFill>
-          <a:ln w="15875">
-            <a:solidFill>
-              <a:srgbClr val="0F1B35"/>
-            </a:solidFill>
-            <a:prstDash val="solid"/>
+          <a:ln>
+            <a:noFill/>
           </a:ln>
         </p:spPr>
-        <p:txBody>
-          <a:bodyPr/>
-          <a:lstStyle/>
-          <a:p>
-            <a:endParaRPr/>
-          </a:p>
-        </p:txBody>
-      </p:sp>
-      <p:sp>
-        <p:nvSpPr>
-          <p:cNvPr id="70" name="TB">
-            <a:extLst>
-              <a:ext uri="{FF2B5EF4-FFF2-40B4-BE49-F238E27FC236}">
-                <a16:creationId xmlns:a16="http://schemas.microsoft.com/office/drawing/2014/main" id="{5D5A73E1-B106-3625-E62A-76FAF371B14A}"/>
-              </a:ext>
-            </a:extLst>
-          </p:cNvPr>
-          <p:cNvSpPr>
-            <a:spLocks noGrp="1"/>
-          </p:cNvSpPr>
-          <p:nvPr/>
-        </p:nvSpPr>
-        <p:spPr>
-          <a:xfrm>
-            <a:off x="5204160" y="1403200"/>
-            <a:ext cx="1700000" cy="329184"/>
+        <p:style>
+          <a:lnRef idx="1">
+            <a:schemeClr val="accent1"/>
+          </a:lnRef>
+          <a:fillRef idx="3">
+            <a:schemeClr val="accent1"/>
+          </a:fillRef>
+          <a:effectRef idx="2">
+            <a:schemeClr val="accent1"/>
+          </a:effectRef>
+          <a:fontRef idx="minor">
+            <a:schemeClr val="lt1"/>
+          </a:fontRef>
+        </p:style>
+        <p:txBody>
+          <a:bodyPr rtlCol="0" anchor="ctr"/>
+          <a:lstStyle/>
+          <a:p>
+            <a:pPr algn="ctr"/>
+          </a:p>
+        </p:txBody>
+      </p:sp>
+      <p:sp>
+        <p:nvSpPr>
+          <p:cNvPr id="94" name="Oval 93"/>
+          <p:cNvSpPr/>
+          <p:nvPr/>
+        </p:nvSpPr>
+        <p:spPr>
+          <a:xfrm>
+            <a:off x="777240" y="2926080"/>
+            <a:ext cx="420624" cy="420624"/>
+          </a:xfrm>
+          <a:prstGeom prst="ellipse">
+            <a:avLst/>
+          </a:prstGeom>
+          <a:solidFill>
+            <a:srgbClr val="FFFFFF"/>
+          </a:solidFill>
+          <a:ln>
+            <a:noFill/>
+          </a:ln>
+        </p:spPr>
+        <p:style>
+          <a:lnRef idx="1">
+            <a:schemeClr val="accent1"/>
+          </a:lnRef>
+          <a:fillRef idx="3">
+            <a:schemeClr val="accent1"/>
+          </a:fillRef>
+          <a:effectRef idx="2">
+            <a:schemeClr val="accent1"/>
+          </a:effectRef>
+          <a:fontRef idx="minor">
+            <a:schemeClr val="lt1"/>
+          </a:fontRef>
+        </p:style>
+        <p:txBody>
+          <a:bodyPr rtlCol="0" anchor="ctr" lIns="0" rIns="0" tIns="0" bIns="0"/>
+          <a:lstStyle/>
+          <a:p>
+            <a:pPr algn="ctr"/>
+            <a:r>
+              <a:rPr sz="1600" b="1">
+                <a:solidFill>
+                  <a:srgbClr val="002060"/>
+                </a:solidFill>
+                <a:latin typeface="Arial"/>
+              </a:rPr>
+              <a:t>2</a:t>
+            </a:r>
+          </a:p>
+        </p:txBody>
+      </p:sp>
+      <p:sp>
+        <p:nvSpPr>
+          <p:cNvPr id="95" name="TextBox 94"/>
+          <p:cNvSpPr txBox="1"/>
+          <p:nvPr/>
+        </p:nvSpPr>
+        <p:spPr>
+          <a:xfrm>
+            <a:off x="1298448" y="2816352"/>
+            <a:ext cx="2286000" cy="640080"/>
           </a:xfrm>
           <a:prstGeom prst="rect">
             <a:avLst/>
           </a:prstGeom>
           <a:noFill/>
-          <a:ln/>
-        </p:spPr>
-        <p:txBody>
-          <a:bodyPr wrap="square" lIns="0" tIns="0" rIns="0" bIns="0" rtlCol="0" anchor="ctr"/>
-          <a:lstStyle/>
-          <a:p>
-            <a:pPr marL="0" indent="0" algn="ctr">
-              <a:buNone/>
-            </a:pPr>
-            <a:r>
-              <a:rPr lang="en-US" sz="850" b="1" i="0" dirty="0">
-                <a:solidFill>
-                  <a:schemeClr val="bg1"/>
+          <a:ln>
+            <a:noFill/>
+          </a:ln>
+        </p:spPr>
+        <p:txBody>
+          <a:bodyPr wrap="square" anchor="ctr" lIns="0" rIns="0" tIns="0" bIns="0">
+            <a:spAutoFit/>
+          </a:bodyPr>
+          <a:lstStyle/>
+          <a:p>
+            <a:pPr algn="l"/>
+            <a:r>
+              <a:rPr sz="1300" b="1">
+                <a:solidFill>
+                  <a:srgbClr val="FFFFFF"/>
                 </a:solidFill>
                 <a:latin typeface="Calibri"/>
-                <a:ea typeface="Calibri"/>
-                <a:cs typeface="Calibri"/>
               </a:rPr>
-              <a:t>CONFIGURE</a:t>
-            </a:r>
-          </a:p>
-        </p:txBody>
-      </p:sp>
-      <p:sp>
-        <p:nvSpPr>
-          <p:cNvPr id="72" name="TB">
-            <a:extLst>
-              <a:ext uri="{FF2B5EF4-FFF2-40B4-BE49-F238E27FC236}">
-                <a16:creationId xmlns:a16="http://schemas.microsoft.com/office/drawing/2014/main" id="{5C837C18-547B-3A70-FB81-F1F247139BC2}"/>
-              </a:ext>
-            </a:extLst>
-          </p:cNvPr>
-          <p:cNvSpPr>
-            <a:spLocks noGrp="1"/>
-          </p:cNvSpPr>
-          <p:nvPr/>
-        </p:nvSpPr>
-        <p:spPr>
-          <a:xfrm>
-            <a:off x="6914320" y="1403200"/>
-            <a:ext cx="182880" cy="329184"/>
+              <a:t>CLIENT</a:t>
+            </a:r>
+          </a:p>
+          <a:p>
+            <a:pPr algn="l"/>
+            <a:r>
+              <a:rPr sz="1300" b="1">
+                <a:solidFill>
+                  <a:srgbClr val="FFFFFF"/>
+                </a:solidFill>
+                <a:latin typeface="Calibri"/>
+              </a:rPr>
+              <a:t>CONFIGURATION</a:t>
+            </a:r>
+          </a:p>
+        </p:txBody>
+      </p:sp>
+      <p:sp>
+        <p:nvSpPr>
+          <p:cNvPr id="96" name="Rectangle 95"/>
+          <p:cNvSpPr/>
+          <p:nvPr/>
+        </p:nvSpPr>
+        <p:spPr>
+          <a:xfrm>
+            <a:off x="3822191" y="3127248"/>
+            <a:ext cx="256032" cy="18288"/>
           </a:xfrm>
           <a:prstGeom prst="rect">
             <a:avLst/>
           </a:prstGeom>
-          <a:noFill/>
-          <a:ln/>
-        </p:spPr>
-        <p:txBody>
-          <a:bodyPr wrap="square" lIns="0" tIns="0" rIns="0" bIns="0" rtlCol="0" anchor="ctr"/>
-          <a:lstStyle/>
-          <a:p>
-            <a:pPr marL="0" indent="0" algn="ctr">
-              <a:buNone/>
-            </a:pPr>
-            <a:r>
-              <a:rPr lang="en-US" sz="1000" b="0" i="0" dirty="0">
-                <a:solidFill>
-                  <a:srgbClr val="CADCFC"/>
-                </a:solidFill>
-                <a:latin typeface="Calibri" pitchFamily="34" charset="0"/>
-              </a:rPr>
-              <a:t>→</a:t>
-            </a:r>
-          </a:p>
-        </p:txBody>
-      </p:sp>
-      <p:sp>
-        <p:nvSpPr>
-          <p:cNvPr id="74" name="Shape">
-            <a:extLst>
-              <a:ext uri="{FF2B5EF4-FFF2-40B4-BE49-F238E27FC236}">
-                <a16:creationId xmlns:a16="http://schemas.microsoft.com/office/drawing/2014/main" id="{057C3A79-BB90-7F33-EEDA-EF6BF54802F6}"/>
-              </a:ext>
-            </a:extLst>
-          </p:cNvPr>
-          <p:cNvSpPr/>
-          <p:nvPr/>
-        </p:nvSpPr>
-        <p:spPr>
-          <a:xfrm>
-            <a:off x="7060624" y="1403200"/>
-            <a:ext cx="1700000" cy="329184"/>
-          </a:xfrm>
-          <a:prstGeom prst="roundRect">
-            <a:avLst>
-              <a:gd name="adj" fmla="val 16667"/>
-            </a:avLst>
+          <a:solidFill>
+            <a:srgbClr val="5B6584"/>
+          </a:solidFill>
+          <a:ln>
+            <a:noFill/>
+          </a:ln>
+        </p:spPr>
+        <p:style>
+          <a:lnRef idx="1">
+            <a:schemeClr val="accent1"/>
+          </a:lnRef>
+          <a:fillRef idx="3">
+            <a:schemeClr val="accent1"/>
+          </a:fillRef>
+          <a:effectRef idx="2">
+            <a:schemeClr val="accent1"/>
+          </a:effectRef>
+          <a:fontRef idx="minor">
+            <a:schemeClr val="lt1"/>
+          </a:fontRef>
+        </p:style>
+        <p:txBody>
+          <a:bodyPr rtlCol="0" anchor="ctr"/>
+          <a:lstStyle/>
+          <a:p>
+            <a:pPr algn="ctr"/>
+          </a:p>
+        </p:txBody>
+      </p:sp>
+      <p:sp>
+        <p:nvSpPr>
+          <p:cNvPr id="97" name="Rectangle 96"/>
+          <p:cNvSpPr/>
+          <p:nvPr/>
+        </p:nvSpPr>
+        <p:spPr>
+          <a:xfrm>
+            <a:off x="4114800" y="1417320"/>
+            <a:ext cx="7528255" cy="3429000"/>
+          </a:xfrm>
+          <a:prstGeom prst="rect">
+            <a:avLst/>
           </a:prstGeom>
           <a:solidFill>
             <a:srgbClr val="FFFFFF"/>
@@ -54082,57 +53996,530 @@
             <a:solidFill>
               <a:srgbClr val="CADCFC"/>
             </a:solidFill>
-            <a:prstDash val="solid"/>
           </a:ln>
         </p:spPr>
-        <p:txBody>
-          <a:bodyPr/>
-          <a:lstStyle/>
-          <a:p>
-            <a:endParaRPr/>
-          </a:p>
-        </p:txBody>
-      </p:sp>
-      <p:sp>
-        <p:nvSpPr>
-          <p:cNvPr id="76" name="TB">
-            <a:extLst>
-              <a:ext uri="{FF2B5EF4-FFF2-40B4-BE49-F238E27FC236}">
-                <a16:creationId xmlns:a16="http://schemas.microsoft.com/office/drawing/2014/main" id="{A3F4EBE7-F58E-4B17-DF05-3923C7B279E2}"/>
-              </a:ext>
-            </a:extLst>
-          </p:cNvPr>
-          <p:cNvSpPr>
-            <a:spLocks noGrp="1"/>
-          </p:cNvSpPr>
-          <p:nvPr/>
-        </p:nvSpPr>
-        <p:spPr>
-          <a:xfrm>
-            <a:off x="7009824" y="1382880"/>
-            <a:ext cx="1700000" cy="329184"/>
+        <p:style>
+          <a:lnRef idx="1">
+            <a:schemeClr val="accent1"/>
+          </a:lnRef>
+          <a:fillRef idx="3">
+            <a:schemeClr val="accent1"/>
+          </a:fillRef>
+          <a:effectRef idx="2">
+            <a:schemeClr val="accent1"/>
+          </a:effectRef>
+          <a:fontRef idx="minor">
+            <a:schemeClr val="lt1"/>
+          </a:fontRef>
+        </p:style>
+        <p:txBody>
+          <a:bodyPr rtlCol="0" anchor="ctr"/>
+          <a:lstStyle/>
+          <a:p>
+            <a:pPr algn="ctr"/>
+          </a:p>
+        </p:txBody>
+      </p:sp>
+      <p:sp>
+        <p:nvSpPr>
+          <p:cNvPr id="98" name="TextBox 97"/>
+          <p:cNvSpPr txBox="1"/>
+          <p:nvPr/>
+        </p:nvSpPr>
+        <p:spPr>
+          <a:xfrm>
+            <a:off x="4343400" y="1536192"/>
+            <a:ext cx="7071055" cy="685800"/>
           </a:xfrm>
           <a:prstGeom prst="rect">
             <a:avLst/>
           </a:prstGeom>
           <a:noFill/>
-          <a:ln/>
-        </p:spPr>
-        <p:txBody>
-          <a:bodyPr wrap="square" lIns="0" tIns="0" rIns="0" bIns="0" rtlCol="0" anchor="ctr"/>
-          <a:lstStyle/>
-          <a:p>
-            <a:pPr marL="0" indent="0" algn="ctr">
-              <a:buNone/>
+          <a:ln>
+            <a:noFill/>
+          </a:ln>
+        </p:spPr>
+        <p:txBody>
+          <a:bodyPr wrap="square" lIns="0" rIns="0" tIns="0" bIns="0">
+            <a:spAutoFit/>
+          </a:bodyPr>
+          <a:lstStyle/>
+          <a:p>
+            <a:pPr>
+              <a:spcBef>
+                <a:spcPts val="0"/>
+              </a:spcBef>
+              <a:spcAft>
+                <a:spcPts val="200"/>
+              </a:spcAft>
             </a:pPr>
             <a:r>
-              <a:rPr lang="en-US" sz="850" b="1" i="0" dirty="0">
+              <a:rPr sz="1050" b="1">
+                <a:solidFill>
+                  <a:srgbClr val="1B1F3B"/>
+                </a:solidFill>
+                <a:latin typeface="Calibri"/>
+              </a:rPr>
+              <a:t>Applications, Environments &amp; Release Definitions</a:t>
+            </a:r>
+          </a:p>
+          <a:p>
+            <a:pPr>
+              <a:spcBef>
+                <a:spcPts val="0"/>
+              </a:spcBef>
+              <a:spcAft>
+                <a:spcPts val="0"/>
+              </a:spcAft>
+            </a:pPr>
+            <a:r>
+              <a:rPr sz="900" b="0">
                 <a:solidFill>
                   <a:srgbClr val="5B6584"/>
                 </a:solidFill>
-                <a:latin typeface="Calibri" pitchFamily="34" charset="0"/>
+                <a:latin typeface="Calibri"/>
               </a:rPr>
-              <a:t>RUN</a:t>
+              <a:t>Registered once per account with associated source repositories, branching strategies, and artefact feeds.</a:t>
+            </a:r>
+          </a:p>
+        </p:txBody>
+      </p:sp>
+      <p:sp>
+        <p:nvSpPr>
+          <p:cNvPr id="99" name="Rectangle 98"/>
+          <p:cNvSpPr/>
+          <p:nvPr/>
+        </p:nvSpPr>
+        <p:spPr>
+          <a:xfrm>
+            <a:off x="4343400" y="2267712"/>
+            <a:ext cx="7071055" cy="9144"/>
+          </a:xfrm>
+          <a:prstGeom prst="rect">
+            <a:avLst/>
+          </a:prstGeom>
+          <a:solidFill>
+            <a:srgbClr val="CADCFC"/>
+          </a:solidFill>
+          <a:ln>
+            <a:noFill/>
+          </a:ln>
+        </p:spPr>
+        <p:style>
+          <a:lnRef idx="1">
+            <a:schemeClr val="accent1"/>
+          </a:lnRef>
+          <a:fillRef idx="3">
+            <a:schemeClr val="accent1"/>
+          </a:fillRef>
+          <a:effectRef idx="2">
+            <a:schemeClr val="accent1"/>
+          </a:effectRef>
+          <a:fontRef idx="minor">
+            <a:schemeClr val="lt1"/>
+          </a:fontRef>
+        </p:style>
+        <p:txBody>
+          <a:bodyPr rtlCol="0" anchor="ctr"/>
+          <a:lstStyle/>
+          <a:p>
+            <a:pPr algn="ctr"/>
+          </a:p>
+        </p:txBody>
+      </p:sp>
+      <p:sp>
+        <p:nvSpPr>
+          <p:cNvPr id="100" name="TextBox 99"/>
+          <p:cNvSpPr txBox="1"/>
+          <p:nvPr/>
+        </p:nvSpPr>
+        <p:spPr>
+          <a:xfrm>
+            <a:off x="4343400" y="2322576"/>
+            <a:ext cx="7071055" cy="685800"/>
+          </a:xfrm>
+          <a:prstGeom prst="rect">
+            <a:avLst/>
+          </a:prstGeom>
+          <a:noFill/>
+          <a:ln>
+            <a:noFill/>
+          </a:ln>
+        </p:spPr>
+        <p:txBody>
+          <a:bodyPr wrap="square" lIns="0" rIns="0" tIns="0" bIns="0">
+            <a:spAutoFit/>
+          </a:bodyPr>
+          <a:lstStyle/>
+          <a:p>
+            <a:pPr>
+              <a:spcBef>
+                <a:spcPts val="0"/>
+              </a:spcBef>
+              <a:spcAft>
+                <a:spcPts val="200"/>
+              </a:spcAft>
+            </a:pPr>
+            <a:r>
+              <a:rPr sz="1050" b="1">
+                <a:solidFill>
+                  <a:srgbClr val="1B1F3B"/>
+                </a:solidFill>
+                <a:latin typeface="Calibri"/>
+              </a:rPr>
+              <a:t>Approval Workflows</a:t>
+            </a:r>
+          </a:p>
+          <a:p>
+            <a:pPr>
+              <a:spcBef>
+                <a:spcPts val="0"/>
+              </a:spcBef>
+              <a:spcAft>
+                <a:spcPts val="0"/>
+              </a:spcAft>
+            </a:pPr>
+            <a:r>
+              <a:rPr sz="900" b="0">
+                <a:solidFill>
+                  <a:srgbClr val="5B6584"/>
+                </a:solidFill>
+                <a:latin typeface="Calibri"/>
+              </a:rPr>
+              <a:t>Sequential, parallel, or conditional per stage, defined as declarative configuration rather than custom code.</a:t>
+            </a:r>
+          </a:p>
+        </p:txBody>
+      </p:sp>
+      <p:sp>
+        <p:nvSpPr>
+          <p:cNvPr id="101" name="Rectangle 100"/>
+          <p:cNvSpPr/>
+          <p:nvPr/>
+        </p:nvSpPr>
+        <p:spPr>
+          <a:xfrm>
+            <a:off x="4343400" y="3054096"/>
+            <a:ext cx="7071055" cy="9144"/>
+          </a:xfrm>
+          <a:prstGeom prst="rect">
+            <a:avLst/>
+          </a:prstGeom>
+          <a:solidFill>
+            <a:srgbClr val="CADCFC"/>
+          </a:solidFill>
+          <a:ln>
+            <a:noFill/>
+          </a:ln>
+        </p:spPr>
+        <p:style>
+          <a:lnRef idx="1">
+            <a:schemeClr val="accent1"/>
+          </a:lnRef>
+          <a:fillRef idx="3">
+            <a:schemeClr val="accent1"/>
+          </a:fillRef>
+          <a:effectRef idx="2">
+            <a:schemeClr val="accent1"/>
+          </a:effectRef>
+          <a:fontRef idx="minor">
+            <a:schemeClr val="lt1"/>
+          </a:fontRef>
+        </p:style>
+        <p:txBody>
+          <a:bodyPr rtlCol="0" anchor="ctr"/>
+          <a:lstStyle/>
+          <a:p>
+            <a:pPr algn="ctr"/>
+          </a:p>
+        </p:txBody>
+      </p:sp>
+      <p:sp>
+        <p:nvSpPr>
+          <p:cNvPr id="102" name="TextBox 101"/>
+          <p:cNvSpPr txBox="1"/>
+          <p:nvPr/>
+        </p:nvSpPr>
+        <p:spPr>
+          <a:xfrm>
+            <a:off x="4343400" y="3108960"/>
+            <a:ext cx="7071055" cy="685800"/>
+          </a:xfrm>
+          <a:prstGeom prst="rect">
+            <a:avLst/>
+          </a:prstGeom>
+          <a:noFill/>
+          <a:ln>
+            <a:noFill/>
+          </a:ln>
+        </p:spPr>
+        <p:txBody>
+          <a:bodyPr wrap="square" lIns="0" rIns="0" tIns="0" bIns="0">
+            <a:spAutoFit/>
+          </a:bodyPr>
+          <a:lstStyle/>
+          <a:p>
+            <a:pPr>
+              <a:spcBef>
+                <a:spcPts val="0"/>
+              </a:spcBef>
+              <a:spcAft>
+                <a:spcPts val="200"/>
+              </a:spcAft>
+            </a:pPr>
+            <a:r>
+              <a:rPr sz="1050" b="1">
+                <a:solidFill>
+                  <a:srgbClr val="1B1F3B"/>
+                </a:solidFill>
+                <a:latin typeface="Calibri"/>
+              </a:rPr>
+              <a:t>Deployment Templates</a:t>
+            </a:r>
+          </a:p>
+          <a:p>
+            <a:pPr>
+              <a:spcBef>
+                <a:spcPts val="0"/>
+              </a:spcBef>
+              <a:spcAft>
+                <a:spcPts val="0"/>
+              </a:spcAft>
+            </a:pPr>
+            <a:r>
+              <a:rPr sz="900" b="0">
+                <a:solidFill>
+                  <a:srgbClr val="5B6584"/>
+                </a:solidFill>
+                <a:latin typeface="Calibri"/>
+              </a:rPr>
+              <a:t>Standard Release, Config-Only, Hotfix, Infra-Only — each mapped to its own phases, APIs, and verification steps.</a:t>
+            </a:r>
+          </a:p>
+        </p:txBody>
+      </p:sp>
+      <p:sp>
+        <p:nvSpPr>
+          <p:cNvPr id="103" name="Rectangle 102"/>
+          <p:cNvSpPr/>
+          <p:nvPr/>
+        </p:nvSpPr>
+        <p:spPr>
+          <a:xfrm>
+            <a:off x="4343400" y="3840480"/>
+            <a:ext cx="7071055" cy="9144"/>
+          </a:xfrm>
+          <a:prstGeom prst="rect">
+            <a:avLst/>
+          </a:prstGeom>
+          <a:solidFill>
+            <a:srgbClr val="CADCFC"/>
+          </a:solidFill>
+          <a:ln>
+            <a:noFill/>
+          </a:ln>
+        </p:spPr>
+        <p:style>
+          <a:lnRef idx="1">
+            <a:schemeClr val="accent1"/>
+          </a:lnRef>
+          <a:fillRef idx="3">
+            <a:schemeClr val="accent1"/>
+          </a:fillRef>
+          <a:effectRef idx="2">
+            <a:schemeClr val="accent1"/>
+          </a:effectRef>
+          <a:fontRef idx="minor">
+            <a:schemeClr val="lt1"/>
+          </a:fontRef>
+        </p:style>
+        <p:txBody>
+          <a:bodyPr rtlCol="0" anchor="ctr"/>
+          <a:lstStyle/>
+          <a:p>
+            <a:pPr algn="ctr"/>
+          </a:p>
+        </p:txBody>
+      </p:sp>
+      <p:sp>
+        <p:nvSpPr>
+          <p:cNvPr id="104" name="TextBox 103"/>
+          <p:cNvSpPr txBox="1"/>
+          <p:nvPr/>
+        </p:nvSpPr>
+        <p:spPr>
+          <a:xfrm>
+            <a:off x="4343400" y="3895344"/>
+            <a:ext cx="7071055" cy="685800"/>
+          </a:xfrm>
+          <a:prstGeom prst="rect">
+            <a:avLst/>
+          </a:prstGeom>
+          <a:noFill/>
+          <a:ln>
+            <a:noFill/>
+          </a:ln>
+        </p:spPr>
+        <p:txBody>
+          <a:bodyPr wrap="square" lIns="0" rIns="0" tIns="0" bIns="0">
+            <a:spAutoFit/>
+          </a:bodyPr>
+          <a:lstStyle/>
+          <a:p>
+            <a:pPr>
+              <a:spcBef>
+                <a:spcPts val="0"/>
+              </a:spcBef>
+              <a:spcAft>
+                <a:spcPts val="200"/>
+              </a:spcAft>
+            </a:pPr>
+            <a:r>
+              <a:rPr sz="1050" b="1">
+                <a:solidFill>
+                  <a:srgbClr val="1B1F3B"/>
+                </a:solidFill>
+                <a:latin typeface="Calibri"/>
+              </a:rPr>
+              <a:t>Promotion, Notification &amp; Validation Rules</a:t>
+            </a:r>
+          </a:p>
+          <a:p>
+            <a:pPr>
+              <a:spcBef>
+                <a:spcPts val="0"/>
+              </a:spcBef>
+              <a:spcAft>
+                <a:spcPts val="0"/>
+              </a:spcAft>
+            </a:pPr>
+            <a:r>
+              <a:rPr sz="900" b="0">
+                <a:solidFill>
+                  <a:srgbClr val="5B6584"/>
+                </a:solidFill>
+                <a:latin typeface="Calibri"/>
+              </a:rPr>
+              <a:t>The automated gates, alerts, and post-deploy health checks that govern every release cycle.</a:t>
+            </a:r>
+          </a:p>
+        </p:txBody>
+      </p:sp>
+      <p:sp>
+        <p:nvSpPr>
+          <p:cNvPr id="105" name="TextBox 104"/>
+          <p:cNvSpPr txBox="1"/>
+          <p:nvPr/>
+        </p:nvSpPr>
+        <p:spPr>
+          <a:xfrm>
+            <a:off x="548640" y="4956048"/>
+            <a:ext cx="11094415" cy="365760"/>
+          </a:xfrm>
+          <a:prstGeom prst="rect">
+            <a:avLst/>
+          </a:prstGeom>
+          <a:noFill/>
+          <a:ln>
+            <a:noFill/>
+          </a:ln>
+        </p:spPr>
+        <p:txBody>
+          <a:bodyPr wrap="square" lIns="0" rIns="0" tIns="0" bIns="0">
+            <a:spAutoFit/>
+          </a:bodyPr>
+          <a:lstStyle/>
+          <a:p>
+            <a:pPr algn="l"/>
+            <a:r>
+              <a:rPr sz="950" b="0">
+                <a:solidFill>
+                  <a:srgbClr val="5B6584"/>
+                </a:solidFill>
+                <a:latin typeface="Calibri"/>
+              </a:rPr>
+              <a:t>Configuration models are modular and reusable — creating a new delivery pipeline takes minutes rather than weeks.</a:t>
+            </a:r>
+          </a:p>
+        </p:txBody>
+      </p:sp>
+      <p:sp>
+        <p:nvSpPr>
+          <p:cNvPr id="106" name="Rectangle 105"/>
+          <p:cNvSpPr/>
+          <p:nvPr/>
+        </p:nvSpPr>
+        <p:spPr>
+          <a:xfrm>
+            <a:off x="442569" y="5394960"/>
+            <a:ext cx="11007547" cy="480060"/>
+          </a:xfrm>
+          <a:prstGeom prst="rect">
+            <a:avLst/>
+          </a:prstGeom>
+          <a:solidFill>
+            <a:srgbClr val="0F1B35"/>
+          </a:solidFill>
+          <a:ln>
+            <a:noFill/>
+          </a:ln>
+        </p:spPr>
+        <p:style>
+          <a:lnRef idx="1">
+            <a:schemeClr val="accent1"/>
+          </a:lnRef>
+          <a:fillRef idx="3">
+            <a:schemeClr val="accent1"/>
+          </a:fillRef>
+          <a:effectRef idx="2">
+            <a:schemeClr val="accent1"/>
+          </a:effectRef>
+          <a:fontRef idx="minor">
+            <a:schemeClr val="lt1"/>
+          </a:fontRef>
+        </p:style>
+        <p:txBody>
+          <a:bodyPr rtlCol="0" anchor="ctr"/>
+          <a:lstStyle/>
+          <a:p>
+            <a:pPr algn="ctr"/>
+          </a:p>
+        </p:txBody>
+      </p:sp>
+      <p:sp>
+        <p:nvSpPr>
+          <p:cNvPr id="107" name="TextBox 106"/>
+          <p:cNvSpPr txBox="1"/>
+          <p:nvPr/>
+        </p:nvSpPr>
+        <p:spPr>
+          <a:xfrm>
+            <a:off x="572414" y="5394960"/>
+            <a:ext cx="10747857" cy="480060"/>
+          </a:xfrm>
+          <a:prstGeom prst="rect">
+            <a:avLst/>
+          </a:prstGeom>
+          <a:noFill/>
+          <a:ln>
+            <a:noFill/>
+          </a:ln>
+        </p:spPr>
+        <p:txBody>
+          <a:bodyPr wrap="square" anchor="ctr" lIns="0" rIns="0" tIns="0" bIns="0">
+            <a:spAutoFit/>
+          </a:bodyPr>
+          <a:lstStyle/>
+          <a:p>
+            <a:pPr algn="l"/>
+            <a:r>
+              <a:rPr sz="950" b="0">
+                <a:solidFill>
+                  <a:srgbClr val="CADCFC"/>
+                </a:solidFill>
+                <a:latin typeface="Calibri"/>
+              </a:rPr>
+              <a:t>All workflow rules, gates, and deployment templates are stored in declarative configuration — editable via UI or API without code changes.</a:t>
             </a:r>
           </a:p>
         </p:txBody>
@@ -54172,279 +54559,136 @@
       </p:grpSpPr>
       <p:sp>
         <p:nvSpPr>
-          <p:cNvPr id="2" name="Text 0"/>
-          <p:cNvSpPr/>
-          <p:nvPr/>
-        </p:nvSpPr>
-        <p:spPr>
-          <a:xfrm>
-            <a:off x="548640" y="365760"/>
-            <a:ext cx="10058400" cy="274320"/>
+          <p:cNvPr id="123" name="Rectangle 122"/>
+          <p:cNvSpPr/>
+          <p:nvPr/>
+        </p:nvSpPr>
+        <p:spPr>
+          <a:xfrm>
+            <a:off x="0" y="0"/>
+            <a:ext cx="12191969" cy="505023"/>
           </a:xfrm>
           <a:prstGeom prst="rect">
             <a:avLst/>
           </a:prstGeom>
+          <a:solidFill>
+            <a:srgbClr val="0F1B35"/>
+          </a:solidFill>
+          <a:ln>
+            <a:noFill/>
+          </a:ln>
+        </p:spPr>
+        <p:style>
+          <a:lnRef idx="1">
+            <a:schemeClr val="accent1"/>
+          </a:lnRef>
+          <a:fillRef idx="3">
+            <a:schemeClr val="accent1"/>
+          </a:fillRef>
+          <a:effectRef idx="2">
+            <a:schemeClr val="accent1"/>
+          </a:effectRef>
+          <a:fontRef idx="minor">
+            <a:schemeClr val="lt1"/>
+          </a:fontRef>
+        </p:style>
+        <p:txBody>
+          <a:bodyPr rtlCol="0" anchor="ctr"/>
+          <a:lstStyle/>
+          <a:p>
+            <a:pPr algn="ctr"/>
+          </a:p>
+        </p:txBody>
+      </p:sp>
+      <p:sp>
+        <p:nvSpPr>
+          <p:cNvPr id="124" name="TextBox 123"/>
+          <p:cNvSpPr txBox="1"/>
+          <p:nvPr/>
+        </p:nvSpPr>
+        <p:spPr>
+          <a:xfrm>
+            <a:off x="548640" y="0"/>
+            <a:ext cx="3000146" cy="505023"/>
+          </a:xfrm>
+          <a:prstGeom prst="rect">
+            <a:avLst/>
+          </a:prstGeom>
           <a:noFill/>
-          <a:ln/>
-        </p:spPr>
-        <p:txBody>
-          <a:bodyPr wrap="square" rtlCol="0" anchor="ctr"/>
-          <a:lstStyle/>
-          <a:p>
-            <a:pPr marL="0" indent="0">
-              <a:buNone/>
-            </a:pPr>
-            <a:r>
-              <a:rPr lang="en-US" sz="1200" b="1" kern="0" spc="200">
-                <a:solidFill>
-                  <a:srgbClr val="1F6E66"/>
-                </a:solidFill>
-                <a:latin typeface="Calibri" pitchFamily="34" charset="0"/>
-                <a:ea typeface="Calibri" pitchFamily="34" charset="-122"/>
-                <a:cs typeface="Calibri" pitchFamily="34" charset="-120"/>
+          <a:ln>
+            <a:noFill/>
+          </a:ln>
+        </p:spPr>
+        <p:txBody>
+          <a:bodyPr wrap="square" anchor="ctr" lIns="0" rIns="0" tIns="0" bIns="0">
+            <a:spAutoFit/>
+          </a:bodyPr>
+          <a:lstStyle/>
+          <a:p>
+            <a:pPr algn="l"/>
+            <a:r>
+              <a:rPr sz="800" b="1">
+                <a:solidFill>
+                  <a:srgbClr val="CADCFC"/>
+                </a:solidFill>
+                <a:latin typeface="Calibri"/>
               </a:rPr>
               <a:t>TARGET ARCHITECTURE</a:t>
             </a:r>
-            <a:endParaRPr lang="en-US" sz="1200"/>
-          </a:p>
-        </p:txBody>
-      </p:sp>
-      <p:sp>
-        <p:nvSpPr>
-          <p:cNvPr id="3" name="Text 1"/>
-          <p:cNvSpPr/>
-          <p:nvPr/>
-        </p:nvSpPr>
-        <p:spPr>
-          <a:xfrm>
-            <a:off x="-317269" y="6133777"/>
-            <a:ext cx="10881360" cy="640080"/>
+          </a:p>
+        </p:txBody>
+      </p:sp>
+      <p:sp>
+        <p:nvSpPr>
+          <p:cNvPr id="125" name="TextBox 124"/>
+          <p:cNvSpPr txBox="1"/>
+          <p:nvPr/>
+        </p:nvSpPr>
+        <p:spPr>
+          <a:xfrm>
+            <a:off x="0" y="0"/>
+            <a:ext cx="12191969" cy="505023"/>
           </a:xfrm>
           <a:prstGeom prst="rect">
             <a:avLst/>
           </a:prstGeom>
           <a:noFill/>
-          <a:ln/>
-        </p:spPr>
-        <p:txBody>
-          <a:bodyPr wrap="square" lIns="91440" tIns="45720" rIns="91440" bIns="45720" rtlCol="0" anchor="ctr"/>
-          <a:lstStyle/>
-          <a:p>
-            <a:pPr marL="0" indent="0">
-              <a:buNone/>
-            </a:pPr>
-            <a:endParaRPr lang="en-US" sz="2600" b="1" dirty="0">
-              <a:solidFill>
-                <a:srgbClr val="1E2761"/>
-              </a:solidFill>
-              <a:latin typeface="Cambria"/>
-              <a:ea typeface="Cambria"/>
-            </a:endParaRPr>
-          </a:p>
-        </p:txBody>
-      </p:sp>
-      <p:sp>
-        <p:nvSpPr>
-          <p:cNvPr id="4" name="Shape 2"/>
-          <p:cNvSpPr/>
-          <p:nvPr/>
-        </p:nvSpPr>
-        <p:spPr>
-          <a:xfrm>
-            <a:off x="548640" y="1417320"/>
-            <a:ext cx="3246120" cy="1965960"/>
-          </a:xfrm>
-          <a:prstGeom prst="roundRect">
-            <a:avLst>
-              <a:gd name="adj" fmla="val 4651"/>
-            </a:avLst>
-          </a:prstGeom>
-          <a:solidFill>
-            <a:srgbClr val="002060"/>
-          </a:solidFill>
-          <a:ln/>
-        </p:spPr>
-        <p:txBody>
-          <a:bodyPr/>
-          <a:lstStyle/>
-          <a:p>
-            <a:endParaRPr/>
-          </a:p>
-        </p:txBody>
-      </p:sp>
-      <p:sp>
-        <p:nvSpPr>
-          <p:cNvPr id="5" name="Shape 3"/>
-          <p:cNvSpPr/>
-          <p:nvPr/>
-        </p:nvSpPr>
-        <p:spPr>
-          <a:xfrm>
-            <a:off x="777240" y="2189988"/>
-            <a:ext cx="420624" cy="420624"/>
-          </a:xfrm>
-          <a:prstGeom prst="ellipse">
-            <a:avLst/>
-          </a:prstGeom>
-          <a:solidFill>
-            <a:srgbClr val="FFFFFF"/>
-          </a:solidFill>
-          <a:ln/>
-        </p:spPr>
-        <p:txBody>
-          <a:bodyPr/>
-          <a:lstStyle/>
-          <a:p>
-            <a:endParaRPr/>
-          </a:p>
-        </p:txBody>
-      </p:sp>
-      <p:sp>
-        <p:nvSpPr>
-          <p:cNvPr id="6" name="Text 4"/>
-          <p:cNvSpPr/>
-          <p:nvPr/>
-        </p:nvSpPr>
-        <p:spPr>
-          <a:xfrm>
-            <a:off x="777240" y="2189988"/>
-            <a:ext cx="420624" cy="420624"/>
+          <a:ln>
+            <a:noFill/>
+          </a:ln>
+        </p:spPr>
+        <p:txBody>
+          <a:bodyPr wrap="square" anchor="ctr" lIns="0" rIns="0" tIns="0" bIns="0">
+            <a:spAutoFit/>
+          </a:bodyPr>
+          <a:lstStyle/>
+          <a:p>
+            <a:pPr algn="ctr"/>
+            <a:r>
+              <a:rPr sz="1300" b="1">
+                <a:solidFill>
+                  <a:srgbClr val="FFFFFF"/>
+                </a:solidFill>
+                <a:latin typeface="Calibri"/>
+              </a:rPr>
+              <a:t>Run — Agentic Orchestration, Execution &amp; Observability</a:t>
+            </a:r>
+          </a:p>
+        </p:txBody>
+      </p:sp>
+      <p:sp>
+        <p:nvSpPr>
+          <p:cNvPr id="126" name="Rectangle 125"/>
+          <p:cNvSpPr/>
+          <p:nvPr/>
+        </p:nvSpPr>
+        <p:spPr>
+          <a:xfrm>
+            <a:off x="2354854" y="864748"/>
+            <a:ext cx="1699961" cy="329184"/>
           </a:xfrm>
           <a:prstGeom prst="rect">
             <a:avLst/>
-          </a:prstGeom>
-          <a:noFill/>
-          <a:ln/>
-        </p:spPr>
-        <p:txBody>
-          <a:bodyPr wrap="square" lIns="0" tIns="0" rIns="0" bIns="0" rtlCol="0" anchor="ctr"/>
-          <a:lstStyle/>
-          <a:p>
-            <a:pPr marL="0" indent="0" algn="ctr">
-              <a:buNone/>
-            </a:pPr>
-            <a:r>
-              <a:rPr lang="en-US" sz="1600" b="1">
-                <a:solidFill>
-                  <a:schemeClr val="tx1">
-                    <a:lumMod val="85000"/>
-                    <a:lumOff val="15000"/>
-                  </a:schemeClr>
-                </a:solidFill>
-                <a:latin typeface="Arial"/>
-                <a:ea typeface="Arial" pitchFamily="34" charset="-122"/>
-                <a:cs typeface="Arial"/>
-              </a:rPr>
-              <a:t>3</a:t>
-            </a:r>
-            <a:endParaRPr lang="en-US" sz="1600">
-              <a:solidFill>
-                <a:schemeClr val="tx1">
-                  <a:lumMod val="85000"/>
-                  <a:lumOff val="15000"/>
-                </a:schemeClr>
-              </a:solidFill>
-              <a:latin typeface="Arial"/>
-              <a:ea typeface="Calibri"/>
-              <a:cs typeface="Arial"/>
-            </a:endParaRPr>
-          </a:p>
-        </p:txBody>
-      </p:sp>
-      <p:sp>
-        <p:nvSpPr>
-          <p:cNvPr id="7" name="Text 5"/>
-          <p:cNvSpPr/>
-          <p:nvPr/>
-        </p:nvSpPr>
-        <p:spPr>
-          <a:xfrm>
-            <a:off x="1298448" y="1417320"/>
-            <a:ext cx="2423160" cy="1965960"/>
-          </a:xfrm>
-          <a:prstGeom prst="rect">
-            <a:avLst/>
-          </a:prstGeom>
-          <a:noFill/>
-          <a:ln/>
-        </p:spPr>
-        <p:txBody>
-          <a:bodyPr wrap="square" lIns="91440" tIns="45720" rIns="91440" bIns="45720" rtlCol="0" anchor="ctr"/>
-          <a:lstStyle/>
-          <a:p>
-            <a:pPr>
-              <a:lnSpc>
-                <a:spcPct val="102000"/>
-              </a:lnSpc>
-            </a:pPr>
-            <a:r>
-              <a:rPr lang="en-US" sz="1300" b="1">
-                <a:solidFill>
-                  <a:schemeClr val="bg1"/>
-                </a:solidFill>
-                <a:latin typeface="Calibri"/>
-                <a:ea typeface="Calibri"/>
-                <a:cs typeface="Calibri"/>
-              </a:rPr>
-              <a:t>AGENTIC ORCHESTRATION</a:t>
-            </a:r>
-            <a:endParaRPr lang="en-US" sz="1300">
-              <a:solidFill>
-                <a:schemeClr val="bg1"/>
-              </a:solidFill>
-              <a:latin typeface="Calibri"/>
-              <a:ea typeface="Calibri"/>
-              <a:cs typeface="Calibri"/>
-            </a:endParaRPr>
-          </a:p>
-        </p:txBody>
-      </p:sp>
-      <p:sp>
-        <p:nvSpPr>
-          <p:cNvPr id="8" name="Shape 6"/>
-          <p:cNvSpPr/>
-          <p:nvPr/>
-        </p:nvSpPr>
-        <p:spPr>
-          <a:xfrm>
-            <a:off x="3849624" y="2400300"/>
-            <a:ext cx="219456" cy="0"/>
-          </a:xfrm>
-          <a:prstGeom prst="line">
-            <a:avLst/>
-          </a:prstGeom>
-          <a:noFill/>
-          <a:ln w="31750">
-            <a:solidFill>
-              <a:srgbClr val="5B6584"/>
-            </a:solidFill>
-            <a:prstDash val="solid"/>
-            <a:tailEnd type="triangle"/>
-          </a:ln>
-        </p:spPr>
-        <p:txBody>
-          <a:bodyPr/>
-          <a:lstStyle/>
-          <a:p>
-            <a:endParaRPr/>
-          </a:p>
-        </p:txBody>
-      </p:sp>
-      <p:sp>
-        <p:nvSpPr>
-          <p:cNvPr id="9" name="Shape 7"/>
-          <p:cNvSpPr/>
-          <p:nvPr/>
-        </p:nvSpPr>
-        <p:spPr>
-          <a:xfrm>
-            <a:off x="4114800" y="1417320"/>
-            <a:ext cx="7315200" cy="1965960"/>
-          </a:xfrm>
-          <a:prstGeom prst="roundRect">
-            <a:avLst>
-              <a:gd name="adj" fmla="val 4651"/>
-            </a:avLst>
           </a:prstGeom>
           <a:solidFill>
             <a:srgbClr val="FFFFFF"/>
@@ -54453,32 +54697,741 @@
             <a:solidFill>
               <a:srgbClr val="CADCFC"/>
             </a:solidFill>
-            <a:prstDash val="solid"/>
           </a:ln>
         </p:spPr>
-        <p:txBody>
-          <a:bodyPr/>
-          <a:lstStyle/>
-          <a:p>
-            <a:endParaRPr/>
-          </a:p>
-        </p:txBody>
-      </p:sp>
-      <p:sp>
-        <p:nvSpPr>
-          <p:cNvPr id="10" name="Shape 8"/>
-          <p:cNvSpPr/>
-          <p:nvPr/>
-        </p:nvSpPr>
-        <p:spPr>
-          <a:xfrm>
-            <a:off x="4297680" y="1600200"/>
-            <a:ext cx="1655064" cy="749808"/>
-          </a:xfrm>
-          <a:prstGeom prst="roundRect">
-            <a:avLst>
-              <a:gd name="adj" fmla="val 7317"/>
-            </a:avLst>
+        <p:style>
+          <a:lnRef idx="1">
+            <a:schemeClr val="accent1"/>
+          </a:lnRef>
+          <a:fillRef idx="3">
+            <a:schemeClr val="accent1"/>
+          </a:fillRef>
+          <a:effectRef idx="2">
+            <a:schemeClr val="accent1"/>
+          </a:effectRef>
+          <a:fontRef idx="minor">
+            <a:schemeClr val="lt1"/>
+          </a:fontRef>
+        </p:style>
+        <p:txBody>
+          <a:bodyPr rtlCol="0" anchor="ctr"/>
+          <a:lstStyle/>
+          <a:p>
+            <a:pPr algn="ctr"/>
+          </a:p>
+        </p:txBody>
+      </p:sp>
+      <p:sp>
+        <p:nvSpPr>
+          <p:cNvPr id="127" name="TextBox 126"/>
+          <p:cNvSpPr txBox="1"/>
+          <p:nvPr/>
+        </p:nvSpPr>
+        <p:spPr>
+          <a:xfrm>
+            <a:off x="2354854" y="864748"/>
+            <a:ext cx="1699961" cy="329184"/>
+          </a:xfrm>
+          <a:prstGeom prst="rect">
+            <a:avLst/>
+          </a:prstGeom>
+          <a:noFill/>
+          <a:ln>
+            <a:noFill/>
+          </a:ln>
+        </p:spPr>
+        <p:txBody>
+          <a:bodyPr wrap="square" anchor="ctr" lIns="0" rIns="0" tIns="0" bIns="0">
+            <a:spAutoFit/>
+          </a:bodyPr>
+          <a:lstStyle/>
+          <a:p>
+            <a:pPr algn="ctr"/>
+            <a:r>
+              <a:rPr sz="850" b="1">
+                <a:solidFill>
+                  <a:srgbClr val="5B6584"/>
+                </a:solidFill>
+                <a:latin typeface="Calibri"/>
+              </a:rPr>
+              <a:t>ANALYSE</a:t>
+            </a:r>
+          </a:p>
+        </p:txBody>
+      </p:sp>
+      <p:sp>
+        <p:nvSpPr>
+          <p:cNvPr id="128" name="TextBox 127"/>
+          <p:cNvSpPr txBox="1"/>
+          <p:nvPr/>
+        </p:nvSpPr>
+        <p:spPr>
+          <a:xfrm>
+            <a:off x="4054815" y="864748"/>
+            <a:ext cx="182880" cy="329184"/>
+          </a:xfrm>
+          <a:prstGeom prst="rect">
+            <a:avLst/>
+          </a:prstGeom>
+          <a:noFill/>
+          <a:ln>
+            <a:noFill/>
+          </a:ln>
+        </p:spPr>
+        <p:txBody>
+          <a:bodyPr wrap="none" anchor="ctr" lIns="0" rIns="0" tIns="0" bIns="0">
+            <a:spAutoFit/>
+          </a:bodyPr>
+          <a:lstStyle/>
+          <a:p>
+            <a:pPr algn="ctr"/>
+            <a:r>
+              <a:rPr sz="1000" b="0">
+                <a:solidFill>
+                  <a:srgbClr val="CADCFC"/>
+                </a:solidFill>
+                <a:latin typeface="Calibri"/>
+              </a:rPr>
+              <a:t>→</a:t>
+            </a:r>
+          </a:p>
+        </p:txBody>
+      </p:sp>
+      <p:sp>
+        <p:nvSpPr>
+          <p:cNvPr id="129" name="Rectangle 128"/>
+          <p:cNvSpPr/>
+          <p:nvPr/>
+        </p:nvSpPr>
+        <p:spPr>
+          <a:xfrm>
+            <a:off x="4201119" y="864748"/>
+            <a:ext cx="1699961" cy="329184"/>
+          </a:xfrm>
+          <a:prstGeom prst="rect">
+            <a:avLst/>
+          </a:prstGeom>
+          <a:solidFill>
+            <a:srgbClr val="FFFFFF"/>
+          </a:solidFill>
+          <a:ln w="15875">
+            <a:solidFill>
+              <a:srgbClr val="CADCFC"/>
+            </a:solidFill>
+          </a:ln>
+        </p:spPr>
+        <p:style>
+          <a:lnRef idx="1">
+            <a:schemeClr val="accent1"/>
+          </a:lnRef>
+          <a:fillRef idx="3">
+            <a:schemeClr val="accent1"/>
+          </a:fillRef>
+          <a:effectRef idx="2">
+            <a:schemeClr val="accent1"/>
+          </a:effectRef>
+          <a:fontRef idx="minor">
+            <a:schemeClr val="lt1"/>
+          </a:fontRef>
+        </p:style>
+        <p:txBody>
+          <a:bodyPr rtlCol="0" anchor="ctr"/>
+          <a:lstStyle/>
+          <a:p>
+            <a:pPr algn="ctr"/>
+          </a:p>
+        </p:txBody>
+      </p:sp>
+      <p:sp>
+        <p:nvSpPr>
+          <p:cNvPr id="130" name="TextBox 129"/>
+          <p:cNvSpPr txBox="1"/>
+          <p:nvPr/>
+        </p:nvSpPr>
+        <p:spPr>
+          <a:xfrm>
+            <a:off x="4201119" y="864748"/>
+            <a:ext cx="1699961" cy="329184"/>
+          </a:xfrm>
+          <a:prstGeom prst="rect">
+            <a:avLst/>
+          </a:prstGeom>
+          <a:noFill/>
+          <a:ln>
+            <a:noFill/>
+          </a:ln>
+        </p:spPr>
+        <p:txBody>
+          <a:bodyPr wrap="square" anchor="ctr" lIns="0" rIns="0" tIns="0" bIns="0">
+            <a:spAutoFit/>
+          </a:bodyPr>
+          <a:lstStyle/>
+          <a:p>
+            <a:pPr algn="ctr"/>
+            <a:r>
+              <a:rPr sz="850" b="1">
+                <a:solidFill>
+                  <a:srgbClr val="5B6584"/>
+                </a:solidFill>
+                <a:latin typeface="Calibri"/>
+              </a:rPr>
+              <a:t>CONNECT</a:t>
+            </a:r>
+          </a:p>
+        </p:txBody>
+      </p:sp>
+      <p:sp>
+        <p:nvSpPr>
+          <p:cNvPr id="131" name="TextBox 130"/>
+          <p:cNvSpPr txBox="1"/>
+          <p:nvPr/>
+        </p:nvSpPr>
+        <p:spPr>
+          <a:xfrm>
+            <a:off x="5901171" y="864748"/>
+            <a:ext cx="182880" cy="329184"/>
+          </a:xfrm>
+          <a:prstGeom prst="rect">
+            <a:avLst/>
+          </a:prstGeom>
+          <a:noFill/>
+          <a:ln>
+            <a:noFill/>
+          </a:ln>
+        </p:spPr>
+        <p:txBody>
+          <a:bodyPr wrap="none" anchor="ctr" lIns="0" rIns="0" tIns="0" bIns="0">
+            <a:spAutoFit/>
+          </a:bodyPr>
+          <a:lstStyle/>
+          <a:p>
+            <a:pPr algn="ctr"/>
+            <a:r>
+              <a:rPr sz="1000" b="0">
+                <a:solidFill>
+                  <a:srgbClr val="CADCFC"/>
+                </a:solidFill>
+                <a:latin typeface="Calibri"/>
+              </a:rPr>
+              <a:t>→</a:t>
+            </a:r>
+          </a:p>
+        </p:txBody>
+      </p:sp>
+      <p:sp>
+        <p:nvSpPr>
+          <p:cNvPr id="132" name="Rectangle 131"/>
+          <p:cNvSpPr/>
+          <p:nvPr/>
+        </p:nvSpPr>
+        <p:spPr>
+          <a:xfrm>
+            <a:off x="6047475" y="864748"/>
+            <a:ext cx="1699961" cy="329184"/>
+          </a:xfrm>
+          <a:prstGeom prst="rect">
+            <a:avLst/>
+          </a:prstGeom>
+          <a:solidFill>
+            <a:srgbClr val="FFFFFF"/>
+          </a:solidFill>
+          <a:ln w="15875">
+            <a:solidFill>
+              <a:srgbClr val="CADCFC"/>
+            </a:solidFill>
+          </a:ln>
+        </p:spPr>
+        <p:style>
+          <a:lnRef idx="1">
+            <a:schemeClr val="accent1"/>
+          </a:lnRef>
+          <a:fillRef idx="3">
+            <a:schemeClr val="accent1"/>
+          </a:fillRef>
+          <a:effectRef idx="2">
+            <a:schemeClr val="accent1"/>
+          </a:effectRef>
+          <a:fontRef idx="minor">
+            <a:schemeClr val="lt1"/>
+          </a:fontRef>
+        </p:style>
+        <p:txBody>
+          <a:bodyPr rtlCol="0" anchor="ctr"/>
+          <a:lstStyle/>
+          <a:p>
+            <a:pPr algn="ctr"/>
+          </a:p>
+        </p:txBody>
+      </p:sp>
+      <p:sp>
+        <p:nvSpPr>
+          <p:cNvPr id="133" name="TextBox 132"/>
+          <p:cNvSpPr txBox="1"/>
+          <p:nvPr/>
+        </p:nvSpPr>
+        <p:spPr>
+          <a:xfrm>
+            <a:off x="6047475" y="864748"/>
+            <a:ext cx="1699961" cy="329184"/>
+          </a:xfrm>
+          <a:prstGeom prst="rect">
+            <a:avLst/>
+          </a:prstGeom>
+          <a:noFill/>
+          <a:ln>
+            <a:noFill/>
+          </a:ln>
+        </p:spPr>
+        <p:txBody>
+          <a:bodyPr wrap="square" anchor="ctr" lIns="0" rIns="0" tIns="0" bIns="0">
+            <a:spAutoFit/>
+          </a:bodyPr>
+          <a:lstStyle/>
+          <a:p>
+            <a:pPr algn="ctr"/>
+            <a:r>
+              <a:rPr sz="850" b="1">
+                <a:solidFill>
+                  <a:srgbClr val="5B6584"/>
+                </a:solidFill>
+                <a:latin typeface="Calibri"/>
+              </a:rPr>
+              <a:t>CONFIGURE</a:t>
+            </a:r>
+          </a:p>
+        </p:txBody>
+      </p:sp>
+      <p:sp>
+        <p:nvSpPr>
+          <p:cNvPr id="134" name="TextBox 133"/>
+          <p:cNvSpPr txBox="1"/>
+          <p:nvPr/>
+        </p:nvSpPr>
+        <p:spPr>
+          <a:xfrm>
+            <a:off x="7747528" y="864748"/>
+            <a:ext cx="182880" cy="329184"/>
+          </a:xfrm>
+          <a:prstGeom prst="rect">
+            <a:avLst/>
+          </a:prstGeom>
+          <a:noFill/>
+          <a:ln>
+            <a:noFill/>
+          </a:ln>
+        </p:spPr>
+        <p:txBody>
+          <a:bodyPr wrap="none" anchor="ctr" lIns="0" rIns="0" tIns="0" bIns="0">
+            <a:spAutoFit/>
+          </a:bodyPr>
+          <a:lstStyle/>
+          <a:p>
+            <a:pPr algn="ctr"/>
+            <a:r>
+              <a:rPr sz="1000" b="0">
+                <a:solidFill>
+                  <a:srgbClr val="CADCFC"/>
+                </a:solidFill>
+                <a:latin typeface="Calibri"/>
+              </a:rPr>
+              <a:t>→</a:t>
+            </a:r>
+          </a:p>
+        </p:txBody>
+      </p:sp>
+      <p:sp>
+        <p:nvSpPr>
+          <p:cNvPr id="135" name="Rectangle 134"/>
+          <p:cNvSpPr/>
+          <p:nvPr/>
+        </p:nvSpPr>
+        <p:spPr>
+          <a:xfrm>
+            <a:off x="7893832" y="864748"/>
+            <a:ext cx="1699961" cy="329184"/>
+          </a:xfrm>
+          <a:prstGeom prst="rect">
+            <a:avLst/>
+          </a:prstGeom>
+          <a:solidFill>
+            <a:srgbClr val="0F1B35"/>
+          </a:solidFill>
+          <a:ln w="15875">
+            <a:solidFill>
+              <a:srgbClr val="0F1B35"/>
+            </a:solidFill>
+          </a:ln>
+        </p:spPr>
+        <p:style>
+          <a:lnRef idx="1">
+            <a:schemeClr val="accent1"/>
+          </a:lnRef>
+          <a:fillRef idx="3">
+            <a:schemeClr val="accent1"/>
+          </a:fillRef>
+          <a:effectRef idx="2">
+            <a:schemeClr val="accent1"/>
+          </a:effectRef>
+          <a:fontRef idx="minor">
+            <a:schemeClr val="lt1"/>
+          </a:fontRef>
+        </p:style>
+        <p:txBody>
+          <a:bodyPr rtlCol="0" anchor="ctr"/>
+          <a:lstStyle/>
+          <a:p>
+            <a:pPr algn="ctr"/>
+          </a:p>
+        </p:txBody>
+      </p:sp>
+      <p:sp>
+        <p:nvSpPr>
+          <p:cNvPr id="136" name="TextBox 135"/>
+          <p:cNvSpPr txBox="1"/>
+          <p:nvPr/>
+        </p:nvSpPr>
+        <p:spPr>
+          <a:xfrm>
+            <a:off x="7893832" y="864748"/>
+            <a:ext cx="1699961" cy="329184"/>
+          </a:xfrm>
+          <a:prstGeom prst="rect">
+            <a:avLst/>
+          </a:prstGeom>
+          <a:noFill/>
+          <a:ln>
+            <a:noFill/>
+          </a:ln>
+        </p:spPr>
+        <p:txBody>
+          <a:bodyPr wrap="square" anchor="ctr" lIns="0" rIns="0" tIns="0" bIns="0">
+            <a:spAutoFit/>
+          </a:bodyPr>
+          <a:lstStyle/>
+          <a:p>
+            <a:pPr algn="ctr"/>
+            <a:r>
+              <a:rPr sz="850" b="1">
+                <a:solidFill>
+                  <a:srgbClr val="FFFFFF"/>
+                </a:solidFill>
+                <a:latin typeface="Calibri"/>
+              </a:rPr>
+              <a:t>RUN</a:t>
+            </a:r>
+          </a:p>
+        </p:txBody>
+      </p:sp>
+      <p:sp>
+        <p:nvSpPr>
+          <p:cNvPr id="137" name="TextBox 136"/>
+          <p:cNvSpPr txBox="1"/>
+          <p:nvPr/>
+        </p:nvSpPr>
+        <p:spPr>
+          <a:xfrm>
+            <a:off x="548640" y="6519672"/>
+            <a:ext cx="8229600" cy="274320"/>
+          </a:xfrm>
+          <a:prstGeom prst="rect">
+            <a:avLst/>
+          </a:prstGeom>
+          <a:noFill/>
+          <a:ln>
+            <a:noFill/>
+          </a:ln>
+        </p:spPr>
+        <p:txBody>
+          <a:bodyPr wrap="none" lIns="0" rIns="0" tIns="0" bIns="0">
+            <a:spAutoFit/>
+          </a:bodyPr>
+          <a:lstStyle/>
+          <a:p>
+            <a:pPr algn="l"/>
+            <a:r>
+              <a:rPr sz="800">
+                <a:solidFill>
+                  <a:srgbClr val="5B6584"/>
+                </a:solidFill>
+                <a:latin typeface="Calibri"/>
+              </a:rPr>
+              <a:t>Deployment as a Service</a:t>
+            </a:r>
+          </a:p>
+        </p:txBody>
+      </p:sp>
+      <p:sp>
+        <p:nvSpPr>
+          <p:cNvPr id="138" name="TextBox 137"/>
+          <p:cNvSpPr txBox="1"/>
+          <p:nvPr/>
+        </p:nvSpPr>
+        <p:spPr>
+          <a:xfrm>
+            <a:off x="11274552" y="6519672"/>
+            <a:ext cx="457200" cy="274320"/>
+          </a:xfrm>
+          <a:prstGeom prst="rect">
+            <a:avLst/>
+          </a:prstGeom>
+          <a:noFill/>
+          <a:ln>
+            <a:noFill/>
+          </a:ln>
+        </p:spPr>
+        <p:txBody>
+          <a:bodyPr wrap="none" lIns="0" rIns="0" tIns="0" bIns="0">
+            <a:spAutoFit/>
+          </a:bodyPr>
+          <a:lstStyle/>
+          <a:p>
+            <a:pPr algn="r"/>
+            <a:r>
+              <a:rPr sz="800">
+                <a:solidFill>
+                  <a:srgbClr val="5B6584"/>
+                </a:solidFill>
+                <a:latin typeface="Calibri"/>
+              </a:rPr>
+              <a:t>6</a:t>
+            </a:r>
+          </a:p>
+        </p:txBody>
+      </p:sp>
+      <p:sp>
+        <p:nvSpPr>
+          <p:cNvPr id="139" name="Rectangle 138"/>
+          <p:cNvSpPr/>
+          <p:nvPr/>
+        </p:nvSpPr>
+        <p:spPr>
+          <a:xfrm>
+            <a:off x="548640" y="1371600"/>
+            <a:ext cx="3246120" cy="1508760"/>
+          </a:xfrm>
+          <a:prstGeom prst="rect">
+            <a:avLst/>
+          </a:prstGeom>
+          <a:solidFill>
+            <a:srgbClr val="002060"/>
+          </a:solidFill>
+          <a:ln>
+            <a:noFill/>
+          </a:ln>
+        </p:spPr>
+        <p:style>
+          <a:lnRef idx="1">
+            <a:schemeClr val="accent1"/>
+          </a:lnRef>
+          <a:fillRef idx="3">
+            <a:schemeClr val="accent1"/>
+          </a:fillRef>
+          <a:effectRef idx="2">
+            <a:schemeClr val="accent1"/>
+          </a:effectRef>
+          <a:fontRef idx="minor">
+            <a:schemeClr val="lt1"/>
+          </a:fontRef>
+        </p:style>
+        <p:txBody>
+          <a:bodyPr rtlCol="0" anchor="ctr"/>
+          <a:lstStyle/>
+          <a:p>
+            <a:pPr algn="ctr"/>
+          </a:p>
+        </p:txBody>
+      </p:sp>
+      <p:sp>
+        <p:nvSpPr>
+          <p:cNvPr id="140" name="Oval 139"/>
+          <p:cNvSpPr/>
+          <p:nvPr/>
+        </p:nvSpPr>
+        <p:spPr>
+          <a:xfrm>
+            <a:off x="777240" y="1915668"/>
+            <a:ext cx="420624" cy="420624"/>
+          </a:xfrm>
+          <a:prstGeom prst="ellipse">
+            <a:avLst/>
+          </a:prstGeom>
+          <a:solidFill>
+            <a:srgbClr val="FFFFFF"/>
+          </a:solidFill>
+          <a:ln>
+            <a:noFill/>
+          </a:ln>
+        </p:spPr>
+        <p:style>
+          <a:lnRef idx="1">
+            <a:schemeClr val="accent1"/>
+          </a:lnRef>
+          <a:fillRef idx="3">
+            <a:schemeClr val="accent1"/>
+          </a:fillRef>
+          <a:effectRef idx="2">
+            <a:schemeClr val="accent1"/>
+          </a:effectRef>
+          <a:fontRef idx="minor">
+            <a:schemeClr val="lt1"/>
+          </a:fontRef>
+        </p:style>
+        <p:txBody>
+          <a:bodyPr rtlCol="0" anchor="ctr" lIns="0" rIns="0" tIns="0" bIns="0"/>
+          <a:lstStyle/>
+          <a:p>
+            <a:pPr algn="ctr"/>
+            <a:r>
+              <a:rPr sz="1600" b="1">
+                <a:solidFill>
+                  <a:srgbClr val="002060"/>
+                </a:solidFill>
+                <a:latin typeface="Arial"/>
+              </a:rPr>
+              <a:t>3</a:t>
+            </a:r>
+          </a:p>
+        </p:txBody>
+      </p:sp>
+      <p:sp>
+        <p:nvSpPr>
+          <p:cNvPr id="141" name="TextBox 140"/>
+          <p:cNvSpPr txBox="1"/>
+          <p:nvPr/>
+        </p:nvSpPr>
+        <p:spPr>
+          <a:xfrm>
+            <a:off x="1298448" y="1897380"/>
+            <a:ext cx="2286000" cy="457200"/>
+          </a:xfrm>
+          <a:prstGeom prst="rect">
+            <a:avLst/>
+          </a:prstGeom>
+          <a:noFill/>
+          <a:ln>
+            <a:noFill/>
+          </a:ln>
+        </p:spPr>
+        <p:txBody>
+          <a:bodyPr wrap="none" anchor="ctr" lIns="0" rIns="0" tIns="0" bIns="0">
+            <a:spAutoFit/>
+          </a:bodyPr>
+          <a:lstStyle/>
+          <a:p>
+            <a:pPr algn="l"/>
+            <a:r>
+              <a:rPr sz="1250" b="1">
+                <a:solidFill>
+                  <a:srgbClr val="FFFFFF"/>
+                </a:solidFill>
+                <a:latin typeface="Calibri"/>
+              </a:rPr>
+              <a:t>AGENTIC ORCHESTRATION</a:t>
+            </a:r>
+          </a:p>
+        </p:txBody>
+      </p:sp>
+      <p:sp>
+        <p:nvSpPr>
+          <p:cNvPr id="142" name="Rectangle 141"/>
+          <p:cNvSpPr/>
+          <p:nvPr/>
+        </p:nvSpPr>
+        <p:spPr>
+          <a:xfrm>
+            <a:off x="3822191" y="2116836"/>
+            <a:ext cx="256032" cy="18288"/>
+          </a:xfrm>
+          <a:prstGeom prst="rect">
+            <a:avLst/>
+          </a:prstGeom>
+          <a:solidFill>
+            <a:srgbClr val="5B6584"/>
+          </a:solidFill>
+          <a:ln>
+            <a:noFill/>
+          </a:ln>
+        </p:spPr>
+        <p:style>
+          <a:lnRef idx="1">
+            <a:schemeClr val="accent1"/>
+          </a:lnRef>
+          <a:fillRef idx="3">
+            <a:schemeClr val="accent1"/>
+          </a:fillRef>
+          <a:effectRef idx="2">
+            <a:schemeClr val="accent1"/>
+          </a:effectRef>
+          <a:fontRef idx="minor">
+            <a:schemeClr val="lt1"/>
+          </a:fontRef>
+        </p:style>
+        <p:txBody>
+          <a:bodyPr rtlCol="0" anchor="ctr"/>
+          <a:lstStyle/>
+          <a:p>
+            <a:pPr algn="ctr"/>
+          </a:p>
+        </p:txBody>
+      </p:sp>
+      <p:sp>
+        <p:nvSpPr>
+          <p:cNvPr id="143" name="Rectangle 142"/>
+          <p:cNvSpPr/>
+          <p:nvPr/>
+        </p:nvSpPr>
+        <p:spPr>
+          <a:xfrm>
+            <a:off x="4114800" y="1371600"/>
+            <a:ext cx="7528255" cy="1508760"/>
+          </a:xfrm>
+          <a:prstGeom prst="rect">
+            <a:avLst/>
+          </a:prstGeom>
+          <a:solidFill>
+            <a:srgbClr val="FFFFFF"/>
+          </a:solidFill>
+          <a:ln w="15875">
+            <a:solidFill>
+              <a:srgbClr val="CADCFC"/>
+            </a:solidFill>
+          </a:ln>
+        </p:spPr>
+        <p:style>
+          <a:lnRef idx="1">
+            <a:schemeClr val="accent1"/>
+          </a:lnRef>
+          <a:fillRef idx="3">
+            <a:schemeClr val="accent1"/>
+          </a:fillRef>
+          <a:effectRef idx="2">
+            <a:schemeClr val="accent1"/>
+          </a:effectRef>
+          <a:fontRef idx="minor">
+            <a:schemeClr val="lt1"/>
+          </a:fontRef>
+        </p:style>
+        <p:txBody>
+          <a:bodyPr rtlCol="0" anchor="ctr"/>
+          <a:lstStyle/>
+          <a:p>
+            <a:pPr algn="ctr"/>
+          </a:p>
+        </p:txBody>
+      </p:sp>
+      <p:sp>
+        <p:nvSpPr>
+          <p:cNvPr id="144" name="Rectangle 143"/>
+          <p:cNvSpPr/>
+          <p:nvPr/>
+        </p:nvSpPr>
+        <p:spPr>
+          <a:xfrm>
+            <a:off x="4279392" y="1453896"/>
+            <a:ext cx="1691640" cy="594360"/>
+          </a:xfrm>
+          <a:prstGeom prst="rect">
+            <a:avLst/>
           </a:prstGeom>
           <a:solidFill>
             <a:srgbClr val="E1F2EF"/>
@@ -54487,121 +55440,107 @@
             <a:solidFill>
               <a:srgbClr val="2E8E82"/>
             </a:solidFill>
-            <a:prstDash val="solid"/>
           </a:ln>
         </p:spPr>
-        <p:txBody>
-          <a:bodyPr/>
-          <a:lstStyle/>
-          <a:p>
-            <a:endParaRPr/>
-          </a:p>
-        </p:txBody>
-      </p:sp>
-      <p:sp>
-        <p:nvSpPr>
-          <p:cNvPr id="11" name="Text 9"/>
-          <p:cNvSpPr/>
-          <p:nvPr/>
-        </p:nvSpPr>
-        <p:spPr>
-          <a:xfrm>
-            <a:off x="4414151" y="1709928"/>
-            <a:ext cx="1399032" cy="274320"/>
+        <p:style>
+          <a:lnRef idx="1">
+            <a:schemeClr val="accent1"/>
+          </a:lnRef>
+          <a:fillRef idx="3">
+            <a:schemeClr val="accent1"/>
+          </a:fillRef>
+          <a:effectRef idx="2">
+            <a:schemeClr val="accent1"/>
+          </a:effectRef>
+          <a:fontRef idx="minor">
+            <a:schemeClr val="lt1"/>
+          </a:fontRef>
+        </p:style>
+        <p:txBody>
+          <a:bodyPr rtlCol="0" anchor="ctr"/>
+          <a:lstStyle/>
+          <a:p>
+            <a:pPr algn="ctr"/>
+          </a:p>
+        </p:txBody>
+      </p:sp>
+      <p:sp>
+        <p:nvSpPr>
+          <p:cNvPr id="145" name="TextBox 144"/>
+          <p:cNvSpPr txBox="1"/>
+          <p:nvPr/>
+        </p:nvSpPr>
+        <p:spPr>
+          <a:xfrm>
+            <a:off x="4352544" y="1508760"/>
+            <a:ext cx="1545336" cy="484632"/>
           </a:xfrm>
           <a:prstGeom prst="rect">
             <a:avLst/>
           </a:prstGeom>
           <a:noFill/>
-          <a:ln/>
-        </p:spPr>
-        <p:txBody>
-          <a:bodyPr wrap="square" lIns="91440" tIns="45720" rIns="91440" bIns="45720" rtlCol="0" anchor="ctr"/>
-          <a:lstStyle/>
-          <a:p>
-            <a:r>
-              <a:rPr lang="en-US" sz="1000" b="1">
+          <a:ln>
+            <a:noFill/>
+          </a:ln>
+        </p:spPr>
+        <p:txBody>
+          <a:bodyPr wrap="square" lIns="0" rIns="0" tIns="0" bIns="0">
+            <a:spAutoFit/>
+          </a:bodyPr>
+          <a:lstStyle/>
+          <a:p>
+            <a:pPr>
+              <a:spcBef>
+                <a:spcPts val="0"/>
+              </a:spcBef>
+              <a:spcAft>
+                <a:spcPts val="100"/>
+              </a:spcAft>
+            </a:pPr>
+            <a:r>
+              <a:rPr sz="900" b="1">
                 <a:solidFill>
                   <a:srgbClr val="2E8E82"/>
                 </a:solidFill>
                 <a:latin typeface="Calibri"/>
-                <a:ea typeface="Calibri"/>
-                <a:cs typeface="Calibri"/>
               </a:rPr>
               <a:t>Scanning Agent</a:t>
             </a:r>
-            <a:r>
-              <a:rPr lang="en-US" sz="1000">
-                <a:solidFill>
-                  <a:srgbClr val="000000"/>
+          </a:p>
+          <a:p>
+            <a:pPr>
+              <a:spcBef>
+                <a:spcPts val="0"/>
+              </a:spcBef>
+              <a:spcAft>
+                <a:spcPts val="0"/>
+              </a:spcAft>
+            </a:pPr>
+            <a:r>
+              <a:rPr sz="800" b="0">
+                <a:solidFill>
+                  <a:srgbClr val="5B6584"/>
                 </a:solidFill>
                 <a:latin typeface="Calibri"/>
-                <a:ea typeface="Calibri"/>
-                <a:cs typeface="Calibri"/>
-              </a:rPr>
-              <a:t> </a:t>
-            </a:r>
-            <a:endParaRPr lang="en-US" sz="1000"/>
-          </a:p>
-        </p:txBody>
-      </p:sp>
-      <p:sp>
-        <p:nvSpPr>
-          <p:cNvPr id="12" name="Text 10"/>
-          <p:cNvSpPr/>
-          <p:nvPr/>
-        </p:nvSpPr>
-        <p:spPr>
-          <a:xfrm>
-            <a:off x="4425696" y="1984248"/>
-            <a:ext cx="1399032" cy="310896"/>
-          </a:xfrm>
-          <a:prstGeom prst="rect">
-            <a:avLst/>
-          </a:prstGeom>
-          <a:noFill/>
-          <a:ln/>
-        </p:spPr>
-        <p:txBody>
-          <a:bodyPr wrap="square" rtlCol="0" anchor="ctr"/>
-          <a:lstStyle/>
-          <a:p>
-            <a:pPr marL="0" indent="0">
-              <a:lnSpc>
-                <a:spcPct val="105000"/>
-              </a:lnSpc>
-              <a:buNone/>
-            </a:pPr>
-            <a:r>
-              <a:rPr lang="en-US" sz="830">
-                <a:solidFill>
-                  <a:srgbClr val="5B6584"/>
-                </a:solidFill>
-                <a:latin typeface="Calibri" pitchFamily="34" charset="0"/>
-                <a:ea typeface="Calibri" pitchFamily="34" charset="-122"/>
-                <a:cs typeface="Calibri" pitchFamily="34" charset="-120"/>
               </a:rPr>
               <a:t>Environment snapshot</a:t>
             </a:r>
-            <a:endParaRPr lang="en-US" sz="830"/>
-          </a:p>
-        </p:txBody>
-      </p:sp>
-      <p:sp>
-        <p:nvSpPr>
-          <p:cNvPr id="13" name="Shape 11"/>
-          <p:cNvSpPr/>
-          <p:nvPr/>
-        </p:nvSpPr>
-        <p:spPr>
-          <a:xfrm>
-            <a:off x="6062472" y="1600200"/>
-            <a:ext cx="1655064" cy="749808"/>
-          </a:xfrm>
-          <a:prstGeom prst="roundRect">
-            <a:avLst>
-              <a:gd name="adj" fmla="val 7317"/>
-            </a:avLst>
+          </a:p>
+        </p:txBody>
+      </p:sp>
+      <p:sp>
+        <p:nvSpPr>
+          <p:cNvPr id="146" name="Rectangle 145"/>
+          <p:cNvSpPr/>
+          <p:nvPr/>
+        </p:nvSpPr>
+        <p:spPr>
+          <a:xfrm>
+            <a:off x="6089904" y="1453896"/>
+            <a:ext cx="1691640" cy="594360"/>
+          </a:xfrm>
+          <a:prstGeom prst="rect">
+            <a:avLst/>
           </a:prstGeom>
           <a:solidFill>
             <a:srgbClr val="E1F2EF"/>
@@ -54610,121 +55549,107 @@
             <a:solidFill>
               <a:srgbClr val="2E8E82"/>
             </a:solidFill>
-            <a:prstDash val="solid"/>
           </a:ln>
         </p:spPr>
-        <p:txBody>
-          <a:bodyPr/>
-          <a:lstStyle/>
-          <a:p>
-            <a:endParaRPr/>
-          </a:p>
-        </p:txBody>
-      </p:sp>
-      <p:sp>
-        <p:nvSpPr>
-          <p:cNvPr id="14" name="Text 12"/>
-          <p:cNvSpPr/>
-          <p:nvPr/>
-        </p:nvSpPr>
-        <p:spPr>
-          <a:xfrm>
-            <a:off x="6190488" y="1709928"/>
-            <a:ext cx="1399032" cy="274320"/>
+        <p:style>
+          <a:lnRef idx="1">
+            <a:schemeClr val="accent1"/>
+          </a:lnRef>
+          <a:fillRef idx="3">
+            <a:schemeClr val="accent1"/>
+          </a:fillRef>
+          <a:effectRef idx="2">
+            <a:schemeClr val="accent1"/>
+          </a:effectRef>
+          <a:fontRef idx="minor">
+            <a:schemeClr val="lt1"/>
+          </a:fontRef>
+        </p:style>
+        <p:txBody>
+          <a:bodyPr rtlCol="0" anchor="ctr"/>
+          <a:lstStyle/>
+          <a:p>
+            <a:pPr algn="ctr"/>
+          </a:p>
+        </p:txBody>
+      </p:sp>
+      <p:sp>
+        <p:nvSpPr>
+          <p:cNvPr id="147" name="TextBox 146"/>
+          <p:cNvSpPr txBox="1"/>
+          <p:nvPr/>
+        </p:nvSpPr>
+        <p:spPr>
+          <a:xfrm>
+            <a:off x="6163056" y="1508760"/>
+            <a:ext cx="1545336" cy="484632"/>
           </a:xfrm>
           <a:prstGeom prst="rect">
             <a:avLst/>
           </a:prstGeom>
           <a:noFill/>
-          <a:ln/>
-        </p:spPr>
-        <p:txBody>
-          <a:bodyPr wrap="square" lIns="91440" tIns="45720" rIns="91440" bIns="45720" rtlCol="0" anchor="ctr"/>
-          <a:lstStyle/>
-          <a:p>
-            <a:r>
-              <a:rPr lang="en-US" sz="1000" b="1">
+          <a:ln>
+            <a:noFill/>
+          </a:ln>
+        </p:spPr>
+        <p:txBody>
+          <a:bodyPr wrap="square" lIns="0" rIns="0" tIns="0" bIns="0">
+            <a:spAutoFit/>
+          </a:bodyPr>
+          <a:lstStyle/>
+          <a:p>
+            <a:pPr>
+              <a:spcBef>
+                <a:spcPts val="0"/>
+              </a:spcBef>
+              <a:spcAft>
+                <a:spcPts val="100"/>
+              </a:spcAft>
+            </a:pPr>
+            <a:r>
+              <a:rPr sz="900" b="1">
                 <a:solidFill>
                   <a:srgbClr val="2E8E82"/>
                 </a:solidFill>
                 <a:latin typeface="Calibri"/>
-                <a:ea typeface="Calibri"/>
-                <a:cs typeface="Calibri"/>
               </a:rPr>
               <a:t>Comparison Agent</a:t>
             </a:r>
-            <a:r>
-              <a:rPr lang="en-US" sz="1000">
-                <a:solidFill>
-                  <a:srgbClr val="000000"/>
+          </a:p>
+          <a:p>
+            <a:pPr>
+              <a:spcBef>
+                <a:spcPts val="0"/>
+              </a:spcBef>
+              <a:spcAft>
+                <a:spcPts val="0"/>
+              </a:spcAft>
+            </a:pPr>
+            <a:r>
+              <a:rPr sz="800" b="0">
+                <a:solidFill>
+                  <a:srgbClr val="5B6584"/>
                 </a:solidFill>
                 <a:latin typeface="Calibri"/>
-                <a:ea typeface="Calibri"/>
-                <a:cs typeface="Calibri"/>
-              </a:rPr>
-              <a:t> </a:t>
-            </a:r>
-            <a:endParaRPr lang="en-US" sz="1000"/>
-          </a:p>
-        </p:txBody>
-      </p:sp>
-      <p:sp>
-        <p:nvSpPr>
-          <p:cNvPr id="15" name="Text 13"/>
-          <p:cNvSpPr/>
-          <p:nvPr/>
-        </p:nvSpPr>
-        <p:spPr>
-          <a:xfrm>
-            <a:off x="6190488" y="1984248"/>
-            <a:ext cx="1399032" cy="310896"/>
-          </a:xfrm>
-          <a:prstGeom prst="rect">
-            <a:avLst/>
-          </a:prstGeom>
-          <a:noFill/>
-          <a:ln/>
-        </p:spPr>
-        <p:txBody>
-          <a:bodyPr wrap="square" rtlCol="0" anchor="ctr"/>
-          <a:lstStyle/>
-          <a:p>
-            <a:pPr marL="0" indent="0">
-              <a:lnSpc>
-                <a:spcPct val="105000"/>
-              </a:lnSpc>
-              <a:buNone/>
-            </a:pPr>
-            <a:r>
-              <a:rPr lang="en-US" sz="830">
-                <a:solidFill>
-                  <a:srgbClr val="5B6584"/>
-                </a:solidFill>
-                <a:latin typeface="Calibri" pitchFamily="34" charset="0"/>
-                <a:ea typeface="Calibri" pitchFamily="34" charset="-122"/>
-                <a:cs typeface="Calibri" pitchFamily="34" charset="-120"/>
               </a:rPr>
               <a:t>Current vs. target delta</a:t>
             </a:r>
-            <a:endParaRPr lang="en-US" sz="830"/>
-          </a:p>
-        </p:txBody>
-      </p:sp>
-      <p:sp>
-        <p:nvSpPr>
-          <p:cNvPr id="16" name="Shape 14"/>
-          <p:cNvSpPr/>
-          <p:nvPr/>
-        </p:nvSpPr>
-        <p:spPr>
-          <a:xfrm>
-            <a:off x="7827264" y="1600200"/>
-            <a:ext cx="1655064" cy="749808"/>
-          </a:xfrm>
-          <a:prstGeom prst="roundRect">
-            <a:avLst>
-              <a:gd name="adj" fmla="val 7317"/>
-            </a:avLst>
+          </a:p>
+        </p:txBody>
+      </p:sp>
+      <p:sp>
+        <p:nvSpPr>
+          <p:cNvPr id="148" name="Rectangle 147"/>
+          <p:cNvSpPr/>
+          <p:nvPr/>
+        </p:nvSpPr>
+        <p:spPr>
+          <a:xfrm>
+            <a:off x="7900416" y="1453896"/>
+            <a:ext cx="1691640" cy="594360"/>
+          </a:xfrm>
+          <a:prstGeom prst="rect">
+            <a:avLst/>
           </a:prstGeom>
           <a:solidFill>
             <a:srgbClr val="E1F2EF"/>
@@ -54733,110 +55658,107 @@
             <a:solidFill>
               <a:srgbClr val="2E8E82"/>
             </a:solidFill>
-            <a:prstDash val="solid"/>
           </a:ln>
         </p:spPr>
-        <p:txBody>
-          <a:bodyPr/>
-          <a:lstStyle/>
-          <a:p>
-            <a:endParaRPr/>
-          </a:p>
-        </p:txBody>
-      </p:sp>
-      <p:sp>
-        <p:nvSpPr>
-          <p:cNvPr id="17" name="Text 15"/>
-          <p:cNvSpPr/>
-          <p:nvPr/>
-        </p:nvSpPr>
-        <p:spPr>
-          <a:xfrm>
-            <a:off x="7955280" y="1709928"/>
-            <a:ext cx="1399032" cy="274320"/>
+        <p:style>
+          <a:lnRef idx="1">
+            <a:schemeClr val="accent1"/>
+          </a:lnRef>
+          <a:fillRef idx="3">
+            <a:schemeClr val="accent1"/>
+          </a:fillRef>
+          <a:effectRef idx="2">
+            <a:schemeClr val="accent1"/>
+          </a:effectRef>
+          <a:fontRef idx="minor">
+            <a:schemeClr val="lt1"/>
+          </a:fontRef>
+        </p:style>
+        <p:txBody>
+          <a:bodyPr rtlCol="0" anchor="ctr"/>
+          <a:lstStyle/>
+          <a:p>
+            <a:pPr algn="ctr"/>
+          </a:p>
+        </p:txBody>
+      </p:sp>
+      <p:sp>
+        <p:nvSpPr>
+          <p:cNvPr id="149" name="TextBox 148"/>
+          <p:cNvSpPr txBox="1"/>
+          <p:nvPr/>
+        </p:nvSpPr>
+        <p:spPr>
+          <a:xfrm>
+            <a:off x="7973568" y="1508760"/>
+            <a:ext cx="1545336" cy="484632"/>
           </a:xfrm>
           <a:prstGeom prst="rect">
             <a:avLst/>
           </a:prstGeom>
           <a:noFill/>
-          <a:ln/>
-        </p:spPr>
-        <p:txBody>
-          <a:bodyPr wrap="square" lIns="91440" tIns="45720" rIns="91440" bIns="45720" rtlCol="0" anchor="ctr"/>
-          <a:lstStyle/>
-          <a:p>
-            <a:r>
-              <a:rPr lang="en-US" sz="1000" b="1">
+          <a:ln>
+            <a:noFill/>
+          </a:ln>
+        </p:spPr>
+        <p:txBody>
+          <a:bodyPr wrap="square" lIns="0" rIns="0" tIns="0" bIns="0">
+            <a:spAutoFit/>
+          </a:bodyPr>
+          <a:lstStyle/>
+          <a:p>
+            <a:pPr>
+              <a:spcBef>
+                <a:spcPts val="0"/>
+              </a:spcBef>
+              <a:spcAft>
+                <a:spcPts val="100"/>
+              </a:spcAft>
+            </a:pPr>
+            <a:r>
+              <a:rPr sz="900" b="1">
                 <a:solidFill>
                   <a:srgbClr val="2E8E82"/>
                 </a:solidFill>
                 <a:latin typeface="Calibri"/>
-                <a:ea typeface="Calibri"/>
-                <a:cs typeface="Calibri"/>
               </a:rPr>
               <a:t>Dependency Agent</a:t>
             </a:r>
-            <a:endParaRPr lang="en-US" sz="1000"/>
-          </a:p>
-        </p:txBody>
-      </p:sp>
-      <p:sp>
-        <p:nvSpPr>
-          <p:cNvPr id="18" name="Text 16"/>
-          <p:cNvSpPr/>
-          <p:nvPr/>
-        </p:nvSpPr>
-        <p:spPr>
-          <a:xfrm>
-            <a:off x="7955280" y="1984248"/>
-            <a:ext cx="1399032" cy="310896"/>
-          </a:xfrm>
-          <a:prstGeom prst="rect">
-            <a:avLst/>
-          </a:prstGeom>
-          <a:noFill/>
-          <a:ln/>
-        </p:spPr>
-        <p:txBody>
-          <a:bodyPr wrap="square" rtlCol="0" anchor="ctr"/>
-          <a:lstStyle/>
-          <a:p>
-            <a:pPr marL="0" indent="0">
-              <a:lnSpc>
-                <a:spcPct val="105000"/>
-              </a:lnSpc>
-              <a:buNone/>
+          </a:p>
+          <a:p>
+            <a:pPr>
+              <a:spcBef>
+                <a:spcPts val="0"/>
+              </a:spcBef>
+              <a:spcAft>
+                <a:spcPts val="0"/>
+              </a:spcAft>
             </a:pPr>
             <a:r>
-              <a:rPr lang="en-US" sz="830">
+              <a:rPr sz="800" b="0">
                 <a:solidFill>
                   <a:srgbClr val="5B6584"/>
                 </a:solidFill>
-                <a:latin typeface="Calibri" pitchFamily="34" charset="0"/>
-                <a:ea typeface="Calibri" pitchFamily="34" charset="-122"/>
-                <a:cs typeface="Calibri" pitchFamily="34" charset="-120"/>
+                <a:latin typeface="Calibri"/>
               </a:rPr>
               <a:t>What else is impacted</a:t>
             </a:r>
-            <a:endParaRPr lang="en-US" sz="830"/>
-          </a:p>
-        </p:txBody>
-      </p:sp>
-      <p:sp>
-        <p:nvSpPr>
-          <p:cNvPr id="19" name="Shape 17"/>
-          <p:cNvSpPr/>
-          <p:nvPr/>
-        </p:nvSpPr>
-        <p:spPr>
-          <a:xfrm>
-            <a:off x="9592056" y="1600200"/>
-            <a:ext cx="1655064" cy="749808"/>
-          </a:xfrm>
-          <a:prstGeom prst="roundRect">
-            <a:avLst>
-              <a:gd name="adj" fmla="val 7317"/>
-            </a:avLst>
+          </a:p>
+        </p:txBody>
+      </p:sp>
+      <p:sp>
+        <p:nvSpPr>
+          <p:cNvPr id="150" name="Rectangle 149"/>
+          <p:cNvSpPr/>
+          <p:nvPr/>
+        </p:nvSpPr>
+        <p:spPr>
+          <a:xfrm>
+            <a:off x="9710928" y="1453896"/>
+            <a:ext cx="1691640" cy="594360"/>
+          </a:xfrm>
+          <a:prstGeom prst="rect">
+            <a:avLst/>
           </a:prstGeom>
           <a:solidFill>
             <a:srgbClr val="E1F2EF"/>
@@ -54845,113 +55767,107 @@
             <a:solidFill>
               <a:srgbClr val="2E8E82"/>
             </a:solidFill>
-            <a:prstDash val="solid"/>
           </a:ln>
         </p:spPr>
-        <p:txBody>
-          <a:bodyPr/>
-          <a:lstStyle/>
-          <a:p>
-            <a:endParaRPr/>
-          </a:p>
-        </p:txBody>
-      </p:sp>
-      <p:sp>
-        <p:nvSpPr>
-          <p:cNvPr id="20" name="Text 18"/>
-          <p:cNvSpPr/>
-          <p:nvPr/>
-        </p:nvSpPr>
-        <p:spPr>
-          <a:xfrm>
-            <a:off x="9720072" y="1709928"/>
-            <a:ext cx="1399032" cy="274320"/>
+        <p:style>
+          <a:lnRef idx="1">
+            <a:schemeClr val="accent1"/>
+          </a:lnRef>
+          <a:fillRef idx="3">
+            <a:schemeClr val="accent1"/>
+          </a:fillRef>
+          <a:effectRef idx="2">
+            <a:schemeClr val="accent1"/>
+          </a:effectRef>
+          <a:fontRef idx="minor">
+            <a:schemeClr val="lt1"/>
+          </a:fontRef>
+        </p:style>
+        <p:txBody>
+          <a:bodyPr rtlCol="0" anchor="ctr"/>
+          <a:lstStyle/>
+          <a:p>
+            <a:pPr algn="ctr"/>
+          </a:p>
+        </p:txBody>
+      </p:sp>
+      <p:sp>
+        <p:nvSpPr>
+          <p:cNvPr id="151" name="TextBox 150"/>
+          <p:cNvSpPr txBox="1"/>
+          <p:nvPr/>
+        </p:nvSpPr>
+        <p:spPr>
+          <a:xfrm>
+            <a:off x="9784080" y="1508760"/>
+            <a:ext cx="1545336" cy="484632"/>
           </a:xfrm>
           <a:prstGeom prst="rect">
             <a:avLst/>
           </a:prstGeom>
           <a:noFill/>
-          <a:ln/>
-        </p:spPr>
-        <p:txBody>
-          <a:bodyPr wrap="square" rtlCol="0" anchor="ctr"/>
-          <a:lstStyle/>
-          <a:p>
-            <a:pPr marL="0" indent="0">
-              <a:buNone/>
+          <a:ln>
+            <a:noFill/>
+          </a:ln>
+        </p:spPr>
+        <p:txBody>
+          <a:bodyPr wrap="square" lIns="0" rIns="0" tIns="0" bIns="0">
+            <a:spAutoFit/>
+          </a:bodyPr>
+          <a:lstStyle/>
+          <a:p>
+            <a:pPr>
+              <a:spcBef>
+                <a:spcPts val="0"/>
+              </a:spcBef>
+              <a:spcAft>
+                <a:spcPts val="100"/>
+              </a:spcAft>
             </a:pPr>
             <a:r>
-              <a:rPr lang="en-US" sz="1000" b="1">
+              <a:rPr sz="900" b="1">
                 <a:solidFill>
                   <a:srgbClr val="2E8E82"/>
                 </a:solidFill>
-                <a:latin typeface="Calibri" pitchFamily="34" charset="0"/>
-                <a:ea typeface="Calibri" pitchFamily="34" charset="-122"/>
-                <a:cs typeface="Calibri" pitchFamily="34" charset="-120"/>
+                <a:latin typeface="Calibri"/>
               </a:rPr>
               <a:t>AI Readiness</a:t>
             </a:r>
-            <a:endParaRPr lang="en-US" sz="1000"/>
-          </a:p>
-        </p:txBody>
-      </p:sp>
-      <p:sp>
-        <p:nvSpPr>
-          <p:cNvPr id="21" name="Text 19"/>
-          <p:cNvSpPr/>
-          <p:nvPr/>
-        </p:nvSpPr>
-        <p:spPr>
-          <a:xfrm>
-            <a:off x="9720072" y="1984248"/>
-            <a:ext cx="1399032" cy="310896"/>
-          </a:xfrm>
-          <a:prstGeom prst="rect">
-            <a:avLst/>
-          </a:prstGeom>
-          <a:noFill/>
-          <a:ln/>
-        </p:spPr>
-        <p:txBody>
-          <a:bodyPr wrap="square" rtlCol="0" anchor="ctr"/>
-          <a:lstStyle/>
-          <a:p>
-            <a:pPr marL="0" indent="0">
-              <a:lnSpc>
-                <a:spcPct val="105000"/>
-              </a:lnSpc>
-              <a:buNone/>
+          </a:p>
+          <a:p>
+            <a:pPr>
+              <a:spcBef>
+                <a:spcPts val="0"/>
+              </a:spcBef>
+              <a:spcAft>
+                <a:spcPts val="0"/>
+              </a:spcAft>
             </a:pPr>
             <a:r>
-              <a:rPr lang="en-US" sz="830">
+              <a:rPr sz="800" b="0">
                 <a:solidFill>
                   <a:srgbClr val="5B6584"/>
                 </a:solidFill>
-                <a:latin typeface="Calibri" pitchFamily="34" charset="0"/>
-                <a:ea typeface="Calibri" pitchFamily="34" charset="-122"/>
-                <a:cs typeface="Calibri" pitchFamily="34" charset="-120"/>
+                <a:latin typeface="Calibri"/>
               </a:rPr>
               <a:t>Should I deploy?</a:t>
             </a:r>
-            <a:endParaRPr lang="en-US" sz="830"/>
-          </a:p>
-        </p:txBody>
-      </p:sp>
-      <p:sp>
-        <p:nvSpPr>
-          <p:cNvPr id="22" name="Shape 20"/>
-          <p:cNvSpPr/>
-          <p:nvPr/>
-        </p:nvSpPr>
-        <p:spPr>
-          <a:xfrm>
-            <a:off x="4297680" y="2468880"/>
-            <a:ext cx="1655064" cy="749808"/>
-          </a:xfrm>
-          <a:prstGeom prst="roundRect">
-            <a:avLst>
-              <a:gd name="adj" fmla="val 7317"/>
-            </a:avLst>
+          </a:p>
+        </p:txBody>
+      </p:sp>
+      <p:sp>
+        <p:nvSpPr>
+          <p:cNvPr id="152" name="Rectangle 151"/>
+          <p:cNvSpPr/>
+          <p:nvPr/>
+        </p:nvSpPr>
+        <p:spPr>
+          <a:xfrm>
+            <a:off x="4279392" y="2148840"/>
+            <a:ext cx="1691640" cy="594360"/>
+          </a:xfrm>
+          <a:prstGeom prst="rect">
+            <a:avLst/>
           </a:prstGeom>
           <a:solidFill>
             <a:srgbClr val="E1F2EF"/>
@@ -54960,110 +55876,107 @@
             <a:solidFill>
               <a:srgbClr val="2E8E82"/>
             </a:solidFill>
-            <a:prstDash val="solid"/>
           </a:ln>
         </p:spPr>
-        <p:txBody>
-          <a:bodyPr/>
-          <a:lstStyle/>
-          <a:p>
-            <a:endParaRPr/>
-          </a:p>
-        </p:txBody>
-      </p:sp>
-      <p:sp>
-        <p:nvSpPr>
-          <p:cNvPr id="23" name="Text 21"/>
-          <p:cNvSpPr/>
-          <p:nvPr/>
-        </p:nvSpPr>
-        <p:spPr>
-          <a:xfrm>
-            <a:off x="4425696" y="2578608"/>
-            <a:ext cx="1399032" cy="274320"/>
+        <p:style>
+          <a:lnRef idx="1">
+            <a:schemeClr val="accent1"/>
+          </a:lnRef>
+          <a:fillRef idx="3">
+            <a:schemeClr val="accent1"/>
+          </a:fillRef>
+          <a:effectRef idx="2">
+            <a:schemeClr val="accent1"/>
+          </a:effectRef>
+          <a:fontRef idx="minor">
+            <a:schemeClr val="lt1"/>
+          </a:fontRef>
+        </p:style>
+        <p:txBody>
+          <a:bodyPr rtlCol="0" anchor="ctr"/>
+          <a:lstStyle/>
+          <a:p>
+            <a:pPr algn="ctr"/>
+          </a:p>
+        </p:txBody>
+      </p:sp>
+      <p:sp>
+        <p:nvSpPr>
+          <p:cNvPr id="153" name="TextBox 152"/>
+          <p:cNvSpPr txBox="1"/>
+          <p:nvPr/>
+        </p:nvSpPr>
+        <p:spPr>
+          <a:xfrm>
+            <a:off x="4352544" y="2203704"/>
+            <a:ext cx="1545336" cy="484632"/>
           </a:xfrm>
           <a:prstGeom prst="rect">
             <a:avLst/>
           </a:prstGeom>
           <a:noFill/>
-          <a:ln/>
-        </p:spPr>
-        <p:txBody>
-          <a:bodyPr wrap="square" lIns="91440" tIns="45720" rIns="91440" bIns="45720" rtlCol="0" anchor="ctr"/>
-          <a:lstStyle/>
-          <a:p>
-            <a:r>
-              <a:rPr lang="en-US" sz="1000" b="1">
+          <a:ln>
+            <a:noFill/>
+          </a:ln>
+        </p:spPr>
+        <p:txBody>
+          <a:bodyPr wrap="square" lIns="0" rIns="0" tIns="0" bIns="0">
+            <a:spAutoFit/>
+          </a:bodyPr>
+          <a:lstStyle/>
+          <a:p>
+            <a:pPr>
+              <a:spcBef>
+                <a:spcPts val="0"/>
+              </a:spcBef>
+              <a:spcAft>
+                <a:spcPts val="100"/>
+              </a:spcAft>
+            </a:pPr>
+            <a:r>
+              <a:rPr sz="900" b="1">
                 <a:solidFill>
                   <a:srgbClr val="2E8E82"/>
                 </a:solidFill>
                 <a:latin typeface="Calibri"/>
-                <a:ea typeface="Calibri"/>
-                <a:cs typeface="Calibri"/>
               </a:rPr>
               <a:t>Risk Assessment Agent</a:t>
             </a:r>
-            <a:endParaRPr lang="en-US" sz="1000"/>
-          </a:p>
-        </p:txBody>
-      </p:sp>
-      <p:sp>
-        <p:nvSpPr>
-          <p:cNvPr id="24" name="Text 22"/>
-          <p:cNvSpPr/>
-          <p:nvPr/>
-        </p:nvSpPr>
-        <p:spPr>
-          <a:xfrm>
-            <a:off x="4425696" y="2852928"/>
-            <a:ext cx="1399032" cy="310896"/>
-          </a:xfrm>
-          <a:prstGeom prst="rect">
-            <a:avLst/>
-          </a:prstGeom>
-          <a:noFill/>
-          <a:ln/>
-        </p:spPr>
-        <p:txBody>
-          <a:bodyPr wrap="square" rtlCol="0" anchor="ctr"/>
-          <a:lstStyle/>
-          <a:p>
-            <a:pPr marL="0" indent="0">
-              <a:lnSpc>
-                <a:spcPct val="105000"/>
-              </a:lnSpc>
-              <a:buNone/>
+          </a:p>
+          <a:p>
+            <a:pPr>
+              <a:spcBef>
+                <a:spcPts val="0"/>
+              </a:spcBef>
+              <a:spcAft>
+                <a:spcPts val="0"/>
+              </a:spcAft>
             </a:pPr>
             <a:r>
-              <a:rPr lang="en-US" sz="830">
+              <a:rPr sz="800" b="0">
                 <a:solidFill>
                   <a:srgbClr val="5B6584"/>
                 </a:solidFill>
-                <a:latin typeface="Calibri" pitchFamily="34" charset="0"/>
-                <a:ea typeface="Calibri" pitchFamily="34" charset="-122"/>
-                <a:cs typeface="Calibri" pitchFamily="34" charset="-120"/>
+                <a:latin typeface="Calibri"/>
               </a:rPr>
               <a:t>Composite risk rating</a:t>
             </a:r>
-            <a:endParaRPr lang="en-US" sz="830"/>
-          </a:p>
-        </p:txBody>
-      </p:sp>
-      <p:sp>
-        <p:nvSpPr>
-          <p:cNvPr id="25" name="Shape 23"/>
-          <p:cNvSpPr/>
-          <p:nvPr/>
-        </p:nvSpPr>
-        <p:spPr>
-          <a:xfrm>
-            <a:off x="6062472" y="2468880"/>
-            <a:ext cx="1655064" cy="749808"/>
-          </a:xfrm>
-          <a:prstGeom prst="roundRect">
-            <a:avLst>
-              <a:gd name="adj" fmla="val 7317"/>
-            </a:avLst>
+          </a:p>
+        </p:txBody>
+      </p:sp>
+      <p:sp>
+        <p:nvSpPr>
+          <p:cNvPr id="154" name="Rectangle 153"/>
+          <p:cNvSpPr/>
+          <p:nvPr/>
+        </p:nvSpPr>
+        <p:spPr>
+          <a:xfrm>
+            <a:off x="6089904" y="2148840"/>
+            <a:ext cx="1691640" cy="594360"/>
+          </a:xfrm>
+          <a:prstGeom prst="rect">
+            <a:avLst/>
           </a:prstGeom>
           <a:solidFill>
             <a:srgbClr val="E1F2EF"/>
@@ -55072,110 +55985,107 @@
             <a:solidFill>
               <a:srgbClr val="2E8E82"/>
             </a:solidFill>
-            <a:prstDash val="solid"/>
           </a:ln>
         </p:spPr>
-        <p:txBody>
-          <a:bodyPr/>
-          <a:lstStyle/>
-          <a:p>
-            <a:endParaRPr/>
-          </a:p>
-        </p:txBody>
-      </p:sp>
-      <p:sp>
-        <p:nvSpPr>
-          <p:cNvPr id="26" name="Text 24"/>
-          <p:cNvSpPr/>
-          <p:nvPr/>
-        </p:nvSpPr>
-        <p:spPr>
-          <a:xfrm>
-            <a:off x="6190488" y="2578608"/>
-            <a:ext cx="1399032" cy="274320"/>
+        <p:style>
+          <a:lnRef idx="1">
+            <a:schemeClr val="accent1"/>
+          </a:lnRef>
+          <a:fillRef idx="3">
+            <a:schemeClr val="accent1"/>
+          </a:fillRef>
+          <a:effectRef idx="2">
+            <a:schemeClr val="accent1"/>
+          </a:effectRef>
+          <a:fontRef idx="minor">
+            <a:schemeClr val="lt1"/>
+          </a:fontRef>
+        </p:style>
+        <p:txBody>
+          <a:bodyPr rtlCol="0" anchor="ctr"/>
+          <a:lstStyle/>
+          <a:p>
+            <a:pPr algn="ctr"/>
+          </a:p>
+        </p:txBody>
+      </p:sp>
+      <p:sp>
+        <p:nvSpPr>
+          <p:cNvPr id="155" name="TextBox 154"/>
+          <p:cNvSpPr txBox="1"/>
+          <p:nvPr/>
+        </p:nvSpPr>
+        <p:spPr>
+          <a:xfrm>
+            <a:off x="6163056" y="2203704"/>
+            <a:ext cx="1545336" cy="484632"/>
           </a:xfrm>
           <a:prstGeom prst="rect">
             <a:avLst/>
           </a:prstGeom>
           <a:noFill/>
-          <a:ln/>
-        </p:spPr>
-        <p:txBody>
-          <a:bodyPr wrap="square" lIns="91440" tIns="45720" rIns="91440" bIns="45720" rtlCol="0" anchor="ctr"/>
-          <a:lstStyle/>
-          <a:p>
-            <a:r>
-              <a:rPr lang="en-US" sz="1000" b="1">
+          <a:ln>
+            <a:noFill/>
+          </a:ln>
+        </p:spPr>
+        <p:txBody>
+          <a:bodyPr wrap="square" lIns="0" rIns="0" tIns="0" bIns="0">
+            <a:spAutoFit/>
+          </a:bodyPr>
+          <a:lstStyle/>
+          <a:p>
+            <a:pPr>
+              <a:spcBef>
+                <a:spcPts val="0"/>
+              </a:spcBef>
+              <a:spcAft>
+                <a:spcPts val="100"/>
+              </a:spcAft>
+            </a:pPr>
+            <a:r>
+              <a:rPr sz="900" b="1">
                 <a:solidFill>
                   <a:srgbClr val="2E8E82"/>
                 </a:solidFill>
                 <a:latin typeface="Calibri"/>
-                <a:ea typeface="Calibri"/>
-                <a:cs typeface="Calibri"/>
               </a:rPr>
               <a:t>Validation Agent</a:t>
             </a:r>
-            <a:endParaRPr lang="en-US" sz="1000"/>
-          </a:p>
-        </p:txBody>
-      </p:sp>
-      <p:sp>
-        <p:nvSpPr>
-          <p:cNvPr id="27" name="Text 25"/>
-          <p:cNvSpPr/>
-          <p:nvPr/>
-        </p:nvSpPr>
-        <p:spPr>
-          <a:xfrm>
-            <a:off x="6190488" y="2852928"/>
-            <a:ext cx="1399032" cy="310896"/>
-          </a:xfrm>
-          <a:prstGeom prst="rect">
-            <a:avLst/>
-          </a:prstGeom>
-          <a:noFill/>
-          <a:ln/>
-        </p:spPr>
-        <p:txBody>
-          <a:bodyPr wrap="square" rtlCol="0" anchor="ctr"/>
-          <a:lstStyle/>
-          <a:p>
-            <a:pPr marL="0" indent="0">
-              <a:lnSpc>
-                <a:spcPct val="105000"/>
-              </a:lnSpc>
-              <a:buNone/>
+          </a:p>
+          <a:p>
+            <a:pPr>
+              <a:spcBef>
+                <a:spcPts val="0"/>
+              </a:spcBef>
+              <a:spcAft>
+                <a:spcPts val="0"/>
+              </a:spcAft>
             </a:pPr>
             <a:r>
-              <a:rPr lang="en-US" sz="830">
+              <a:rPr sz="800" b="0">
                 <a:solidFill>
                   <a:srgbClr val="5B6584"/>
                 </a:solidFill>
-                <a:latin typeface="Calibri" pitchFamily="34" charset="0"/>
-                <a:ea typeface="Calibri" pitchFamily="34" charset="-122"/>
-                <a:cs typeface="Calibri" pitchFamily="34" charset="-120"/>
+                <a:latin typeface="Calibri"/>
               </a:rPr>
               <a:t>Post-deploy checks</a:t>
             </a:r>
-            <a:endParaRPr lang="en-US" sz="830"/>
-          </a:p>
-        </p:txBody>
-      </p:sp>
-      <p:sp>
-        <p:nvSpPr>
-          <p:cNvPr id="28" name="Shape 26"/>
-          <p:cNvSpPr/>
-          <p:nvPr/>
-        </p:nvSpPr>
-        <p:spPr>
-          <a:xfrm>
-            <a:off x="7827264" y="2468880"/>
-            <a:ext cx="1655064" cy="749808"/>
-          </a:xfrm>
-          <a:prstGeom prst="roundRect">
-            <a:avLst>
-              <a:gd name="adj" fmla="val 7317"/>
-            </a:avLst>
+          </a:p>
+        </p:txBody>
+      </p:sp>
+      <p:sp>
+        <p:nvSpPr>
+          <p:cNvPr id="156" name="Rectangle 155"/>
+          <p:cNvSpPr/>
+          <p:nvPr/>
+        </p:nvSpPr>
+        <p:spPr>
+          <a:xfrm>
+            <a:off x="7900416" y="2148840"/>
+            <a:ext cx="1691640" cy="594360"/>
+          </a:xfrm>
+          <a:prstGeom prst="rect">
+            <a:avLst/>
           </a:prstGeom>
           <a:solidFill>
             <a:srgbClr val="E1F2EF"/>
@@ -55184,193 +56094,183 @@
             <a:solidFill>
               <a:srgbClr val="2E8E82"/>
             </a:solidFill>
-            <a:prstDash val="solid"/>
           </a:ln>
         </p:spPr>
-        <p:txBody>
-          <a:bodyPr/>
-          <a:lstStyle/>
-          <a:p>
-            <a:endParaRPr/>
-          </a:p>
-        </p:txBody>
-      </p:sp>
-      <p:sp>
-        <p:nvSpPr>
-          <p:cNvPr id="29" name="Text 27"/>
-          <p:cNvSpPr/>
-          <p:nvPr/>
-        </p:nvSpPr>
-        <p:spPr>
-          <a:xfrm>
-            <a:off x="7955280" y="2578608"/>
-            <a:ext cx="1399032" cy="274320"/>
+        <p:style>
+          <a:lnRef idx="1">
+            <a:schemeClr val="accent1"/>
+          </a:lnRef>
+          <a:fillRef idx="3">
+            <a:schemeClr val="accent1"/>
+          </a:fillRef>
+          <a:effectRef idx="2">
+            <a:schemeClr val="accent1"/>
+          </a:effectRef>
+          <a:fontRef idx="minor">
+            <a:schemeClr val="lt1"/>
+          </a:fontRef>
+        </p:style>
+        <p:txBody>
+          <a:bodyPr rtlCol="0" anchor="ctr"/>
+          <a:lstStyle/>
+          <a:p>
+            <a:pPr algn="ctr"/>
+          </a:p>
+        </p:txBody>
+      </p:sp>
+      <p:sp>
+        <p:nvSpPr>
+          <p:cNvPr id="157" name="TextBox 156"/>
+          <p:cNvSpPr txBox="1"/>
+          <p:nvPr/>
+        </p:nvSpPr>
+        <p:spPr>
+          <a:xfrm>
+            <a:off x="7973568" y="2203704"/>
+            <a:ext cx="1545336" cy="484632"/>
           </a:xfrm>
           <a:prstGeom prst="rect">
             <a:avLst/>
           </a:prstGeom>
           <a:noFill/>
-          <a:ln/>
-        </p:spPr>
-        <p:txBody>
-          <a:bodyPr wrap="square" rtlCol="0" anchor="ctr"/>
-          <a:lstStyle/>
-          <a:p>
-            <a:pPr marL="0" indent="0">
-              <a:buNone/>
+          <a:ln>
+            <a:noFill/>
+          </a:ln>
+        </p:spPr>
+        <p:txBody>
+          <a:bodyPr wrap="square" lIns="0" rIns="0" tIns="0" bIns="0">
+            <a:spAutoFit/>
+          </a:bodyPr>
+          <a:lstStyle/>
+          <a:p>
+            <a:pPr>
+              <a:spcBef>
+                <a:spcPts val="0"/>
+              </a:spcBef>
+              <a:spcAft>
+                <a:spcPts val="100"/>
+              </a:spcAft>
             </a:pPr>
             <a:r>
-              <a:rPr lang="en-US" sz="1000" b="1">
+              <a:rPr sz="900" b="1">
                 <a:solidFill>
                   <a:srgbClr val="2E8E82"/>
                 </a:solidFill>
-                <a:latin typeface="Calibri" pitchFamily="34" charset="0"/>
-                <a:ea typeface="Calibri" pitchFamily="34" charset="-122"/>
-                <a:cs typeface="Calibri" pitchFamily="34" charset="-120"/>
+                <a:latin typeface="Calibri"/>
               </a:rPr>
               <a:t>Rollback Advisor</a:t>
             </a:r>
-            <a:endParaRPr lang="en-US" sz="1000"/>
-          </a:p>
-        </p:txBody>
-      </p:sp>
-      <p:sp>
-        <p:nvSpPr>
-          <p:cNvPr id="30" name="Text 28"/>
-          <p:cNvSpPr/>
-          <p:nvPr/>
-        </p:nvSpPr>
-        <p:spPr>
-          <a:xfrm>
-            <a:off x="7955280" y="2852928"/>
-            <a:ext cx="1399032" cy="310896"/>
-          </a:xfrm>
-          <a:prstGeom prst="rect">
-            <a:avLst/>
-          </a:prstGeom>
-          <a:noFill/>
-          <a:ln/>
-        </p:spPr>
-        <p:txBody>
-          <a:bodyPr wrap="square" rtlCol="0" anchor="ctr"/>
-          <a:lstStyle/>
-          <a:p>
-            <a:pPr marL="0" indent="0">
-              <a:lnSpc>
-                <a:spcPct val="105000"/>
-              </a:lnSpc>
-              <a:buNone/>
+          </a:p>
+          <a:p>
+            <a:pPr>
+              <a:spcBef>
+                <a:spcPts val="0"/>
+              </a:spcBef>
+              <a:spcAft>
+                <a:spcPts val="0"/>
+              </a:spcAft>
             </a:pPr>
             <a:r>
-              <a:rPr lang="en-US" sz="830">
+              <a:rPr sz="800" b="0">
                 <a:solidFill>
                   <a:srgbClr val="5B6584"/>
                 </a:solidFill>
-                <a:latin typeface="Calibri" pitchFamily="34" charset="0"/>
-                <a:ea typeface="Calibri" pitchFamily="34" charset="-122"/>
-                <a:cs typeface="Calibri" pitchFamily="34" charset="-120"/>
+                <a:latin typeface="Calibri"/>
               </a:rPr>
               <a:t>Safe-to-rollback guidance</a:t>
             </a:r>
-            <a:endParaRPr lang="en-US" sz="830"/>
-          </a:p>
-        </p:txBody>
-      </p:sp>
-      <p:sp>
-        <p:nvSpPr>
-          <p:cNvPr id="31" name="Shape 29"/>
-          <p:cNvSpPr/>
-          <p:nvPr/>
-        </p:nvSpPr>
-        <p:spPr>
-          <a:xfrm>
-            <a:off x="548640" y="3566160"/>
-            <a:ext cx="3246120" cy="1234440"/>
-          </a:xfrm>
-          <a:prstGeom prst="roundRect">
-            <a:avLst>
-              <a:gd name="adj" fmla="val 7407"/>
-            </a:avLst>
+          </a:p>
+        </p:txBody>
+      </p:sp>
+      <p:sp>
+        <p:nvSpPr>
+          <p:cNvPr id="158" name="Rectangle 157"/>
+          <p:cNvSpPr/>
+          <p:nvPr/>
+        </p:nvSpPr>
+        <p:spPr>
+          <a:xfrm>
+            <a:off x="548640" y="2999232"/>
+            <a:ext cx="3246120" cy="1417320"/>
+          </a:xfrm>
+          <a:prstGeom prst="rect">
+            <a:avLst/>
           </a:prstGeom>
           <a:solidFill>
             <a:srgbClr val="002060"/>
           </a:solidFill>
-          <a:ln w="19050">
-            <a:solidFill>
-              <a:srgbClr val="2C3E7B"/>
-            </a:solidFill>
-            <a:prstDash val="solid"/>
+          <a:ln>
+            <a:noFill/>
           </a:ln>
         </p:spPr>
-        <p:txBody>
-          <a:bodyPr/>
-          <a:lstStyle/>
-          <a:p>
-            <a:endParaRPr/>
-          </a:p>
-        </p:txBody>
-      </p:sp>
-      <p:sp>
-        <p:nvSpPr>
-          <p:cNvPr id="32" name="Shape 30"/>
-          <p:cNvSpPr/>
-          <p:nvPr/>
-        </p:nvSpPr>
-        <p:spPr>
-          <a:xfrm>
-            <a:off x="777240" y="3973068"/>
+        <p:style>
+          <a:lnRef idx="1">
+            <a:schemeClr val="accent1"/>
+          </a:lnRef>
+          <a:fillRef idx="3">
+            <a:schemeClr val="accent1"/>
+          </a:fillRef>
+          <a:effectRef idx="2">
+            <a:schemeClr val="accent1"/>
+          </a:effectRef>
+          <a:fontRef idx="minor">
+            <a:schemeClr val="lt1"/>
+          </a:fontRef>
+        </p:style>
+        <p:txBody>
+          <a:bodyPr rtlCol="0" anchor="ctr"/>
+          <a:lstStyle/>
+          <a:p>
+            <a:pPr algn="ctr"/>
+          </a:p>
+        </p:txBody>
+      </p:sp>
+      <p:sp>
+        <p:nvSpPr>
+          <p:cNvPr id="159" name="Oval 158"/>
+          <p:cNvSpPr/>
+          <p:nvPr/>
+        </p:nvSpPr>
+        <p:spPr>
+          <a:xfrm>
+            <a:off x="777240" y="3497580"/>
             <a:ext cx="420624" cy="420624"/>
           </a:xfrm>
           <a:prstGeom prst="ellipse">
             <a:avLst/>
           </a:prstGeom>
           <a:solidFill>
-            <a:schemeClr val="bg1"/>
+            <a:srgbClr val="FFFFFF"/>
           </a:solidFill>
-          <a:ln/>
-        </p:spPr>
-        <p:txBody>
-          <a:bodyPr/>
-          <a:lstStyle/>
-          <a:p>
-            <a:endParaRPr/>
-          </a:p>
-        </p:txBody>
-      </p:sp>
-      <p:sp>
-        <p:nvSpPr>
-          <p:cNvPr id="33" name="Text 31"/>
-          <p:cNvSpPr/>
-          <p:nvPr/>
-        </p:nvSpPr>
-        <p:spPr>
-          <a:xfrm>
-            <a:off x="777240" y="3973068"/>
-            <a:ext cx="420624" cy="420624"/>
-          </a:xfrm>
-          <a:prstGeom prst="rect">
-            <a:avLst/>
-          </a:prstGeom>
-          <a:noFill/>
-          <a:ln/>
-        </p:spPr>
-        <p:txBody>
-          <a:bodyPr wrap="square" lIns="0" tIns="0" rIns="0" bIns="0" rtlCol="0" anchor="ctr"/>
-          <a:lstStyle/>
-          <a:p>
-            <a:pPr marL="0" indent="0" algn="ctr">
-              <a:buNone/>
-            </a:pPr>
-            <a:r>
-              <a:rPr lang="en-US" sz="1600" b="1">
-                <a:solidFill>
-                  <a:schemeClr val="tx1">
-                    <a:lumMod val="85000"/>
-                    <a:lumOff val="15000"/>
-                  </a:schemeClr>
+          <a:ln>
+            <a:noFill/>
+          </a:ln>
+        </p:spPr>
+        <p:style>
+          <a:lnRef idx="1">
+            <a:schemeClr val="accent1"/>
+          </a:lnRef>
+          <a:fillRef idx="3">
+            <a:schemeClr val="accent1"/>
+          </a:fillRef>
+          <a:effectRef idx="2">
+            <a:schemeClr val="accent1"/>
+          </a:effectRef>
+          <a:fontRef idx="minor">
+            <a:schemeClr val="lt1"/>
+          </a:fontRef>
+        </p:style>
+        <p:txBody>
+          <a:bodyPr rtlCol="0" anchor="ctr" lIns="0" rIns="0" tIns="0" bIns="0"/>
+          <a:lstStyle/>
+          <a:p>
+            <a:pPr algn="ctr"/>
+            <a:r>
+              <a:rPr sz="1600" b="1">
+                <a:solidFill>
+                  <a:srgbClr val="002060"/>
                 </a:solidFill>
                 <a:latin typeface="Arial"/>
-                <a:cs typeface="Arial"/>
               </a:rPr>
               <a:t>4</a:t>
             </a:r>
@@ -55379,99 +56279,98 @@
       </p:sp>
       <p:sp>
         <p:nvSpPr>
-          <p:cNvPr id="34" name="Text 32"/>
-          <p:cNvSpPr/>
-          <p:nvPr/>
-        </p:nvSpPr>
-        <p:spPr>
-          <a:xfrm>
-            <a:off x="1298448" y="3566160"/>
-            <a:ext cx="2423160" cy="1234440"/>
+          <p:cNvPr id="160" name="TextBox 159"/>
+          <p:cNvSpPr txBox="1"/>
+          <p:nvPr/>
+        </p:nvSpPr>
+        <p:spPr>
+          <a:xfrm>
+            <a:off x="1298448" y="3479292"/>
+            <a:ext cx="2286000" cy="457200"/>
           </a:xfrm>
           <a:prstGeom prst="rect">
             <a:avLst/>
           </a:prstGeom>
           <a:noFill/>
-          <a:ln/>
-        </p:spPr>
-        <p:txBody>
-          <a:bodyPr wrap="square" lIns="91440" tIns="45720" rIns="91440" bIns="45720" rtlCol="0" anchor="ctr"/>
-          <a:lstStyle/>
-          <a:p>
-            <a:pPr marL="0" indent="0">
-              <a:lnSpc>
-                <a:spcPct val="102000"/>
-              </a:lnSpc>
-              <a:buNone/>
-            </a:pPr>
-            <a:r>
-              <a:rPr lang="en-US" sz="1300" b="1">
-                <a:solidFill>
-                  <a:schemeClr val="bg1"/>
+          <a:ln>
+            <a:noFill/>
+          </a:ln>
+        </p:spPr>
+        <p:txBody>
+          <a:bodyPr wrap="none" anchor="ctr" lIns="0" rIns="0" tIns="0" bIns="0">
+            <a:spAutoFit/>
+          </a:bodyPr>
+          <a:lstStyle/>
+          <a:p>
+            <a:pPr algn="l"/>
+            <a:r>
+              <a:rPr sz="1300" b="1">
+                <a:solidFill>
+                  <a:srgbClr val="FFFFFF"/>
                 </a:solidFill>
                 <a:latin typeface="Calibri"/>
-                <a:ea typeface="Calibri"/>
-                <a:cs typeface="Calibri"/>
               </a:rPr>
               <a:t>EXECUTION</a:t>
             </a:r>
-            <a:endParaRPr lang="en-US" sz="1300">
-              <a:solidFill>
-                <a:schemeClr val="bg1"/>
-              </a:solidFill>
-              <a:latin typeface="Calibri"/>
-              <a:ea typeface="Calibri"/>
-              <a:cs typeface="Calibri"/>
-            </a:endParaRPr>
-          </a:p>
-        </p:txBody>
-      </p:sp>
-      <p:sp>
-        <p:nvSpPr>
-          <p:cNvPr id="35" name="Shape 33"/>
-          <p:cNvSpPr/>
-          <p:nvPr/>
-        </p:nvSpPr>
-        <p:spPr>
-          <a:xfrm>
-            <a:off x="3849624" y="4183380"/>
-            <a:ext cx="219456" cy="0"/>
-          </a:xfrm>
-          <a:prstGeom prst="line">
-            <a:avLst/>
-          </a:prstGeom>
-          <a:noFill/>
-          <a:ln w="31750">
-            <a:solidFill>
-              <a:srgbClr val="5B6584"/>
-            </a:solidFill>
-            <a:prstDash val="solid"/>
-            <a:tailEnd type="triangle"/>
+          </a:p>
+        </p:txBody>
+      </p:sp>
+      <p:sp>
+        <p:nvSpPr>
+          <p:cNvPr id="161" name="Rectangle 160"/>
+          <p:cNvSpPr/>
+          <p:nvPr/>
+        </p:nvSpPr>
+        <p:spPr>
+          <a:xfrm>
+            <a:off x="3822191" y="3698748"/>
+            <a:ext cx="256032" cy="18288"/>
+          </a:xfrm>
+          <a:prstGeom prst="rect">
+            <a:avLst/>
+          </a:prstGeom>
+          <a:solidFill>
+            <a:srgbClr val="5B6584"/>
+          </a:solidFill>
+          <a:ln>
+            <a:noFill/>
           </a:ln>
         </p:spPr>
-        <p:txBody>
-          <a:bodyPr/>
-          <a:lstStyle/>
-          <a:p>
-            <a:endParaRPr/>
-          </a:p>
-        </p:txBody>
-      </p:sp>
-      <p:sp>
-        <p:nvSpPr>
-          <p:cNvPr id="36" name="Shape 34"/>
-          <p:cNvSpPr/>
-          <p:nvPr/>
-        </p:nvSpPr>
-        <p:spPr>
-          <a:xfrm>
-            <a:off x="4114800" y="3566160"/>
-            <a:ext cx="7315200" cy="1234440"/>
-          </a:xfrm>
-          <a:prstGeom prst="roundRect">
-            <a:avLst>
-              <a:gd name="adj" fmla="val 7407"/>
-            </a:avLst>
+        <p:style>
+          <a:lnRef idx="1">
+            <a:schemeClr val="accent1"/>
+          </a:lnRef>
+          <a:fillRef idx="3">
+            <a:schemeClr val="accent1"/>
+          </a:fillRef>
+          <a:effectRef idx="2">
+            <a:schemeClr val="accent1"/>
+          </a:effectRef>
+          <a:fontRef idx="minor">
+            <a:schemeClr val="lt1"/>
+          </a:fontRef>
+        </p:style>
+        <p:txBody>
+          <a:bodyPr rtlCol="0" anchor="ctr"/>
+          <a:lstStyle/>
+          <a:p>
+            <a:pPr algn="ctr"/>
+          </a:p>
+        </p:txBody>
+      </p:sp>
+      <p:sp>
+        <p:nvSpPr>
+          <p:cNvPr id="162" name="Rectangle 161"/>
+          <p:cNvSpPr/>
+          <p:nvPr/>
+        </p:nvSpPr>
+        <p:spPr>
+          <a:xfrm>
+            <a:off x="4114800" y="2999232"/>
+            <a:ext cx="7528255" cy="1417320"/>
+          </a:xfrm>
+          <a:prstGeom prst="rect">
+            <a:avLst/>
           </a:prstGeom>
           <a:solidFill>
             <a:srgbClr val="FFFFFF"/>
@@ -55480,139 +56379,146 @@
             <a:solidFill>
               <a:srgbClr val="CADCFC"/>
             </a:solidFill>
-            <a:prstDash val="solid"/>
           </a:ln>
         </p:spPr>
-        <p:txBody>
-          <a:bodyPr/>
-          <a:lstStyle/>
-          <a:p>
-            <a:endParaRPr/>
-          </a:p>
-        </p:txBody>
-      </p:sp>
-      <p:sp>
-        <p:nvSpPr>
-          <p:cNvPr id="37" name="Text 35"/>
-          <p:cNvSpPr/>
-          <p:nvPr/>
-        </p:nvSpPr>
-        <p:spPr>
-          <a:xfrm>
-            <a:off x="4343400" y="3749040"/>
-            <a:ext cx="6858000" cy="365760"/>
+        <p:style>
+          <a:lnRef idx="1">
+            <a:schemeClr val="accent1"/>
+          </a:lnRef>
+          <a:fillRef idx="3">
+            <a:schemeClr val="accent1"/>
+          </a:fillRef>
+          <a:effectRef idx="2">
+            <a:schemeClr val="accent1"/>
+          </a:effectRef>
+          <a:fontRef idx="minor">
+            <a:schemeClr val="lt1"/>
+          </a:fontRef>
+        </p:style>
+        <p:txBody>
+          <a:bodyPr rtlCol="0" anchor="ctr"/>
+          <a:lstStyle/>
+          <a:p>
+            <a:pPr algn="ctr"/>
+          </a:p>
+        </p:txBody>
+      </p:sp>
+      <p:sp>
+        <p:nvSpPr>
+          <p:cNvPr id="163" name="TextBox 162"/>
+          <p:cNvSpPr txBox="1"/>
+          <p:nvPr/>
+        </p:nvSpPr>
+        <p:spPr>
+          <a:xfrm>
+            <a:off x="4343400" y="3182112"/>
+            <a:ext cx="7071055" cy="1051560"/>
           </a:xfrm>
           <a:prstGeom prst="rect">
             <a:avLst/>
           </a:prstGeom>
           <a:noFill/>
-          <a:ln/>
-        </p:spPr>
-        <p:txBody>
-          <a:bodyPr wrap="square" rtlCol="0" anchor="ctr"/>
-          <a:lstStyle/>
-          <a:p>
-            <a:pPr marL="0" indent="0">
-              <a:buNone/>
+          <a:ln>
+            <a:noFill/>
+          </a:ln>
+        </p:spPr>
+        <p:txBody>
+          <a:bodyPr wrap="square" lIns="0" rIns="0" tIns="0" bIns="0">
+            <a:spAutoFit/>
+          </a:bodyPr>
+          <a:lstStyle/>
+          <a:p>
+            <a:pPr>
+              <a:spcBef>
+                <a:spcPts val="0"/>
+              </a:spcBef>
+              <a:spcAft>
+                <a:spcPts val="400"/>
+              </a:spcAft>
             </a:pPr>
             <a:r>
-              <a:rPr lang="en-US" sz="1150" b="1">
+              <a:rPr sz="1100" b="1">
                 <a:solidFill>
                   <a:srgbClr val="1B1F3B"/>
                 </a:solidFill>
-                <a:latin typeface="Calibri" pitchFamily="34" charset="0"/>
-                <a:ea typeface="Calibri" pitchFamily="34" charset="-122"/>
-                <a:cs typeface="Calibri" pitchFamily="34" charset="-120"/>
+                <a:latin typeface="Calibri"/>
               </a:rPr>
               <a:t>Azure  ·  GitHub  ·  Terraform  ·  ArgoCD  ·  Kubernetes  ·  Key Vault  ·  Databases</a:t>
             </a:r>
-            <a:endParaRPr lang="en-US" sz="1150"/>
-          </a:p>
-        </p:txBody>
-      </p:sp>
-      <p:sp>
-        <p:nvSpPr>
-          <p:cNvPr id="38" name="Text 36"/>
-          <p:cNvSpPr/>
-          <p:nvPr/>
-        </p:nvSpPr>
-        <p:spPr>
-          <a:xfrm>
-            <a:off x="4343400" y="4169664"/>
-            <a:ext cx="6858000" cy="502920"/>
-          </a:xfrm>
-          <a:prstGeom prst="rect">
-            <a:avLst/>
-          </a:prstGeom>
-          <a:noFill/>
-          <a:ln/>
-        </p:spPr>
-        <p:txBody>
-          <a:bodyPr wrap="square" lIns="91440" tIns="45720" rIns="91440" bIns="45720" rtlCol="0" anchor="ctr"/>
-          <a:lstStyle/>
+          </a:p>
           <a:p>
             <a:pPr>
-              <a:lnSpc>
-                <a:spcPct val="115000"/>
-              </a:lnSpc>
+              <a:spcBef>
+                <a:spcPts val="0"/>
+              </a:spcBef>
+              <a:spcAft>
+                <a:spcPts val="0"/>
+              </a:spcAft>
             </a:pPr>
             <a:r>
-              <a:rPr lang="en-US" sz="1000" dirty="0">
+              <a:rPr sz="950" b="0">
                 <a:solidFill>
                   <a:srgbClr val="5B6584"/>
                 </a:solidFill>
                 <a:latin typeface="Calibri"/>
-                <a:ea typeface="Calibri"/>
-                <a:cs typeface="Calibri"/>
               </a:rPr>
               <a:t>Where change actually lands — DaaS triggers the CI/CD and cloud tooling, orchestrating it rather than replacing it.</a:t>
             </a:r>
-            <a:endParaRPr lang="en-US" sz="1000" dirty="0">
-              <a:latin typeface="Calibri"/>
-              <a:ea typeface="Calibri"/>
-              <a:cs typeface="Calibri"/>
-            </a:endParaRPr>
-          </a:p>
-        </p:txBody>
-      </p:sp>
-      <p:sp>
-        <p:nvSpPr>
-          <p:cNvPr id="39" name="Shape 37"/>
-          <p:cNvSpPr/>
-          <p:nvPr/>
-        </p:nvSpPr>
-        <p:spPr>
-          <a:xfrm>
-            <a:off x="548640" y="4983480"/>
-            <a:ext cx="3246120" cy="1234440"/>
-          </a:xfrm>
-          <a:prstGeom prst="roundRect">
-            <a:avLst>
-              <a:gd name="adj" fmla="val 7407"/>
-            </a:avLst>
+          </a:p>
+        </p:txBody>
+      </p:sp>
+      <p:sp>
+        <p:nvSpPr>
+          <p:cNvPr id="164" name="Rectangle 163"/>
+          <p:cNvSpPr/>
+          <p:nvPr/>
+        </p:nvSpPr>
+        <p:spPr>
+          <a:xfrm>
+            <a:off x="548640" y="4535424"/>
+            <a:ext cx="3246120" cy="1417320"/>
+          </a:xfrm>
+          <a:prstGeom prst="rect">
+            <a:avLst/>
           </a:prstGeom>
           <a:solidFill>
             <a:srgbClr val="002060"/>
           </a:solidFill>
-          <a:ln/>
-        </p:spPr>
-        <p:txBody>
-          <a:bodyPr/>
-          <a:lstStyle/>
-          <a:p>
-            <a:endParaRPr/>
-          </a:p>
-        </p:txBody>
-      </p:sp>
-      <p:sp>
-        <p:nvSpPr>
-          <p:cNvPr id="40" name="Shape 38"/>
-          <p:cNvSpPr/>
-          <p:nvPr/>
-        </p:nvSpPr>
-        <p:spPr>
-          <a:xfrm>
-            <a:off x="777240" y="5390388"/>
+          <a:ln>
+            <a:noFill/>
+          </a:ln>
+        </p:spPr>
+        <p:style>
+          <a:lnRef idx="1">
+            <a:schemeClr val="accent1"/>
+          </a:lnRef>
+          <a:fillRef idx="3">
+            <a:schemeClr val="accent1"/>
+          </a:fillRef>
+          <a:effectRef idx="2">
+            <a:schemeClr val="accent1"/>
+          </a:effectRef>
+          <a:fontRef idx="minor">
+            <a:schemeClr val="lt1"/>
+          </a:fontRef>
+        </p:style>
+        <p:txBody>
+          <a:bodyPr rtlCol="0" anchor="ctr"/>
+          <a:lstStyle/>
+          <a:p>
+            <a:pPr algn="ctr"/>
+          </a:p>
+        </p:txBody>
+      </p:sp>
+      <p:sp>
+        <p:nvSpPr>
+          <p:cNvPr id="165" name="Oval 164"/>
+          <p:cNvSpPr/>
+          <p:nvPr/>
+        </p:nvSpPr>
+        <p:spPr>
+          <a:xfrm>
+            <a:off x="777240" y="5033772"/>
             <a:ext cx="420624" cy="420624"/>
           </a:xfrm>
           <a:prstGeom prst="ellipse">
@@ -55621,189 +56527,147 @@
           <a:solidFill>
             <a:srgbClr val="FFFFFF"/>
           </a:solidFill>
-          <a:ln/>
-        </p:spPr>
-        <p:txBody>
-          <a:bodyPr/>
-          <a:lstStyle/>
-          <a:p>
-            <a:endParaRPr/>
-          </a:p>
-        </p:txBody>
-      </p:sp>
-      <p:sp>
-        <p:nvSpPr>
-          <p:cNvPr id="41" name="Text 39"/>
-          <p:cNvSpPr/>
-          <p:nvPr/>
-        </p:nvSpPr>
-        <p:spPr>
-          <a:xfrm>
-            <a:off x="777240" y="5390388"/>
-            <a:ext cx="420624" cy="420624"/>
-          </a:xfrm>
-          <a:prstGeom prst="rect">
-            <a:avLst/>
-          </a:prstGeom>
-          <a:noFill/>
-          <a:ln/>
-        </p:spPr>
-        <p:txBody>
-          <a:bodyPr wrap="square" lIns="0" tIns="0" rIns="0" bIns="0" rtlCol="0" anchor="ctr"/>
-          <a:lstStyle/>
-          <a:p>
-            <a:pPr marL="0" indent="0" algn="ctr">
-              <a:buNone/>
-            </a:pPr>
-            <a:r>
-              <a:rPr lang="en-US" sz="1600" b="1">
-                <a:solidFill>
-                  <a:schemeClr val="tx1">
-                    <a:lumMod val="85000"/>
-                    <a:lumOff val="15000"/>
-                  </a:schemeClr>
+          <a:ln>
+            <a:noFill/>
+          </a:ln>
+        </p:spPr>
+        <p:style>
+          <a:lnRef idx="1">
+            <a:schemeClr val="accent1"/>
+          </a:lnRef>
+          <a:fillRef idx="3">
+            <a:schemeClr val="accent1"/>
+          </a:fillRef>
+          <a:effectRef idx="2">
+            <a:schemeClr val="accent1"/>
+          </a:effectRef>
+          <a:fontRef idx="minor">
+            <a:schemeClr val="lt1"/>
+          </a:fontRef>
+        </p:style>
+        <p:txBody>
+          <a:bodyPr rtlCol="0" anchor="ctr" lIns="0" rIns="0" tIns="0" bIns="0"/>
+          <a:lstStyle/>
+          <a:p>
+            <a:pPr algn="ctr"/>
+            <a:r>
+              <a:rPr sz="1600" b="1">
+                <a:solidFill>
+                  <a:srgbClr val="002060"/>
                 </a:solidFill>
                 <a:latin typeface="Arial"/>
-                <a:ea typeface="Arial" pitchFamily="34" charset="-122"/>
-                <a:cs typeface="Arial"/>
               </a:rPr>
               <a:t>5</a:t>
             </a:r>
-            <a:endParaRPr lang="en-US" sz="1600">
-              <a:solidFill>
-                <a:schemeClr val="tx1">
-                  <a:lumMod val="85000"/>
-                  <a:lumOff val="15000"/>
-                </a:schemeClr>
-              </a:solidFill>
-              <a:latin typeface="Arial"/>
-              <a:cs typeface="Arial"/>
-            </a:endParaRPr>
-          </a:p>
-        </p:txBody>
-      </p:sp>
-      <p:sp>
-        <p:nvSpPr>
-          <p:cNvPr id="42" name="Text 40"/>
-          <p:cNvSpPr/>
-          <p:nvPr/>
-        </p:nvSpPr>
-        <p:spPr>
-          <a:xfrm>
-            <a:off x="1298448" y="4983480"/>
-            <a:ext cx="2423160" cy="1234440"/>
+          </a:p>
+        </p:txBody>
+      </p:sp>
+      <p:sp>
+        <p:nvSpPr>
+          <p:cNvPr id="166" name="TextBox 165"/>
+          <p:cNvSpPr txBox="1"/>
+          <p:nvPr/>
+        </p:nvSpPr>
+        <p:spPr>
+          <a:xfrm>
+            <a:off x="1298448" y="4924044"/>
+            <a:ext cx="2286000" cy="640080"/>
           </a:xfrm>
           <a:prstGeom prst="rect">
             <a:avLst/>
           </a:prstGeom>
           <a:noFill/>
-          <a:ln/>
-        </p:spPr>
-        <p:txBody>
-          <a:bodyPr wrap="square" lIns="91440" tIns="45720" rIns="91440" bIns="45720" rtlCol="0" anchor="ctr"/>
-          <a:lstStyle/>
-          <a:p>
-            <a:pPr marL="0" indent="0">
-              <a:lnSpc>
-                <a:spcPct val="102000"/>
-              </a:lnSpc>
-              <a:buNone/>
-            </a:pPr>
-            <a:r>
-              <a:rPr lang="en-US" sz="1300" b="1">
-                <a:solidFill>
-                  <a:schemeClr val="bg1"/>
+          <a:ln>
+            <a:noFill/>
+          </a:ln>
+        </p:spPr>
+        <p:txBody>
+          <a:bodyPr wrap="square" anchor="ctr" lIns="0" rIns="0" tIns="0" bIns="0">
+            <a:spAutoFit/>
+          </a:bodyPr>
+          <a:lstStyle/>
+          <a:p>
+            <a:pPr algn="l"/>
+            <a:r>
+              <a:rPr sz="1300" b="1">
+                <a:solidFill>
+                  <a:srgbClr val="FFFFFF"/>
                 </a:solidFill>
                 <a:latin typeface="Calibri"/>
-                <a:ea typeface="Calibri"/>
-                <a:cs typeface="Calibri"/>
               </a:rPr>
               <a:t>OBSERVABILITY</a:t>
             </a:r>
-            <a:endParaRPr lang="en-US" sz="1300">
-              <a:solidFill>
-                <a:schemeClr val="bg1"/>
-              </a:solidFill>
-              <a:latin typeface="Calibri"/>
-              <a:ea typeface="Calibri"/>
-              <a:cs typeface="Calibri"/>
-            </a:endParaRPr>
-          </a:p>
-          <a:p>
-            <a:pPr marL="0" indent="0">
-              <a:lnSpc>
-                <a:spcPct val="102000"/>
-              </a:lnSpc>
-              <a:buNone/>
-            </a:pPr>
-            <a:r>
-              <a:rPr lang="en-US" sz="1300" b="1">
-                <a:solidFill>
-                  <a:schemeClr val="bg1"/>
+          </a:p>
+          <a:p>
+            <a:pPr algn="l"/>
+            <a:r>
+              <a:rPr sz="1300" b="1">
+                <a:solidFill>
+                  <a:srgbClr val="FFFFFF"/>
                 </a:solidFill>
                 <a:latin typeface="Calibri"/>
-                <a:ea typeface="Calibri"/>
-                <a:cs typeface="Calibri"/>
               </a:rPr>
               <a:t>&amp; REPORTING</a:t>
             </a:r>
-            <a:endParaRPr lang="en-US" sz="1300">
-              <a:solidFill>
-                <a:schemeClr val="bg1"/>
-              </a:solidFill>
-              <a:latin typeface="Calibri"/>
-              <a:ea typeface="Calibri"/>
-              <a:cs typeface="Calibri"/>
-            </a:endParaRPr>
-          </a:p>
-        </p:txBody>
-      </p:sp>
-      <p:sp>
-        <p:nvSpPr>
-          <p:cNvPr id="43" name="Shape 41"/>
-          <p:cNvSpPr/>
-          <p:nvPr/>
-        </p:nvSpPr>
-        <p:spPr>
-          <a:xfrm>
-            <a:off x="3849624" y="5600700"/>
-            <a:ext cx="219456" cy="0"/>
-          </a:xfrm>
-          <a:prstGeom prst="line">
-            <a:avLst/>
-          </a:prstGeom>
-          <a:noFill/>
-          <a:ln w="31750">
-            <a:solidFill>
-              <a:srgbClr val="5B6584"/>
-            </a:solidFill>
-            <a:prstDash val="solid"/>
-            <a:tailEnd type="triangle"/>
+          </a:p>
+        </p:txBody>
+      </p:sp>
+      <p:sp>
+        <p:nvSpPr>
+          <p:cNvPr id="167" name="Rectangle 166"/>
+          <p:cNvSpPr/>
+          <p:nvPr/>
+        </p:nvSpPr>
+        <p:spPr>
+          <a:xfrm>
+            <a:off x="3822191" y="5234940"/>
+            <a:ext cx="256032" cy="18288"/>
+          </a:xfrm>
+          <a:prstGeom prst="rect">
+            <a:avLst/>
+          </a:prstGeom>
+          <a:solidFill>
+            <a:srgbClr val="5B6584"/>
+          </a:solidFill>
+          <a:ln>
+            <a:noFill/>
           </a:ln>
         </p:spPr>
-        <p:txBody>
-          <a:bodyPr/>
-          <a:lstStyle/>
-          <a:p>
-            <a:endParaRPr/>
-          </a:p>
-        </p:txBody>
-      </p:sp>
-      <p:sp>
-        <p:nvSpPr>
-          <p:cNvPr id="44" name="Shape 42"/>
-          <p:cNvSpPr/>
-          <p:nvPr/>
-        </p:nvSpPr>
-        <p:spPr>
-          <a:xfrm>
-            <a:off x="4114800" y="4983480"/>
-            <a:ext cx="7315200" cy="1234440"/>
-          </a:xfrm>
-          <a:prstGeom prst="roundRect">
-            <a:avLst>
-              <a:gd name="adj" fmla="val 7407"/>
-            </a:avLst>
+        <p:style>
+          <a:lnRef idx="1">
+            <a:schemeClr val="accent1"/>
+          </a:lnRef>
+          <a:fillRef idx="3">
+            <a:schemeClr val="accent1"/>
+          </a:fillRef>
+          <a:effectRef idx="2">
+            <a:schemeClr val="accent1"/>
+          </a:effectRef>
+          <a:fontRef idx="minor">
+            <a:schemeClr val="lt1"/>
+          </a:fontRef>
+        </p:style>
+        <p:txBody>
+          <a:bodyPr rtlCol="0" anchor="ctr"/>
+          <a:lstStyle/>
+          <a:p>
+            <a:pPr algn="ctr"/>
+          </a:p>
+        </p:txBody>
+      </p:sp>
+      <p:sp>
+        <p:nvSpPr>
+          <p:cNvPr id="168" name="Rectangle 167"/>
+          <p:cNvSpPr/>
+          <p:nvPr/>
+        </p:nvSpPr>
+        <p:spPr>
+          <a:xfrm>
+            <a:off x="4114800" y="4535424"/>
+            <a:ext cx="7528255" cy="1417320"/>
+          </a:xfrm>
+          <a:prstGeom prst="rect">
+            <a:avLst/>
           </a:prstGeom>
           <a:solidFill>
             <a:srgbClr val="FFFFFF"/>
@@ -55812,646 +56676,90 @@
             <a:solidFill>
               <a:srgbClr val="CADCFC"/>
             </a:solidFill>
-            <a:prstDash val="solid"/>
           </a:ln>
         </p:spPr>
-        <p:txBody>
-          <a:bodyPr/>
-          <a:lstStyle/>
-          <a:p>
-            <a:endParaRPr/>
-          </a:p>
-        </p:txBody>
-      </p:sp>
-      <p:sp>
-        <p:nvSpPr>
-          <p:cNvPr id="45" name="Text 43"/>
-          <p:cNvSpPr/>
-          <p:nvPr/>
-        </p:nvSpPr>
-        <p:spPr>
-          <a:xfrm>
-            <a:off x="4343400" y="5166360"/>
-            <a:ext cx="6858000" cy="365760"/>
+        <p:style>
+          <a:lnRef idx="1">
+            <a:schemeClr val="accent1"/>
+          </a:lnRef>
+          <a:fillRef idx="3">
+            <a:schemeClr val="accent1"/>
+          </a:fillRef>
+          <a:effectRef idx="2">
+            <a:schemeClr val="accent1"/>
+          </a:effectRef>
+          <a:fontRef idx="minor">
+            <a:schemeClr val="lt1"/>
+          </a:fontRef>
+        </p:style>
+        <p:txBody>
+          <a:bodyPr rtlCol="0" anchor="ctr"/>
+          <a:lstStyle/>
+          <a:p>
+            <a:pPr algn="ctr"/>
+          </a:p>
+        </p:txBody>
+      </p:sp>
+      <p:sp>
+        <p:nvSpPr>
+          <p:cNvPr id="169" name="TextBox 168"/>
+          <p:cNvSpPr txBox="1"/>
+          <p:nvPr/>
+        </p:nvSpPr>
+        <p:spPr>
+          <a:xfrm>
+            <a:off x="4343400" y="4718304"/>
+            <a:ext cx="7071055" cy="1051560"/>
           </a:xfrm>
           <a:prstGeom prst="rect">
             <a:avLst/>
           </a:prstGeom>
           <a:noFill/>
-          <a:ln/>
-        </p:spPr>
-        <p:txBody>
-          <a:bodyPr wrap="square" rtlCol="0" anchor="ctr"/>
-          <a:lstStyle/>
-          <a:p>
-            <a:pPr marL="0" indent="0">
-              <a:buNone/>
+          <a:ln>
+            <a:noFill/>
+          </a:ln>
+        </p:spPr>
+        <p:txBody>
+          <a:bodyPr wrap="square" lIns="0" rIns="0" tIns="0" bIns="0">
+            <a:spAutoFit/>
+          </a:bodyPr>
+          <a:lstStyle/>
+          <a:p>
+            <a:pPr>
+              <a:spcBef>
+                <a:spcPts val="0"/>
+              </a:spcBef>
+              <a:spcAft>
+                <a:spcPts val="400"/>
+              </a:spcAft>
             </a:pPr>
             <a:r>
-              <a:rPr lang="en-US" sz="1150" b="1">
+              <a:rPr sz="1050" b="1">
                 <a:solidFill>
                   <a:srgbClr val="1B1F3B"/>
                 </a:solidFill>
-                <a:latin typeface="Calibri" pitchFamily="34" charset="0"/>
-                <a:ea typeface="Calibri" pitchFamily="34" charset="-122"/>
-                <a:cs typeface="Calibri" pitchFamily="34" charset="-120"/>
+                <a:latin typeface="Calibri"/>
               </a:rPr>
               <a:t>Approval Dashboard  ·  Environment Dashboard  ·  Release Summary  ·  Audit Trail  ·  Downloadable Reports</a:t>
             </a:r>
-            <a:endParaRPr lang="en-US" sz="1150"/>
-          </a:p>
-        </p:txBody>
-      </p:sp>
-      <p:sp>
-        <p:nvSpPr>
-          <p:cNvPr id="46" name="Text 44"/>
-          <p:cNvSpPr/>
-          <p:nvPr/>
-        </p:nvSpPr>
-        <p:spPr>
-          <a:xfrm>
-            <a:off x="4343400" y="5586984"/>
-            <a:ext cx="6858000" cy="502920"/>
-          </a:xfrm>
-          <a:prstGeom prst="rect">
-            <a:avLst/>
-          </a:prstGeom>
-          <a:noFill/>
-          <a:ln/>
-        </p:spPr>
-        <p:txBody>
-          <a:bodyPr wrap="square" lIns="91440" tIns="45720" rIns="91440" bIns="45720" rtlCol="0" anchor="ctr"/>
-          <a:lstStyle/>
-          <a:p>
-            <a:pPr marL="0" indent="0">
-              <a:lnSpc>
-                <a:spcPct val="115000"/>
-              </a:lnSpc>
-              <a:buNone/>
+          </a:p>
+          <a:p>
+            <a:pPr>
+              <a:spcBef>
+                <a:spcPts val="0"/>
+              </a:spcBef>
+              <a:spcAft>
+                <a:spcPts val="0"/>
+              </a:spcAft>
             </a:pPr>
             <a:r>
-              <a:rPr lang="en-US" sz="1000">
+              <a:rPr sz="950" b="0">
                 <a:solidFill>
                   <a:srgbClr val="5B6584"/>
                 </a:solidFill>
                 <a:latin typeface="Calibri"/>
-                <a:ea typeface="Calibri"/>
-                <a:cs typeface="Calibri"/>
               </a:rPr>
               <a:t>Every action surfaces here — dashboards, summaries, a full audit trail, and downloadable reports for change-management records.</a:t>
-            </a:r>
-            <a:endParaRPr lang="en-US" sz="1000">
-              <a:latin typeface="Calibri"/>
-              <a:ea typeface="Calibri"/>
-              <a:cs typeface="Calibri"/>
-            </a:endParaRPr>
-          </a:p>
-        </p:txBody>
-      </p:sp>
-      <p:sp>
-        <p:nvSpPr>
-          <p:cNvPr id="47" name="Text 45"/>
-          <p:cNvSpPr/>
-          <p:nvPr/>
-        </p:nvSpPr>
-        <p:spPr>
-          <a:xfrm>
-            <a:off x="457200" y="6519672"/>
-            <a:ext cx="8229600" cy="274320"/>
-          </a:xfrm>
-          <a:prstGeom prst="rect">
-            <a:avLst/>
-          </a:prstGeom>
-          <a:noFill/>
-          <a:ln/>
-        </p:spPr>
-        <p:txBody>
-          <a:bodyPr wrap="square" lIns="91440" tIns="45720" rIns="91440" bIns="45720" rtlCol="0" anchor="ctr"/>
-          <a:lstStyle/>
-          <a:p>
-            <a:pPr marL="0" indent="0">
-              <a:buNone/>
-            </a:pPr>
-            <a:r>
-              <a:rPr lang="en-US" sz="1000">
-                <a:solidFill>
-                  <a:srgbClr val="5B6584"/>
-                </a:solidFill>
-                <a:latin typeface="Calibri"/>
-                <a:ea typeface="Calibri"/>
-                <a:cs typeface="Calibri"/>
-              </a:rPr>
-              <a:t>Deployment as a Service</a:t>
-            </a:r>
-            <a:endParaRPr lang="en-US" sz="1000"/>
-          </a:p>
-        </p:txBody>
-      </p:sp>
-      <p:sp>
-        <p:nvSpPr>
-          <p:cNvPr id="48" name="Text 46"/>
-          <p:cNvSpPr/>
-          <p:nvPr/>
-        </p:nvSpPr>
-        <p:spPr>
-          <a:xfrm>
-            <a:off x="11274552" y="6519672"/>
-            <a:ext cx="457200" cy="274320"/>
-          </a:xfrm>
-          <a:prstGeom prst="rect">
-            <a:avLst/>
-          </a:prstGeom>
-          <a:noFill/>
-          <a:ln/>
-        </p:spPr>
-        <p:txBody>
-          <a:bodyPr wrap="square" rtlCol="0" anchor="ctr"/>
-          <a:lstStyle/>
-          <a:p>
-            <a:pPr marL="0" indent="0" algn="r">
-              <a:buNone/>
-            </a:pPr>
-            <a:r>
-              <a:rPr lang="en-US" sz="1000">
-                <a:solidFill>
-                  <a:srgbClr val="5B6584"/>
-                </a:solidFill>
-                <a:latin typeface="Calibri" pitchFamily="34" charset="0"/>
-                <a:ea typeface="Calibri" pitchFamily="34" charset="-122"/>
-                <a:cs typeface="Calibri" pitchFamily="34" charset="-120"/>
-              </a:rPr>
-              <a:t>6</a:t>
-            </a:r>
-            <a:endParaRPr lang="en-US" sz="1000"/>
-          </a:p>
-        </p:txBody>
-      </p:sp>
-      <p:sp>
-        <p:nvSpPr>
-          <p:cNvPr id="102" name="Shape">
-            <a:extLst>
-              <a:ext uri="{FF2B5EF4-FFF2-40B4-BE49-F238E27FC236}">
-                <a16:creationId xmlns:a16="http://schemas.microsoft.com/office/drawing/2014/main" id="{663072FA-AE2F-DE61-24C6-C152AC5C91B7}"/>
-              </a:ext>
-            </a:extLst>
-          </p:cNvPr>
-          <p:cNvSpPr/>
-          <p:nvPr/>
-        </p:nvSpPr>
-        <p:spPr>
-          <a:xfrm>
-            <a:off x="1206752" y="824080"/>
-            <a:ext cx="1700000" cy="329184"/>
-          </a:xfrm>
-          <a:prstGeom prst="roundRect">
-            <a:avLst>
-              <a:gd name="adj" fmla="val 16667"/>
-            </a:avLst>
-          </a:prstGeom>
-          <a:solidFill>
-            <a:srgbClr val="FFFFFF"/>
-          </a:solidFill>
-          <a:ln w="15875">
-            <a:solidFill>
-              <a:srgbClr val="CADCFC"/>
-            </a:solidFill>
-            <a:prstDash val="solid"/>
-          </a:ln>
-        </p:spPr>
-        <p:txBody>
-          <a:bodyPr/>
-          <a:lstStyle/>
-          <a:p>
-            <a:endParaRPr/>
-          </a:p>
-        </p:txBody>
-      </p:sp>
-      <p:sp>
-        <p:nvSpPr>
-          <p:cNvPr id="104" name="TB">
-            <a:extLst>
-              <a:ext uri="{FF2B5EF4-FFF2-40B4-BE49-F238E27FC236}">
-                <a16:creationId xmlns:a16="http://schemas.microsoft.com/office/drawing/2014/main" id="{17F8AEC4-8F42-508A-E999-3A621FB85A5E}"/>
-              </a:ext>
-            </a:extLst>
-          </p:cNvPr>
-          <p:cNvSpPr>
-            <a:spLocks noGrp="1"/>
-          </p:cNvSpPr>
-          <p:nvPr/>
-        </p:nvSpPr>
-        <p:spPr>
-          <a:xfrm>
-            <a:off x="1206752" y="824080"/>
-            <a:ext cx="1700000" cy="329184"/>
-          </a:xfrm>
-          <a:prstGeom prst="rect">
-            <a:avLst/>
-          </a:prstGeom>
-          <a:noFill/>
-          <a:ln/>
-        </p:spPr>
-        <p:txBody>
-          <a:bodyPr wrap="square" lIns="0" tIns="0" rIns="0" bIns="0" rtlCol="0" anchor="ctr"/>
-          <a:lstStyle/>
-          <a:p>
-            <a:pPr marL="0" indent="0" algn="ctr">
-              <a:buNone/>
-            </a:pPr>
-            <a:r>
-              <a:rPr lang="en-US" sz="850" b="1" dirty="0">
-                <a:solidFill>
-                  <a:srgbClr val="5B6584"/>
-                </a:solidFill>
-                <a:latin typeface="Calibri" pitchFamily="34" charset="0"/>
-              </a:rPr>
-              <a:t>ANALYSE</a:t>
-            </a:r>
-          </a:p>
-        </p:txBody>
-      </p:sp>
-      <p:sp>
-        <p:nvSpPr>
-          <p:cNvPr id="106" name="TB">
-            <a:extLst>
-              <a:ext uri="{FF2B5EF4-FFF2-40B4-BE49-F238E27FC236}">
-                <a16:creationId xmlns:a16="http://schemas.microsoft.com/office/drawing/2014/main" id="{A34183A8-FF46-D7D0-8230-8A0890604D7D}"/>
-              </a:ext>
-            </a:extLst>
-          </p:cNvPr>
-          <p:cNvSpPr>
-            <a:spLocks noGrp="1"/>
-          </p:cNvSpPr>
-          <p:nvPr/>
-        </p:nvSpPr>
-        <p:spPr>
-          <a:xfrm>
-            <a:off x="2906752" y="824080"/>
-            <a:ext cx="182880" cy="329184"/>
-          </a:xfrm>
-          <a:prstGeom prst="rect">
-            <a:avLst/>
-          </a:prstGeom>
-          <a:noFill/>
-          <a:ln/>
-        </p:spPr>
-        <p:txBody>
-          <a:bodyPr wrap="square" lIns="0" tIns="0" rIns="0" bIns="0" rtlCol="0" anchor="ctr"/>
-          <a:lstStyle/>
-          <a:p>
-            <a:pPr marL="0" indent="0" algn="ctr">
-              <a:buNone/>
-            </a:pPr>
-            <a:r>
-              <a:rPr lang="en-US" sz="1000" b="0" i="0" dirty="0">
-                <a:solidFill>
-                  <a:srgbClr val="CADCFC"/>
-                </a:solidFill>
-                <a:latin typeface="Calibri" pitchFamily="34" charset="0"/>
-              </a:rPr>
-              <a:t>→</a:t>
-            </a:r>
-          </a:p>
-        </p:txBody>
-      </p:sp>
-      <p:sp>
-        <p:nvSpPr>
-          <p:cNvPr id="108" name="Shape">
-            <a:extLst>
-              <a:ext uri="{FF2B5EF4-FFF2-40B4-BE49-F238E27FC236}">
-                <a16:creationId xmlns:a16="http://schemas.microsoft.com/office/drawing/2014/main" id="{025D2BC1-1572-6626-F341-868E594311DF}"/>
-              </a:ext>
-            </a:extLst>
-          </p:cNvPr>
-          <p:cNvSpPr/>
-          <p:nvPr/>
-        </p:nvSpPr>
-        <p:spPr>
-          <a:xfrm>
-            <a:off x="3053056" y="824080"/>
-            <a:ext cx="1700000" cy="329184"/>
-          </a:xfrm>
-          <a:prstGeom prst="roundRect">
-            <a:avLst>
-              <a:gd name="adj" fmla="val 16667"/>
-            </a:avLst>
-          </a:prstGeom>
-          <a:solidFill>
-            <a:srgbClr val="FFFFFF"/>
-          </a:solidFill>
-          <a:ln w="15875">
-            <a:solidFill>
-              <a:srgbClr val="CADCFC"/>
-            </a:solidFill>
-            <a:prstDash val="solid"/>
-          </a:ln>
-        </p:spPr>
-        <p:txBody>
-          <a:bodyPr/>
-          <a:lstStyle/>
-          <a:p>
-            <a:endParaRPr/>
-          </a:p>
-        </p:txBody>
-      </p:sp>
-      <p:sp>
-        <p:nvSpPr>
-          <p:cNvPr id="110" name="TB">
-            <a:extLst>
-              <a:ext uri="{FF2B5EF4-FFF2-40B4-BE49-F238E27FC236}">
-                <a16:creationId xmlns:a16="http://schemas.microsoft.com/office/drawing/2014/main" id="{3951963A-8AA1-B1AB-EC8F-97A7674A60F8}"/>
-              </a:ext>
-            </a:extLst>
-          </p:cNvPr>
-          <p:cNvSpPr>
-            <a:spLocks noGrp="1"/>
-          </p:cNvSpPr>
-          <p:nvPr/>
-        </p:nvSpPr>
-        <p:spPr>
-          <a:xfrm>
-            <a:off x="3002256" y="824080"/>
-            <a:ext cx="1700000" cy="329184"/>
-          </a:xfrm>
-          <a:prstGeom prst="rect">
-            <a:avLst/>
-          </a:prstGeom>
-          <a:noFill/>
-          <a:ln/>
-        </p:spPr>
-        <p:txBody>
-          <a:bodyPr wrap="square" lIns="0" tIns="0" rIns="0" bIns="0" rtlCol="0" anchor="ctr"/>
-          <a:lstStyle/>
-          <a:p>
-            <a:pPr marL="0" indent="0" algn="ctr">
-              <a:buNone/>
-            </a:pPr>
-            <a:r>
-              <a:rPr lang="en-US" sz="850" b="1" i="0" dirty="0">
-                <a:solidFill>
-                  <a:srgbClr val="5B6584"/>
-                </a:solidFill>
-                <a:latin typeface="Calibri" pitchFamily="34" charset="0"/>
-              </a:rPr>
-              <a:t>CONNECT</a:t>
-            </a:r>
-          </a:p>
-        </p:txBody>
-      </p:sp>
-      <p:sp>
-        <p:nvSpPr>
-          <p:cNvPr id="112" name="TB">
-            <a:extLst>
-              <a:ext uri="{FF2B5EF4-FFF2-40B4-BE49-F238E27FC236}">
-                <a16:creationId xmlns:a16="http://schemas.microsoft.com/office/drawing/2014/main" id="{F3FE6C29-8EB4-98E5-77D2-E3AC8578F79B}"/>
-              </a:ext>
-            </a:extLst>
-          </p:cNvPr>
-          <p:cNvSpPr>
-            <a:spLocks noGrp="1"/>
-          </p:cNvSpPr>
-          <p:nvPr/>
-        </p:nvSpPr>
-        <p:spPr>
-          <a:xfrm>
-            <a:off x="4753056" y="824080"/>
-            <a:ext cx="182880" cy="329184"/>
-          </a:xfrm>
-          <a:prstGeom prst="rect">
-            <a:avLst/>
-          </a:prstGeom>
-          <a:noFill/>
-          <a:ln/>
-        </p:spPr>
-        <p:txBody>
-          <a:bodyPr wrap="square" lIns="0" tIns="0" rIns="0" bIns="0" rtlCol="0" anchor="ctr"/>
-          <a:lstStyle/>
-          <a:p>
-            <a:pPr marL="0" indent="0" algn="ctr">
-              <a:buNone/>
-            </a:pPr>
-            <a:r>
-              <a:rPr lang="en-US" sz="1000" b="0" i="0" dirty="0">
-                <a:solidFill>
-                  <a:srgbClr val="CADCFC"/>
-                </a:solidFill>
-                <a:latin typeface="Calibri" pitchFamily="34" charset="0"/>
-              </a:rPr>
-              <a:t>→</a:t>
-            </a:r>
-          </a:p>
-        </p:txBody>
-      </p:sp>
-      <p:sp>
-        <p:nvSpPr>
-          <p:cNvPr id="114" name="Shape">
-            <a:extLst>
-              <a:ext uri="{FF2B5EF4-FFF2-40B4-BE49-F238E27FC236}">
-                <a16:creationId xmlns:a16="http://schemas.microsoft.com/office/drawing/2014/main" id="{FF166FFB-34F4-3D38-371B-86AB0AD3BB06}"/>
-              </a:ext>
-            </a:extLst>
-          </p:cNvPr>
-          <p:cNvSpPr/>
-          <p:nvPr/>
-        </p:nvSpPr>
-        <p:spPr>
-          <a:xfrm>
-            <a:off x="4899360" y="824080"/>
-            <a:ext cx="1700000" cy="329184"/>
-          </a:xfrm>
-          <a:prstGeom prst="roundRect">
-            <a:avLst>
-              <a:gd name="adj" fmla="val 16667"/>
-            </a:avLst>
-          </a:prstGeom>
-          <a:solidFill>
-            <a:srgbClr val="FFFFFF"/>
-          </a:solidFill>
-          <a:ln w="15875">
-            <a:solidFill>
-              <a:srgbClr val="CADCFC"/>
-            </a:solidFill>
-            <a:prstDash val="solid"/>
-          </a:ln>
-        </p:spPr>
-        <p:txBody>
-          <a:bodyPr/>
-          <a:lstStyle/>
-          <a:p>
-            <a:endParaRPr/>
-          </a:p>
-        </p:txBody>
-      </p:sp>
-      <p:sp>
-        <p:nvSpPr>
-          <p:cNvPr id="116" name="TB">
-            <a:extLst>
-              <a:ext uri="{FF2B5EF4-FFF2-40B4-BE49-F238E27FC236}">
-                <a16:creationId xmlns:a16="http://schemas.microsoft.com/office/drawing/2014/main" id="{8E1B151E-757A-6A54-7085-1115859D9C97}"/>
-              </a:ext>
-            </a:extLst>
-          </p:cNvPr>
-          <p:cNvSpPr>
-            <a:spLocks noGrp="1"/>
-          </p:cNvSpPr>
-          <p:nvPr/>
-        </p:nvSpPr>
-        <p:spPr>
-          <a:xfrm>
-            <a:off x="4889200" y="824080"/>
-            <a:ext cx="1700000" cy="329184"/>
-          </a:xfrm>
-          <a:prstGeom prst="rect">
-            <a:avLst/>
-          </a:prstGeom>
-          <a:noFill/>
-          <a:ln/>
-        </p:spPr>
-        <p:txBody>
-          <a:bodyPr wrap="square" lIns="0" tIns="0" rIns="0" bIns="0" rtlCol="0" anchor="ctr"/>
-          <a:lstStyle/>
-          <a:p>
-            <a:pPr marL="0" indent="0" algn="ctr">
-              <a:buNone/>
-            </a:pPr>
-            <a:r>
-              <a:rPr lang="en-US" sz="850" b="1" i="0" dirty="0">
-                <a:solidFill>
-                  <a:srgbClr val="5B6584"/>
-                </a:solidFill>
-                <a:latin typeface="Calibri" pitchFamily="34" charset="0"/>
-              </a:rPr>
-              <a:t>CONFIGURE</a:t>
-            </a:r>
-          </a:p>
-        </p:txBody>
-      </p:sp>
-      <p:sp>
-        <p:nvSpPr>
-          <p:cNvPr id="118" name="TB">
-            <a:extLst>
-              <a:ext uri="{FF2B5EF4-FFF2-40B4-BE49-F238E27FC236}">
-                <a16:creationId xmlns:a16="http://schemas.microsoft.com/office/drawing/2014/main" id="{58A1D3C1-634C-8670-13FA-036EAE6B7514}"/>
-              </a:ext>
-            </a:extLst>
-          </p:cNvPr>
-          <p:cNvSpPr>
-            <a:spLocks noGrp="1"/>
-          </p:cNvSpPr>
-          <p:nvPr/>
-        </p:nvSpPr>
-        <p:spPr>
-          <a:xfrm>
-            <a:off x="6599360" y="824080"/>
-            <a:ext cx="182880" cy="329184"/>
-          </a:xfrm>
-          <a:prstGeom prst="rect">
-            <a:avLst/>
-          </a:prstGeom>
-          <a:noFill/>
-          <a:ln/>
-        </p:spPr>
-        <p:txBody>
-          <a:bodyPr wrap="square" lIns="0" tIns="0" rIns="0" bIns="0" rtlCol="0" anchor="ctr"/>
-          <a:lstStyle/>
-          <a:p>
-            <a:pPr marL="0" indent="0" algn="ctr">
-              <a:buNone/>
-            </a:pPr>
-            <a:r>
-              <a:rPr lang="en-US" sz="1000" b="0" i="0" dirty="0">
-                <a:solidFill>
-                  <a:srgbClr val="CADCFC"/>
-                </a:solidFill>
-                <a:latin typeface="Calibri" pitchFamily="34" charset="0"/>
-              </a:rPr>
-              <a:t>→</a:t>
-            </a:r>
-          </a:p>
-        </p:txBody>
-      </p:sp>
-      <p:sp>
-        <p:nvSpPr>
-          <p:cNvPr id="120" name="Shape">
-            <a:extLst>
-              <a:ext uri="{FF2B5EF4-FFF2-40B4-BE49-F238E27FC236}">
-                <a16:creationId xmlns:a16="http://schemas.microsoft.com/office/drawing/2014/main" id="{A5CCA27E-E3B9-A1CB-802E-76458D7B00F4}"/>
-              </a:ext>
-            </a:extLst>
-          </p:cNvPr>
-          <p:cNvSpPr/>
-          <p:nvPr/>
-        </p:nvSpPr>
-        <p:spPr>
-          <a:xfrm>
-            <a:off x="6745664" y="824080"/>
-            <a:ext cx="1700000" cy="329184"/>
-          </a:xfrm>
-          <a:prstGeom prst="roundRect">
-            <a:avLst>
-              <a:gd name="adj" fmla="val 16667"/>
-            </a:avLst>
-          </a:prstGeom>
-          <a:solidFill>
-            <a:srgbClr val="0F1B35"/>
-          </a:solidFill>
-          <a:ln w="15875">
-            <a:solidFill>
-              <a:srgbClr val="0F1B35"/>
-            </a:solidFill>
-            <a:prstDash val="solid"/>
-          </a:ln>
-        </p:spPr>
-        <p:txBody>
-          <a:bodyPr/>
-          <a:lstStyle/>
-          <a:p>
-            <a:endParaRPr/>
-          </a:p>
-        </p:txBody>
-      </p:sp>
-      <p:sp>
-        <p:nvSpPr>
-          <p:cNvPr id="122" name="TB">
-            <a:extLst>
-              <a:ext uri="{FF2B5EF4-FFF2-40B4-BE49-F238E27FC236}">
-                <a16:creationId xmlns:a16="http://schemas.microsoft.com/office/drawing/2014/main" id="{4DCAE412-66AF-1486-7E5D-916DC5393390}"/>
-              </a:ext>
-            </a:extLst>
-          </p:cNvPr>
-          <p:cNvSpPr>
-            <a:spLocks noGrp="1"/>
-          </p:cNvSpPr>
-          <p:nvPr/>
-        </p:nvSpPr>
-        <p:spPr>
-          <a:xfrm>
-            <a:off x="6694864" y="803760"/>
-            <a:ext cx="1700000" cy="329184"/>
-          </a:xfrm>
-          <a:prstGeom prst="rect">
-            <a:avLst/>
-          </a:prstGeom>
-          <a:noFill/>
-          <a:ln/>
-        </p:spPr>
-        <p:txBody>
-          <a:bodyPr wrap="square" lIns="0" tIns="0" rIns="0" bIns="0" rtlCol="0" anchor="ctr"/>
-          <a:lstStyle/>
-          <a:p>
-            <a:pPr marL="0" indent="0" algn="ctr">
-              <a:buNone/>
-            </a:pPr>
-            <a:r>
-              <a:rPr lang="en-US" sz="850" b="1" i="0" dirty="0">
-                <a:solidFill>
-                  <a:schemeClr val="bg1"/>
-                </a:solidFill>
-                <a:latin typeface="Calibri"/>
-                <a:ea typeface="Calibri"/>
-                <a:cs typeface="Calibri"/>
-              </a:rPr>
-              <a:t>RUN</a:t>
             </a:r>
           </a:p>
         </p:txBody>
